--- a/DaprPubSub.pptx
+++ b/DaprPubSub.pptx
@@ -6,8 +6,9 @@
   </p:sldMasterIdLst>
   <p:sldIdLst>
     <p:sldId id="256" r:id="rId2"/>
-    <p:sldId id="257" r:id="rId3"/>
-    <p:sldId id="258" r:id="rId4"/>
+    <p:sldId id="259" r:id="rId3"/>
+    <p:sldId id="257" r:id="rId4"/>
+    <p:sldId id="258" r:id="rId5"/>
   </p:sldIdLst>
   <p:sldSz cx="12192000" cy="6858000"/>
   <p:notesSz cx="6858000" cy="9144000"/>
@@ -106,6 +107,11 @@
       </a:defRPr>
     </a:lvl9pPr>
   </p:defaultTextStyle>
+  <p:extLst>
+    <p:ext uri="{EFAFB233-063F-42B5-8137-9DF3F51BA10A}">
+      <p15:sldGuideLst xmlns:p15="http://schemas.microsoft.com/office/powerpoint/2012/main"/>
+    </p:ext>
+  </p:extLst>
 </p:presentation>
 </file>
 
@@ -3366,7 +3372,7 @@
         </p:nvSpPr>
         <p:spPr>
           <a:xfrm>
-            <a:off x="635000" y="635000"/>
+            <a:off x="635000" y="104577"/>
             <a:ext cx="10922000" cy="615553"/>
           </a:xfrm>
           <a:prstGeom prst="rect">
@@ -3410,7 +3416,7 @@
         </p:nvCxnSpPr>
         <p:spPr>
           <a:xfrm>
-            <a:off x="635000" y="1803400"/>
+            <a:off x="543560" y="1090168"/>
             <a:ext cx="10922000" cy="0"/>
           </a:xfrm>
           <a:prstGeom prst="line">
@@ -3451,7 +3457,7 @@
         </p:nvSpPr>
         <p:spPr>
           <a:xfrm>
-            <a:off x="635000" y="1524000"/>
+            <a:off x="543560" y="690264"/>
             <a:ext cx="10922000" cy="307777"/>
           </a:xfrm>
           <a:prstGeom prst="rect">
@@ -3495,7 +3501,7 @@
         </p:nvSpPr>
         <p:spPr>
           <a:xfrm>
-            <a:off x="762000" y="2082800"/>
+            <a:off x="635000" y="1182296"/>
             <a:ext cx="10795000" cy="312906"/>
           </a:xfrm>
           <a:prstGeom prst="rect">
@@ -3510,7 +3516,7 @@
           <a:lstStyle/>
           <a:p>
             <a:r>
-              <a:rPr lang="nb-NO" sz="1400" b="1">
+              <a:rPr lang="nb-NO" sz="1400" b="1" dirty="0">
                 <a:solidFill>
                   <a:srgbClr val="146DFF"/>
                 </a:solidFill>
@@ -3518,14 +3524,30 @@
               <a:t>▸  Sidecar pattern   </a:t>
             </a:r>
             <a:r>
-              <a:rPr lang="en-US" sz="1300">
+              <a:rPr lang="en-US" sz="1300" dirty="0">
                 <a:solidFill>
                   <a:srgbClr val="DCE1EB"/>
                 </a:solidFill>
               </a:rPr>
-              <a:t>Your service calls localhost; Dapr handles brokers, retries, secrets — no library imports required</a:t>
-            </a:r>
-            <a:endParaRPr lang="ru-RU" sz="1300">
+              <a:t>Your service calls localhost; </a:t>
+            </a:r>
+            <a:r>
+              <a:rPr lang="en-US" sz="1300" dirty="0" err="1">
+                <a:solidFill>
+                  <a:srgbClr val="DCE1EB"/>
+                </a:solidFill>
+              </a:rPr>
+              <a:t>Dapr</a:t>
+            </a:r>
+            <a:r>
+              <a:rPr lang="en-US" sz="1300" dirty="0">
+                <a:solidFill>
+                  <a:srgbClr val="DCE1EB"/>
+                </a:solidFill>
+              </a:rPr>
+              <a:t> handles brokers, retries, secrets — no library imports required</a:t>
+            </a:r>
+            <a:endParaRPr lang="ru-RU" sz="1300" dirty="0">
               <a:solidFill>
                 <a:srgbClr val="DCE1EB"/>
               </a:solidFill>
@@ -3547,7 +3569,7 @@
         </p:nvSpPr>
         <p:spPr>
           <a:xfrm>
-            <a:off x="762000" y="2667000"/>
+            <a:off x="635000" y="1401668"/>
             <a:ext cx="10795000" cy="312906"/>
           </a:xfrm>
           <a:prstGeom prst="rect">
@@ -3562,7 +3584,7 @@
           <a:lstStyle/>
           <a:p>
             <a:r>
-              <a:rPr lang="nb-NO" sz="1400" b="1">
+              <a:rPr lang="nb-NO" sz="1400" b="1" dirty="0">
                 <a:solidFill>
                   <a:srgbClr val="146DFF"/>
                 </a:solidFill>
@@ -3570,14 +3592,14 @@
               <a:t>▸  10 building blocks   </a:t>
             </a:r>
             <a:r>
-              <a:rPr lang="en-US" sz="1300">
+              <a:rPr lang="en-US" sz="1300" dirty="0">
                 <a:solidFill>
                   <a:srgbClr val="DCE1EB"/>
                 </a:solidFill>
               </a:rPr>
               <a:t>Pub/Sub, Service Invocation, State, Actors, Workflows, Bindings, Secrets, Config, Lock, Crypto</a:t>
             </a:r>
-            <a:endParaRPr lang="ru-RU" sz="1300">
+            <a:endParaRPr lang="ru-RU" sz="1300" dirty="0">
               <a:solidFill>
                 <a:srgbClr val="DCE1EB"/>
               </a:solidFill>
@@ -3599,7 +3621,7 @@
         </p:nvSpPr>
         <p:spPr>
           <a:xfrm>
-            <a:off x="762000" y="3251200"/>
+            <a:off x="635000" y="1643225"/>
             <a:ext cx="10795000" cy="312906"/>
           </a:xfrm>
           <a:prstGeom prst="rect">
@@ -3614,7 +3636,7 @@
           <a:lstStyle/>
           <a:p>
             <a:r>
-              <a:rPr lang="nb-NO" sz="1400" b="1">
+              <a:rPr lang="nb-NO" sz="1400" b="1" dirty="0">
                 <a:solidFill>
                   <a:srgbClr val="146DFF"/>
                 </a:solidFill>
@@ -3622,14 +3644,14 @@
               <a:t>▸  Pluggable components   </a:t>
             </a:r>
             <a:r>
-              <a:rPr lang="en-US" sz="1300">
+              <a:rPr lang="en-US" sz="1300" dirty="0">
                 <a:solidFill>
                   <a:srgbClr val="DCE1EB"/>
                 </a:solidFill>
               </a:rPr>
               <a:t>Switch from Azure Service Bus to Kafka or RabbitMQ by editing one YAML file — zero code change</a:t>
             </a:r>
-            <a:endParaRPr lang="ru-RU" sz="1300">
+            <a:endParaRPr lang="ru-RU" sz="1300" dirty="0">
               <a:solidFill>
                 <a:srgbClr val="DCE1EB"/>
               </a:solidFill>
@@ -3651,7 +3673,7 @@
         </p:nvSpPr>
         <p:spPr>
           <a:xfrm>
-            <a:off x="762000" y="3835400"/>
+            <a:off x="635000" y="1925174"/>
             <a:ext cx="10795000" cy="312906"/>
           </a:xfrm>
           <a:prstGeom prst="rect">
@@ -3666,7 +3688,7 @@
           <a:lstStyle/>
           <a:p>
             <a:r>
-              <a:rPr lang="nb-NO" sz="1400" b="1">
+              <a:rPr lang="nb-NO" sz="1400" b="1" dirty="0">
                 <a:solidFill>
                   <a:srgbClr val="146DFF"/>
                 </a:solidFill>
@@ -3674,14 +3696,30 @@
               <a:t>▸  Built-in resiliency   </a:t>
             </a:r>
             <a:r>
-              <a:rPr lang="en-US" sz="1300">
+              <a:rPr lang="en-US" sz="1300" dirty="0">
                 <a:solidFill>
                   <a:srgbClr val="DCE1EB"/>
                 </a:solidFill>
               </a:rPr>
-              <a:t>Retries, timeouts, circuit breakers declared in resiliency.yaml — not scattered through application code</a:t>
-            </a:r>
-            <a:endParaRPr lang="ru-RU" sz="1300">
+              <a:t>Retries, timeouts, circuit breakers declared in </a:t>
+            </a:r>
+            <a:r>
+              <a:rPr lang="en-US" sz="1300" dirty="0" err="1">
+                <a:solidFill>
+                  <a:srgbClr val="DCE1EB"/>
+                </a:solidFill>
+              </a:rPr>
+              <a:t>resiliency.yaml</a:t>
+            </a:r>
+            <a:r>
+              <a:rPr lang="en-US" sz="1300" dirty="0">
+                <a:solidFill>
+                  <a:srgbClr val="DCE1EB"/>
+                </a:solidFill>
+              </a:rPr>
+              <a:t> — not scattered through application code</a:t>
+            </a:r>
+            <a:endParaRPr lang="ru-RU" sz="1300" dirty="0">
               <a:solidFill>
                 <a:srgbClr val="DCE1EB"/>
               </a:solidFill>
@@ -3703,7 +3741,7 @@
         </p:nvSpPr>
         <p:spPr>
           <a:xfrm>
-            <a:off x="762000" y="4419600"/>
+            <a:off x="635000" y="2180373"/>
             <a:ext cx="10795000" cy="312906"/>
           </a:xfrm>
           <a:prstGeom prst="rect">
@@ -3718,7 +3756,7 @@
           <a:lstStyle/>
           <a:p>
             <a:r>
-              <a:rPr lang="nb-NO" sz="1400" b="1">
+              <a:rPr lang="nb-NO" sz="1400" b="1" dirty="0">
                 <a:solidFill>
                   <a:srgbClr val="146DFF"/>
                 </a:solidFill>
@@ -3726,14 +3764,30 @@
               <a:t>▸  Observability   </a:t>
             </a:r>
             <a:r>
-              <a:rPr lang="en-US" sz="1300">
+              <a:rPr lang="en-US" sz="1300" dirty="0">
                 <a:solidFill>
                   <a:srgbClr val="DCE1EB"/>
                 </a:solidFill>
               </a:rPr>
-              <a:t>W3C distributed tracing, Prometheus metrics, structured logs via OpenTelemetry — automatic propagation</a:t>
-            </a:r>
-            <a:endParaRPr lang="ru-RU" sz="1300">
+              <a:t>W3C distributed tracing, Prometheus metrics, structured logs via </a:t>
+            </a:r>
+            <a:r>
+              <a:rPr lang="en-US" sz="1300" dirty="0" err="1">
+                <a:solidFill>
+                  <a:srgbClr val="DCE1EB"/>
+                </a:solidFill>
+              </a:rPr>
+              <a:t>OpenTelemetry</a:t>
+            </a:r>
+            <a:r>
+              <a:rPr lang="en-US" sz="1300" dirty="0">
+                <a:solidFill>
+                  <a:srgbClr val="DCE1EB"/>
+                </a:solidFill>
+              </a:rPr>
+              <a:t> — automatic propagation</a:t>
+            </a:r>
+            <a:endParaRPr lang="ru-RU" sz="1300" dirty="0">
               <a:solidFill>
                 <a:srgbClr val="DCE1EB"/>
               </a:solidFill>
@@ -3741,6 +3795,53 @@
           </a:p>
         </p:txBody>
       </p:sp>
+      <p:pic>
+        <p:nvPicPr>
+          <p:cNvPr id="1026" name="Picture 2">
+            <a:extLst>
+              <a:ext uri="{FF2B5EF4-FFF2-40B4-BE49-F238E27FC236}">
+                <a16:creationId xmlns:a16="http://schemas.microsoft.com/office/drawing/2014/main" id="{2B722F00-C65B-C8F0-A666-116D79336738}"/>
+              </a:ext>
+            </a:extLst>
+          </p:cNvPr>
+          <p:cNvPicPr>
+            <a:picLocks noChangeAspect="1" noChangeArrowheads="1"/>
+          </p:cNvPicPr>
+          <p:nvPr/>
+        </p:nvPicPr>
+        <p:blipFill>
+          <a:blip r:embed="rId2">
+            <a:extLst>
+              <a:ext uri="{28A0092B-C50C-407E-A947-70E740481C1C}">
+                <a14:useLocalDpi xmlns:a14="http://schemas.microsoft.com/office/drawing/2010/main" val="0"/>
+              </a:ext>
+            </a:extLst>
+          </a:blip>
+          <a:srcRect/>
+          <a:stretch>
+            <a:fillRect/>
+          </a:stretch>
+        </p:blipFill>
+        <p:spPr bwMode="auto">
+          <a:xfrm>
+            <a:off x="1563624" y="2501455"/>
+            <a:ext cx="7744968" cy="4356545"/>
+          </a:xfrm>
+          <a:prstGeom prst="rect">
+            <a:avLst/>
+          </a:prstGeom>
+          <a:noFill/>
+          <a:extLst>
+            <a:ext uri="{909E8E84-426E-40DD-AFC4-6F175D3DCCD1}">
+              <a14:hiddenFill xmlns:a14="http://schemas.microsoft.com/office/drawing/2010/main">
+                <a:solidFill>
+                  <a:srgbClr val="FFFFFF"/>
+                </a:solidFill>
+              </a14:hiddenFill>
+            </a:ext>
+          </a:extLst>
+        </p:spPr>
+      </p:pic>
     </p:spTree>
     <p:extLst>
       <p:ext uri="{BB962C8B-B14F-4D97-AF65-F5344CB8AC3E}">
@@ -3755,6 +3856,365 @@
 </file>
 
 <file path=ppt/slides/slide2.xml><?xml version="1.0" encoding="utf-8"?>
+<p:sld xmlns:a="http://schemas.openxmlformats.org/drawingml/2006/main" xmlns:r="http://schemas.openxmlformats.org/officeDocument/2006/relationships" xmlns:p="http://schemas.openxmlformats.org/presentationml/2006/main">
+  <p:cSld>
+    <p:spTree>
+      <p:nvGrpSpPr>
+        <p:cNvPr id="1" name=""/>
+        <p:cNvGrpSpPr/>
+        <p:nvPr/>
+      </p:nvGrpSpPr>
+      <p:grpSpPr>
+        <a:xfrm>
+          <a:off x="0" y="0"/>
+          <a:ext cx="0" cy="0"/>
+          <a:chOff x="0" y="0"/>
+          <a:chExt cx="0" cy="0"/>
+        </a:xfrm>
+      </p:grpSpPr>
+      <p:sp>
+        <p:nvSpPr>
+          <p:cNvPr id="3" name="TextBox 2">
+            <a:extLst>
+              <a:ext uri="{FF2B5EF4-FFF2-40B4-BE49-F238E27FC236}">
+                <a16:creationId xmlns:a16="http://schemas.microsoft.com/office/drawing/2014/main" id="{25B48D5F-1246-D446-A0AE-8545C0A7A8DB}"/>
+              </a:ext>
+            </a:extLst>
+          </p:cNvPr>
+          <p:cNvSpPr txBox="1"/>
+          <p:nvPr/>
+        </p:nvSpPr>
+        <p:spPr>
+          <a:xfrm>
+            <a:off x="2324862" y="529852"/>
+            <a:ext cx="6094476" cy="4832092"/>
+          </a:xfrm>
+          <a:prstGeom prst="rect">
+            <a:avLst/>
+          </a:prstGeom>
+          <a:noFill/>
+        </p:spPr>
+        <p:txBody>
+          <a:bodyPr wrap="square">
+            <a:spAutoFit/>
+          </a:bodyPr>
+          <a:lstStyle/>
+          <a:p>
+            <a:pPr>
+              <a:buNone/>
+            </a:pPr>
+            <a:r>
+              <a:rPr lang="en-US" sz="1100" dirty="0"/>
+              <a:t>1. Vendor and Broker Portability</a:t>
+            </a:r>
+          </a:p>
+          <a:p>
+            <a:pPr>
+              <a:buNone/>
+            </a:pPr>
+            <a:r>
+              <a:rPr lang="en-US" sz="1100" dirty="0" err="1"/>
+              <a:t>Dapr</a:t>
+            </a:r>
+            <a:r>
+              <a:rPr lang="en-US" sz="1100" dirty="0"/>
+              <a:t> abstracts the underlying message broker behind a consistent API. This allows you to swap brokers (e.g., using </a:t>
+            </a:r>
+            <a:r>
+              <a:rPr lang="en-US" sz="1100" b="1" dirty="0"/>
+              <a:t>Redis Streams</a:t>
+            </a:r>
+            <a:r>
+              <a:rPr lang="en-US" sz="1100" dirty="0"/>
+              <a:t> for local development and </a:t>
+            </a:r>
+            <a:r>
+              <a:rPr lang="en-US" sz="1100" b="1" dirty="0"/>
+              <a:t>Azure Service Bus</a:t>
+            </a:r>
+            <a:r>
+              <a:rPr lang="en-US" sz="1100" dirty="0"/>
+              <a:t> for production) by simply changing a configuration file, without altering any application code. </a:t>
+            </a:r>
+          </a:p>
+          <a:p>
+            <a:pPr>
+              <a:buNone/>
+            </a:pPr>
+            <a:r>
+              <a:rPr lang="en-US" sz="1100" dirty="0"/>
+              <a:t>2. Standardized Communication (</a:t>
+            </a:r>
+            <a:r>
+              <a:rPr lang="en-US" sz="1100" dirty="0" err="1"/>
+              <a:t>CloudEvents</a:t>
+            </a:r>
+            <a:r>
+              <a:rPr lang="en-US" sz="1100" dirty="0"/>
+              <a:t>)</a:t>
+            </a:r>
+          </a:p>
+          <a:p>
+            <a:pPr>
+              <a:buNone/>
+            </a:pPr>
+            <a:r>
+              <a:rPr lang="en-US" sz="1100" dirty="0" err="1"/>
+              <a:t>Dapr</a:t>
+            </a:r>
+            <a:r>
+              <a:rPr lang="en-US" sz="1100" dirty="0"/>
+              <a:t> automatically wraps outgoing messages in a standardized </a:t>
+            </a:r>
+            <a:r>
+              <a:rPr lang="en-US" sz="1100" b="1" dirty="0" err="1"/>
+              <a:t>CloudEvents</a:t>
+            </a:r>
+            <a:r>
+              <a:rPr lang="en-US" sz="1100" dirty="0"/>
+              <a:t> envelope. This ensures consistent metadata and formatting across all services, which simplifies cross-platform integration and event routing. </a:t>
+            </a:r>
+          </a:p>
+          <a:p>
+            <a:pPr>
+              <a:buNone/>
+            </a:pPr>
+            <a:r>
+              <a:rPr lang="en-US" sz="1100" dirty="0"/>
+              <a:t>3. Built-in Resiliency and Reliability </a:t>
+            </a:r>
+          </a:p>
+          <a:p>
+            <a:pPr>
+              <a:buNone/>
+            </a:pPr>
+            <a:r>
+              <a:rPr lang="en-US" sz="1100" dirty="0" err="1"/>
+              <a:t>Dapr</a:t>
+            </a:r>
+            <a:r>
+              <a:rPr lang="en-US" sz="1100" dirty="0"/>
+              <a:t> provides features that you would otherwise have to implement manually using a direct SDK: </a:t>
+            </a:r>
+          </a:p>
+          <a:p>
+            <a:pPr>
+              <a:buFont typeface="Arial" panose="020B0604020202020204" pitchFamily="34" charset="0"/>
+              <a:buChar char="•"/>
+            </a:pPr>
+            <a:r>
+              <a:rPr lang="en-US" sz="1100" b="1" dirty="0"/>
+              <a:t>At-least-once delivery:</a:t>
+            </a:r>
+            <a:r>
+              <a:rPr lang="en-US" sz="1100" dirty="0"/>
+              <a:t> </a:t>
+            </a:r>
+            <a:r>
+              <a:rPr lang="en-US" sz="1100" dirty="0" err="1"/>
+              <a:t>Dapr</a:t>
+            </a:r>
+            <a:r>
+              <a:rPr lang="en-US" sz="1100" dirty="0"/>
+              <a:t> guarantees messages reach subscribers even if the application or broker temporarily fails.</a:t>
+            </a:r>
+          </a:p>
+          <a:p>
+            <a:pPr>
+              <a:buFont typeface="Arial" panose="020B0604020202020204" pitchFamily="34" charset="0"/>
+              <a:buChar char="•"/>
+            </a:pPr>
+            <a:r>
+              <a:rPr lang="en-US" sz="1100" b="1" dirty="0"/>
+              <a:t>Automatic Retries:</a:t>
+            </a:r>
+            <a:r>
+              <a:rPr lang="en-US" sz="1100" dirty="0"/>
+              <a:t> </a:t>
+            </a:r>
+            <a:r>
+              <a:rPr lang="en-US" sz="1100" dirty="0" err="1"/>
+              <a:t>Dapr</a:t>
+            </a:r>
+            <a:r>
+              <a:rPr lang="en-US" sz="1100" dirty="0"/>
+              <a:t> handles retries for failed message deliveries based on configurable policies.</a:t>
+            </a:r>
+          </a:p>
+          <a:p>
+            <a:pPr>
+              <a:buFont typeface="Arial" panose="020B0604020202020204" pitchFamily="34" charset="0"/>
+              <a:buChar char="•"/>
+            </a:pPr>
+            <a:r>
+              <a:rPr lang="en-US" sz="1100" b="1" dirty="0"/>
+              <a:t>Competing Consumers:</a:t>
+            </a:r>
+            <a:r>
+              <a:rPr lang="en-US" sz="1100" dirty="0"/>
+              <a:t> </a:t>
+            </a:r>
+            <a:r>
+              <a:rPr lang="en-US" sz="1100" dirty="0" err="1"/>
+              <a:t>Dapr</a:t>
+            </a:r>
+            <a:r>
+              <a:rPr lang="en-US" sz="1100" dirty="0"/>
+              <a:t> manages consumer groups and ensures that only one instance of a scaled-out service processes a specific message. </a:t>
+            </a:r>
+          </a:p>
+          <a:p>
+            <a:pPr>
+              <a:buNone/>
+            </a:pPr>
+            <a:r>
+              <a:rPr lang="en-US" sz="1100" dirty="0"/>
+              <a:t>4. Reduced Code Complexity </a:t>
+            </a:r>
+          </a:p>
+          <a:p>
+            <a:pPr>
+              <a:buFont typeface="Arial" panose="020B0604020202020204" pitchFamily="34" charset="0"/>
+              <a:buChar char="•"/>
+            </a:pPr>
+            <a:r>
+              <a:rPr lang="en-US" sz="1100" b="1" dirty="0"/>
+              <a:t>Smaller SDK footprint:</a:t>
+            </a:r>
+            <a:r>
+              <a:rPr lang="en-US" sz="1100" dirty="0"/>
+              <a:t> By using </a:t>
+            </a:r>
+            <a:r>
+              <a:rPr lang="en-US" sz="1100" dirty="0" err="1"/>
+              <a:t>Dapr’s</a:t>
+            </a:r>
+            <a:r>
+              <a:rPr lang="en-US" sz="1100" dirty="0"/>
+              <a:t> HTTP or </a:t>
+            </a:r>
+            <a:r>
+              <a:rPr lang="en-US" sz="1100" dirty="0" err="1"/>
+              <a:t>gRPC</a:t>
+            </a:r>
+            <a:r>
+              <a:rPr lang="en-US" sz="1100" dirty="0"/>
+              <a:t> APIs, you avoid importing heavy, broker-specific SDKs into your code.</a:t>
+            </a:r>
+          </a:p>
+          <a:p>
+            <a:pPr>
+              <a:buFont typeface="Arial" panose="020B0604020202020204" pitchFamily="34" charset="0"/>
+              <a:buChar char="•"/>
+            </a:pPr>
+            <a:r>
+              <a:rPr lang="en-US" sz="1100" b="1" dirty="0"/>
+              <a:t>Simplified Subscriptions:</a:t>
+            </a:r>
+            <a:r>
+              <a:rPr lang="en-US" sz="1100" dirty="0"/>
+              <a:t> You can define subscriptions </a:t>
+            </a:r>
+            <a:r>
+              <a:rPr lang="en-US" sz="1100" b="1" dirty="0"/>
+              <a:t>declaratively</a:t>
+            </a:r>
+            <a:r>
+              <a:rPr lang="en-US" sz="1100" dirty="0"/>
+              <a:t> in YAML files rather than writing code to manage connection strings and listener loops.</a:t>
+            </a:r>
+          </a:p>
+          <a:p>
+            <a:pPr>
+              <a:buFont typeface="Arial" panose="020B0604020202020204" pitchFamily="34" charset="0"/>
+              <a:buChar char="•"/>
+            </a:pPr>
+            <a:r>
+              <a:rPr lang="en-US" sz="1100" b="1" dirty="0"/>
+              <a:t>Content-Based Routing:</a:t>
+            </a:r>
+            <a:r>
+              <a:rPr lang="en-US" sz="1100" dirty="0"/>
+              <a:t> </a:t>
+            </a:r>
+            <a:r>
+              <a:rPr lang="en-US" sz="1100" dirty="0" err="1"/>
+              <a:t>Dapr</a:t>
+            </a:r>
+            <a:r>
+              <a:rPr lang="en-US" sz="1100" dirty="0"/>
+              <a:t> allows you to route messages to different service endpoints based on the event's content without writing complex branching logic in your application. </a:t>
+            </a:r>
+          </a:p>
+          <a:p>
+            <a:pPr>
+              <a:buNone/>
+            </a:pPr>
+            <a:r>
+              <a:rPr lang="en-US" sz="1100" dirty="0"/>
+              <a:t>5. Enhanced Observability and Security </a:t>
+            </a:r>
+          </a:p>
+          <a:p>
+            <a:pPr>
+              <a:buFont typeface="Arial" panose="020B0604020202020204" pitchFamily="34" charset="0"/>
+              <a:buChar char="•"/>
+            </a:pPr>
+            <a:r>
+              <a:rPr lang="en-US" sz="1100" b="1" dirty="0"/>
+              <a:t>Tracing:</a:t>
+            </a:r>
+            <a:r>
+              <a:rPr lang="en-US" sz="1100" dirty="0"/>
+              <a:t> </a:t>
+            </a:r>
+            <a:r>
+              <a:rPr lang="en-US" sz="1100" dirty="0" err="1"/>
+              <a:t>Dapr</a:t>
+            </a:r>
+            <a:r>
+              <a:rPr lang="en-US" sz="1100" dirty="0"/>
+              <a:t> automatically injects trace headers, enabling end-to-end distributed tracing of messages through your entire system.</a:t>
+            </a:r>
+          </a:p>
+          <a:p>
+            <a:pPr>
+              <a:buFont typeface="Arial" panose="020B0604020202020204" pitchFamily="34" charset="0"/>
+              <a:buChar char="•"/>
+            </a:pPr>
+            <a:r>
+              <a:rPr lang="en-US" sz="1100" b="1" dirty="0"/>
+              <a:t>Scoped Access:</a:t>
+            </a:r>
+            <a:r>
+              <a:rPr lang="en-US" sz="1100" dirty="0"/>
+              <a:t> You can use </a:t>
+            </a:r>
+            <a:r>
+              <a:rPr lang="en-US" sz="1100" dirty="0" err="1"/>
+              <a:t>Dapr</a:t>
+            </a:r>
+            <a:r>
+              <a:rPr lang="en-US" sz="1100" dirty="0"/>
+              <a:t> components to strictly control which applications are permitted to publish or subscribe to specific topics. </a:t>
+            </a:r>
+          </a:p>
+        </p:txBody>
+      </p:sp>
+    </p:spTree>
+    <p:extLst>
+      <p:ext uri="{BB962C8B-B14F-4D97-AF65-F5344CB8AC3E}">
+        <p14:creationId xmlns:p14="http://schemas.microsoft.com/office/powerpoint/2010/main" val="1678035857"/>
+      </p:ext>
+    </p:extLst>
+  </p:cSld>
+  <p:clrMapOvr>
+    <a:masterClrMapping/>
+  </p:clrMapOvr>
+</p:sld>
+</file>
+
+<file path=ppt/slides/slide3.xml><?xml version="1.0" encoding="utf-8"?>
 <p:sld xmlns:a="http://schemas.openxmlformats.org/drawingml/2006/main" xmlns:r="http://schemas.openxmlformats.org/officeDocument/2006/relationships" xmlns:p="http://schemas.openxmlformats.org/presentationml/2006/main">
   <p:cSld>
     <p:bg>
@@ -4075,14 +4535,30 @@
           <a:lstStyle/>
           <a:p>
             <a:r>
-              <a:rPr lang="en-US" sz="1100">
+              <a:rPr lang="en-US" sz="1100" dirty="0">
                 <a:solidFill>
                   <a:srgbClr val="8CFFBE"/>
                 </a:solidFill>
               </a:rPr>
-              <a:t>Zero lines — Dapr sidecar owns the connection entirely</a:t>
-            </a:r>
-            <a:endParaRPr lang="ru-RU" sz="1100">
+              <a:t>Zero lines — </a:t>
+            </a:r>
+            <a:r>
+              <a:rPr lang="en-US" sz="1100" dirty="0" err="1">
+                <a:solidFill>
+                  <a:srgbClr val="8CFFBE"/>
+                </a:solidFill>
+              </a:rPr>
+              <a:t>Dapr</a:t>
+            </a:r>
+            <a:r>
+              <a:rPr lang="en-US" sz="1100" dirty="0">
+                <a:solidFill>
+                  <a:srgbClr val="8CFFBE"/>
+                </a:solidFill>
+              </a:rPr>
+              <a:t> sidecar owns the connection entirely</a:t>
+            </a:r>
+            <a:endParaRPr lang="ru-RU" sz="1100" dirty="0">
               <a:solidFill>
                 <a:srgbClr val="8CFFBE"/>
               </a:solidFill>
@@ -4211,14 +4687,14 @@
           <a:lstStyle/>
           <a:p>
             <a:r>
-              <a:rPr lang="nb-NO" sz="1100">
+              <a:rPr lang="nb-NO" sz="1100" dirty="0">
                 <a:solidFill>
                   <a:srgbClr val="8CFFBE"/>
                 </a:solidFill>
               </a:rPr>
               <a:t>YAML component swap — RabbitMQ, Kafka, Redis Streams; app code unchanged</a:t>
             </a:r>
-            <a:endParaRPr lang="ru-RU" sz="1100">
+            <a:endParaRPr lang="ru-RU" sz="1100" dirty="0">
               <a:solidFill>
                 <a:srgbClr val="8CFFBE"/>
               </a:solidFill>
@@ -4347,14 +4823,38 @@
           <a:lstStyle/>
           <a:p>
             <a:r>
-              <a:rPr lang="en-US" sz="1100">
+              <a:rPr lang="en-US" sz="1100" dirty="0" err="1">
                 <a:solidFill>
                   <a:srgbClr val="8CFFBE"/>
                 </a:solidFill>
               </a:rPr>
-              <a:t>requireSessions: "true" in subscription.yaml — one config line</a:t>
-            </a:r>
-            <a:endParaRPr lang="ru-RU" sz="1100">
+              <a:t>requireSessions</a:t>
+            </a:r>
+            <a:r>
+              <a:rPr lang="en-US" sz="1100" dirty="0">
+                <a:solidFill>
+                  <a:srgbClr val="8CFFBE"/>
+                </a:solidFill>
+              </a:rPr>
+              <a:t>: "true" in </a:t>
+            </a:r>
+            <a:r>
+              <a:rPr lang="en-US" sz="1100" dirty="0" err="1">
+                <a:solidFill>
+                  <a:srgbClr val="8CFFBE"/>
+                </a:solidFill>
+              </a:rPr>
+              <a:t>subscription.yaml</a:t>
+            </a:r>
+            <a:r>
+              <a:rPr lang="en-US" sz="1100" dirty="0">
+                <a:solidFill>
+                  <a:srgbClr val="8CFFBE"/>
+                </a:solidFill>
+              </a:rPr>
+              <a:t> — one config line</a:t>
+            </a:r>
+            <a:endParaRPr lang="ru-RU" sz="1100" dirty="0">
               <a:solidFill>
                 <a:srgbClr val="8CFFBE"/>
               </a:solidFill>
@@ -4625,142 +5125,6 @@
                 </a:solidFill>
               </a:rPr>
               <a:t>W3C trace context propagated automatically; OpenTelemetry export built in</a:t>
-            </a:r>
-            <a:endParaRPr lang="ru-RU" sz="1100">
-              <a:solidFill>
-                <a:srgbClr val="8CFFBE"/>
-              </a:solidFill>
-            </a:endParaRPr>
-          </a:p>
-        </p:txBody>
-      </p:sp>
-      <p:sp>
-        <p:nvSpPr>
-          <p:cNvPr id="21" name="TextBox 20">
-            <a:extLst>
-              <a:ext uri="{FF2B5EF4-FFF2-40B4-BE49-F238E27FC236}">
-                <a16:creationId xmlns:a16="http://schemas.microsoft.com/office/drawing/2014/main" id="{C488D8C7-6C0C-FFC7-FD14-AD684113A69A}"/>
-              </a:ext>
-            </a:extLst>
-          </p:cNvPr>
-          <p:cNvSpPr txBox="1"/>
-          <p:nvPr/>
-        </p:nvSpPr>
-        <p:spPr>
-          <a:xfrm>
-            <a:off x="698500" y="5727700"/>
-            <a:ext cx="10922000" cy="261610"/>
-          </a:xfrm>
-          <a:prstGeom prst="rect">
-            <a:avLst/>
-          </a:prstGeom>
-          <a:noFill/>
-        </p:spPr>
-        <p:txBody>
-          <a:bodyPr vert="horz" wrap="square" rtlCol="0">
-            <a:spAutoFit/>
-          </a:bodyPr>
-          <a:lstStyle/>
-          <a:p>
-            <a:r>
-              <a:rPr lang="nb-NO" sz="1100" b="1">
-                <a:solidFill>
-                  <a:srgbClr val="A0AFC8"/>
-                </a:solidFill>
-              </a:rPr>
-              <a:t>Local development</a:t>
-            </a:r>
-            <a:endParaRPr lang="ru-RU" sz="1100" b="1">
-              <a:solidFill>
-                <a:srgbClr val="A0AFC8"/>
-              </a:solidFill>
-            </a:endParaRPr>
-          </a:p>
-        </p:txBody>
-      </p:sp>
-      <p:sp>
-        <p:nvSpPr>
-          <p:cNvPr id="22" name="TextBox 21">
-            <a:extLst>
-              <a:ext uri="{FF2B5EF4-FFF2-40B4-BE49-F238E27FC236}">
-                <a16:creationId xmlns:a16="http://schemas.microsoft.com/office/drawing/2014/main" id="{C04EDEE8-6E89-7F3F-87F2-2D09E7B19CA3}"/>
-              </a:ext>
-            </a:extLst>
-          </p:cNvPr>
-          <p:cNvSpPr txBox="1"/>
-          <p:nvPr/>
-        </p:nvSpPr>
-        <p:spPr>
-          <a:xfrm>
-            <a:off x="698500" y="5943600"/>
-            <a:ext cx="5270500" cy="261610"/>
-          </a:xfrm>
-          <a:prstGeom prst="rect">
-            <a:avLst/>
-          </a:prstGeom>
-          <a:solidFill>
-            <a:srgbClr val="32230F"/>
-          </a:solidFill>
-        </p:spPr>
-        <p:txBody>
-          <a:bodyPr vert="horz" wrap="square" rtlCol="0">
-            <a:spAutoFit/>
-          </a:bodyPr>
-          <a:lstStyle/>
-          <a:p>
-            <a:r>
-              <a:rPr lang="en-US" sz="1100">
-                <a:solidFill>
-                  <a:srgbClr val="FFC88C"/>
-                </a:solidFill>
-              </a:rPr>
-              <a:t>Needs real ASB namespace or complex mocking; high setup friction</a:t>
-            </a:r>
-            <a:endParaRPr lang="ru-RU" sz="1100">
-              <a:solidFill>
-                <a:srgbClr val="FFC88C"/>
-              </a:solidFill>
-            </a:endParaRPr>
-          </a:p>
-        </p:txBody>
-      </p:sp>
-      <p:sp>
-        <p:nvSpPr>
-          <p:cNvPr id="23" name="TextBox 22">
-            <a:extLst>
-              <a:ext uri="{FF2B5EF4-FFF2-40B4-BE49-F238E27FC236}">
-                <a16:creationId xmlns:a16="http://schemas.microsoft.com/office/drawing/2014/main" id="{447F04FE-1A01-7BFC-FF56-474AC256A13D}"/>
-              </a:ext>
-            </a:extLst>
-          </p:cNvPr>
-          <p:cNvSpPr txBox="1"/>
-          <p:nvPr/>
-        </p:nvSpPr>
-        <p:spPr>
-          <a:xfrm>
-            <a:off x="6096000" y="5943600"/>
-            <a:ext cx="5397500" cy="261610"/>
-          </a:xfrm>
-          <a:prstGeom prst="rect">
-            <a:avLst/>
-          </a:prstGeom>
-          <a:solidFill>
-            <a:srgbClr val="0A2D19"/>
-          </a:solidFill>
-        </p:spPr>
-        <p:txBody>
-          <a:bodyPr vert="horz" wrap="square" rtlCol="0">
-            <a:spAutoFit/>
-          </a:bodyPr>
-          <a:lstStyle/>
-          <a:p>
-            <a:r>
-              <a:rPr lang="en-US" sz="1100">
-                <a:solidFill>
-                  <a:srgbClr val="8CFFBE"/>
-                </a:solidFill>
-              </a:rPr>
-              <a:t>Local emulator, any broker via component swap; works fully offline</a:t>
             </a:r>
             <a:endParaRPr lang="ru-RU" sz="1100">
               <a:solidFill>
@@ -4783,7 +5147,7 @@
 </p:sld>
 </file>
 
-<file path=ppt/slides/slide3.xml><?xml version="1.0" encoding="utf-8"?>
+<file path=ppt/slides/slide4.xml><?xml version="1.0" encoding="utf-8"?>
 <p:sld xmlns:a="http://schemas.openxmlformats.org/drawingml/2006/main" xmlns:r="http://schemas.openxmlformats.org/officeDocument/2006/relationships" xmlns:p="http://schemas.openxmlformats.org/presentationml/2006/main">
   <p:cSld>
     <p:bg>

--- a/DaprPubSub.pptx
+++ b/DaprPubSub.pptx
@@ -2,13 +2,14 @@
 <file path=ppt/presentation.xml><?xml version="1.0" encoding="utf-8"?>
 <p:presentation xmlns:a="http://schemas.openxmlformats.org/drawingml/2006/main" xmlns:r="http://schemas.openxmlformats.org/officeDocument/2006/relationships" xmlns:p="http://schemas.openxmlformats.org/presentationml/2006/main" saveSubsetFonts="1">
   <p:sldMasterIdLst>
-    <p:sldMasterId id="2147483648" r:id="rId1"/>
+    <p:sldMasterId id="2147483827" r:id="rId1"/>
   </p:sldMasterIdLst>
   <p:sldIdLst>
     <p:sldId id="256" r:id="rId2"/>
     <p:sldId id="259" r:id="rId3"/>
-    <p:sldId id="257" r:id="rId4"/>
-    <p:sldId id="258" r:id="rId5"/>
+    <p:sldId id="261" r:id="rId4"/>
+    <p:sldId id="257" r:id="rId5"/>
+    <p:sldId id="258" r:id="rId6"/>
   </p:sldIdLst>
   <p:sldSz cx="12192000" cy="6858000"/>
   <p:notesSz cx="6858000" cy="9144000"/>
@@ -137,7 +138,7 @@
           <p:cNvPr id="2" name="Title 1">
             <a:extLst>
               <a:ext uri="{FF2B5EF4-FFF2-40B4-BE49-F238E27FC236}">
-                <a16:creationId xmlns:a16="http://schemas.microsoft.com/office/drawing/2014/main" id="{8C0C9958-6603-6B54-0635-10AD2396C723}"/>
+                <a16:creationId xmlns:a16="http://schemas.microsoft.com/office/drawing/2014/main" id="{ABCBD058-34AB-7C7B-37BE-EDE83231359A}"/>
               </a:ext>
             </a:extLst>
           </p:cNvPr>
@@ -175,7 +176,7 @@
           <p:cNvPr id="3" name="Subtitle 2">
             <a:extLst>
               <a:ext uri="{FF2B5EF4-FFF2-40B4-BE49-F238E27FC236}">
-                <a16:creationId xmlns:a16="http://schemas.microsoft.com/office/drawing/2014/main" id="{D6E686FE-7D21-7AED-DCC3-7E4EC7B91075}"/>
+                <a16:creationId xmlns:a16="http://schemas.microsoft.com/office/drawing/2014/main" id="{661AE6D9-E88B-E1A1-DC2F-B79D285BE162}"/>
               </a:ext>
             </a:extLst>
           </p:cNvPr>
@@ -246,7 +247,7 @@
           <p:cNvPr id="4" name="Date Placeholder 3">
             <a:extLst>
               <a:ext uri="{FF2B5EF4-FFF2-40B4-BE49-F238E27FC236}">
-                <a16:creationId xmlns:a16="http://schemas.microsoft.com/office/drawing/2014/main" id="{5D81E074-437F-448B-7D5B-4249F35AA9E2}"/>
+                <a16:creationId xmlns:a16="http://schemas.microsoft.com/office/drawing/2014/main" id="{45214776-AC5F-D04E-3805-14B6BF284306}"/>
               </a:ext>
             </a:extLst>
           </p:cNvPr>
@@ -275,7 +276,7 @@
           <p:cNvPr id="5" name="Footer Placeholder 4">
             <a:extLst>
               <a:ext uri="{FF2B5EF4-FFF2-40B4-BE49-F238E27FC236}">
-                <a16:creationId xmlns:a16="http://schemas.microsoft.com/office/drawing/2014/main" id="{9C36EE75-A232-5A74-B28D-199BB62A6871}"/>
+                <a16:creationId xmlns:a16="http://schemas.microsoft.com/office/drawing/2014/main" id="{5E9F0950-84D7-3273-984F-3E2F28163108}"/>
               </a:ext>
             </a:extLst>
           </p:cNvPr>
@@ -300,7 +301,7 @@
           <p:cNvPr id="6" name="Slide Number Placeholder 5">
             <a:extLst>
               <a:ext uri="{FF2B5EF4-FFF2-40B4-BE49-F238E27FC236}">
-                <a16:creationId xmlns:a16="http://schemas.microsoft.com/office/drawing/2014/main" id="{7AFF9428-2558-E9A7-A875-1E38A2FED0B5}"/>
+                <a16:creationId xmlns:a16="http://schemas.microsoft.com/office/drawing/2014/main" id="{9D4453A5-7F14-E3DB-3FBE-505F9244564E}"/>
               </a:ext>
             </a:extLst>
           </p:cNvPr>
@@ -327,7 +328,7 @@
     </p:spTree>
     <p:extLst>
       <p:ext uri="{BB962C8B-B14F-4D97-AF65-F5344CB8AC3E}">
-        <p14:creationId xmlns:p14="http://schemas.microsoft.com/office/powerpoint/2010/main" val="2083101894"/>
+        <p14:creationId xmlns:p14="http://schemas.microsoft.com/office/powerpoint/2010/main" val="3969339877"/>
       </p:ext>
     </p:extLst>
   </p:cSld>
@@ -359,7 +360,7 @@
           <p:cNvPr id="2" name="Title 1">
             <a:extLst>
               <a:ext uri="{FF2B5EF4-FFF2-40B4-BE49-F238E27FC236}">
-                <a16:creationId xmlns:a16="http://schemas.microsoft.com/office/drawing/2014/main" id="{8C12F83E-C6E9-493E-6E31-544D5004BAB2}"/>
+                <a16:creationId xmlns:a16="http://schemas.microsoft.com/office/drawing/2014/main" id="{C62E71FD-A9FC-711B-2B55-D26339E84A73}"/>
               </a:ext>
             </a:extLst>
           </p:cNvPr>
@@ -388,7 +389,7 @@
           <p:cNvPr id="3" name="Vertical Text Placeholder 2">
             <a:extLst>
               <a:ext uri="{FF2B5EF4-FFF2-40B4-BE49-F238E27FC236}">
-                <a16:creationId xmlns:a16="http://schemas.microsoft.com/office/drawing/2014/main" id="{A1099BFF-0494-E32F-49E9-FDAC0AE9B44A}"/>
+                <a16:creationId xmlns:a16="http://schemas.microsoft.com/office/drawing/2014/main" id="{998DC01F-CC40-AF93-E655-369854DD8794}"/>
               </a:ext>
             </a:extLst>
           </p:cNvPr>
@@ -446,7 +447,7 @@
           <p:cNvPr id="4" name="Date Placeholder 3">
             <a:extLst>
               <a:ext uri="{FF2B5EF4-FFF2-40B4-BE49-F238E27FC236}">
-                <a16:creationId xmlns:a16="http://schemas.microsoft.com/office/drawing/2014/main" id="{8793A3B5-530E-DB9D-3CEC-88151A9C2A77}"/>
+                <a16:creationId xmlns:a16="http://schemas.microsoft.com/office/drawing/2014/main" id="{D05F91DA-F3A9-3EE4-AAF7-F5B707D0A79A}"/>
               </a:ext>
             </a:extLst>
           </p:cNvPr>
@@ -475,7 +476,7 @@
           <p:cNvPr id="5" name="Footer Placeholder 4">
             <a:extLst>
               <a:ext uri="{FF2B5EF4-FFF2-40B4-BE49-F238E27FC236}">
-                <a16:creationId xmlns:a16="http://schemas.microsoft.com/office/drawing/2014/main" id="{3B948DA1-3AF4-61A7-A3D2-DBCEB61A61AF}"/>
+                <a16:creationId xmlns:a16="http://schemas.microsoft.com/office/drawing/2014/main" id="{00C6093D-8956-FD76-DCE2-9B9AE867A848}"/>
               </a:ext>
             </a:extLst>
           </p:cNvPr>
@@ -500,7 +501,7 @@
           <p:cNvPr id="6" name="Slide Number Placeholder 5">
             <a:extLst>
               <a:ext uri="{FF2B5EF4-FFF2-40B4-BE49-F238E27FC236}">
-                <a16:creationId xmlns:a16="http://schemas.microsoft.com/office/drawing/2014/main" id="{3D1339CB-E8F6-5B01-460B-77ADD4C35655}"/>
+                <a16:creationId xmlns:a16="http://schemas.microsoft.com/office/drawing/2014/main" id="{2FFFFCD6-221E-B915-0068-791323A40A60}"/>
               </a:ext>
             </a:extLst>
           </p:cNvPr>
@@ -527,7 +528,7 @@
     </p:spTree>
     <p:extLst>
       <p:ext uri="{BB962C8B-B14F-4D97-AF65-F5344CB8AC3E}">
-        <p14:creationId xmlns:p14="http://schemas.microsoft.com/office/powerpoint/2010/main" val="1434683161"/>
+        <p14:creationId xmlns:p14="http://schemas.microsoft.com/office/powerpoint/2010/main" val="1537329791"/>
       </p:ext>
     </p:extLst>
   </p:cSld>
@@ -559,7 +560,7 @@
           <p:cNvPr id="2" name="Vertical Title 1">
             <a:extLst>
               <a:ext uri="{FF2B5EF4-FFF2-40B4-BE49-F238E27FC236}">
-                <a16:creationId xmlns:a16="http://schemas.microsoft.com/office/drawing/2014/main" id="{DC1DF8B0-EB33-2E2C-2D72-CA8520ED681A}"/>
+                <a16:creationId xmlns:a16="http://schemas.microsoft.com/office/drawing/2014/main" id="{AA80218A-46EC-8248-3203-38026ABF1DE8}"/>
               </a:ext>
             </a:extLst>
           </p:cNvPr>
@@ -593,7 +594,7 @@
           <p:cNvPr id="3" name="Vertical Text Placeholder 2">
             <a:extLst>
               <a:ext uri="{FF2B5EF4-FFF2-40B4-BE49-F238E27FC236}">
-                <a16:creationId xmlns:a16="http://schemas.microsoft.com/office/drawing/2014/main" id="{6B406F65-F403-9873-85C7-C37D42B90369}"/>
+                <a16:creationId xmlns:a16="http://schemas.microsoft.com/office/drawing/2014/main" id="{2F208138-6370-A2AC-99B0-91CFB26AA1E6}"/>
               </a:ext>
             </a:extLst>
           </p:cNvPr>
@@ -656,7 +657,7 @@
           <p:cNvPr id="4" name="Date Placeholder 3">
             <a:extLst>
               <a:ext uri="{FF2B5EF4-FFF2-40B4-BE49-F238E27FC236}">
-                <a16:creationId xmlns:a16="http://schemas.microsoft.com/office/drawing/2014/main" id="{AFAE2712-EAB4-FCE6-CE55-611629CCA486}"/>
+                <a16:creationId xmlns:a16="http://schemas.microsoft.com/office/drawing/2014/main" id="{AAA439A5-A08A-6528-F0E7-3C5D9D691EB5}"/>
               </a:ext>
             </a:extLst>
           </p:cNvPr>
@@ -685,7 +686,7 @@
           <p:cNvPr id="5" name="Footer Placeholder 4">
             <a:extLst>
               <a:ext uri="{FF2B5EF4-FFF2-40B4-BE49-F238E27FC236}">
-                <a16:creationId xmlns:a16="http://schemas.microsoft.com/office/drawing/2014/main" id="{A877AA99-79DD-2C4E-C67D-1D5F78B73C0F}"/>
+                <a16:creationId xmlns:a16="http://schemas.microsoft.com/office/drawing/2014/main" id="{B0771A7A-5713-2214-7674-F9C972D6F843}"/>
               </a:ext>
             </a:extLst>
           </p:cNvPr>
@@ -710,7 +711,7 @@
           <p:cNvPr id="6" name="Slide Number Placeholder 5">
             <a:extLst>
               <a:ext uri="{FF2B5EF4-FFF2-40B4-BE49-F238E27FC236}">
-                <a16:creationId xmlns:a16="http://schemas.microsoft.com/office/drawing/2014/main" id="{98E5F1AC-0726-8911-1A58-223A1918DA9A}"/>
+                <a16:creationId xmlns:a16="http://schemas.microsoft.com/office/drawing/2014/main" id="{C0B13C12-8B1F-94BC-3BFC-D0D30ACEB581}"/>
               </a:ext>
             </a:extLst>
           </p:cNvPr>
@@ -737,7 +738,42 @@
     </p:spTree>
     <p:extLst>
       <p:ext uri="{BB962C8B-B14F-4D97-AF65-F5344CB8AC3E}">
-        <p14:creationId xmlns:p14="http://schemas.microsoft.com/office/powerpoint/2010/main" val="4261984447"/>
+        <p14:creationId xmlns:p14="http://schemas.microsoft.com/office/powerpoint/2010/main" val="897693116"/>
+      </p:ext>
+    </p:extLst>
+  </p:cSld>
+  <p:clrMapOvr>
+    <a:masterClrMapping/>
+  </p:clrMapOvr>
+</p:sldLayout>
+</file>
+
+<file path=ppt/slideLayouts/slideLayout12.xml><?xml version="1.0" encoding="utf-8"?>
+<p:sldLayout xmlns:a="http://schemas.openxmlformats.org/drawingml/2006/main" xmlns:r="http://schemas.openxmlformats.org/officeDocument/2006/relationships" xmlns:p="http://schemas.openxmlformats.org/presentationml/2006/main">
+  <p:cSld name="DEFAULT">
+    <p:bg>
+      <p:bgRef idx="1001">
+        <a:schemeClr val="bg1"/>
+      </p:bgRef>
+    </p:bg>
+    <p:spTree>
+      <p:nvGrpSpPr>
+        <p:cNvPr id="1" name=""/>
+        <p:cNvGrpSpPr/>
+        <p:nvPr/>
+      </p:nvGrpSpPr>
+      <p:grpSpPr>
+        <a:xfrm>
+          <a:off x="0" y="0"/>
+          <a:ext cx="0" cy="0"/>
+          <a:chOff x="0" y="0"/>
+          <a:chExt cx="0" cy="0"/>
+        </a:xfrm>
+      </p:grpSpPr>
+    </p:spTree>
+    <p:extLst>
+      <p:ext uri="{BB962C8B-B14F-4D97-AF65-F5344CB8AC3E}">
+        <p14:creationId xmlns:p14="http://schemas.microsoft.com/office/powerpoint/2010/main" val="3750682835"/>
       </p:ext>
     </p:extLst>
   </p:cSld>
@@ -769,7 +805,7 @@
           <p:cNvPr id="2" name="Title 1">
             <a:extLst>
               <a:ext uri="{FF2B5EF4-FFF2-40B4-BE49-F238E27FC236}">
-                <a16:creationId xmlns:a16="http://schemas.microsoft.com/office/drawing/2014/main" id="{A315663C-0A0F-5227-727C-30A39B7E7951}"/>
+                <a16:creationId xmlns:a16="http://schemas.microsoft.com/office/drawing/2014/main" id="{C89B28ED-CCC6-DDBF-D6EE-ED59C7BC9CB0}"/>
               </a:ext>
             </a:extLst>
           </p:cNvPr>
@@ -798,7 +834,7 @@
           <p:cNvPr id="3" name="Content Placeholder 2">
             <a:extLst>
               <a:ext uri="{FF2B5EF4-FFF2-40B4-BE49-F238E27FC236}">
-                <a16:creationId xmlns:a16="http://schemas.microsoft.com/office/drawing/2014/main" id="{FE6EEEC5-5DF6-F369-14B4-C29AAE00B45E}"/>
+                <a16:creationId xmlns:a16="http://schemas.microsoft.com/office/drawing/2014/main" id="{29B77186-D12A-A820-96E7-9BB74F9CF0E8}"/>
               </a:ext>
             </a:extLst>
           </p:cNvPr>
@@ -856,7 +892,7 @@
           <p:cNvPr id="4" name="Date Placeholder 3">
             <a:extLst>
               <a:ext uri="{FF2B5EF4-FFF2-40B4-BE49-F238E27FC236}">
-                <a16:creationId xmlns:a16="http://schemas.microsoft.com/office/drawing/2014/main" id="{5D3874A9-8C7C-DF40-7A20-62750AD2E4B2}"/>
+                <a16:creationId xmlns:a16="http://schemas.microsoft.com/office/drawing/2014/main" id="{71F5D027-553F-B2BE-876C-DD507A246EE8}"/>
               </a:ext>
             </a:extLst>
           </p:cNvPr>
@@ -885,7 +921,7 @@
           <p:cNvPr id="5" name="Footer Placeholder 4">
             <a:extLst>
               <a:ext uri="{FF2B5EF4-FFF2-40B4-BE49-F238E27FC236}">
-                <a16:creationId xmlns:a16="http://schemas.microsoft.com/office/drawing/2014/main" id="{B3F90EB4-8416-3B94-2A0F-55E85F3049F8}"/>
+                <a16:creationId xmlns:a16="http://schemas.microsoft.com/office/drawing/2014/main" id="{116C1FD6-E86A-F645-7CD7-4D49987ACE85}"/>
               </a:ext>
             </a:extLst>
           </p:cNvPr>
@@ -910,7 +946,7 @@
           <p:cNvPr id="6" name="Slide Number Placeholder 5">
             <a:extLst>
               <a:ext uri="{FF2B5EF4-FFF2-40B4-BE49-F238E27FC236}">
-                <a16:creationId xmlns:a16="http://schemas.microsoft.com/office/drawing/2014/main" id="{495CA306-24E4-BAE1-9651-940E5B05DE20}"/>
+                <a16:creationId xmlns:a16="http://schemas.microsoft.com/office/drawing/2014/main" id="{B038E4EA-B95B-EB1D-E0F0-C1722F50207D}"/>
               </a:ext>
             </a:extLst>
           </p:cNvPr>
@@ -937,7 +973,7 @@
     </p:spTree>
     <p:extLst>
       <p:ext uri="{BB962C8B-B14F-4D97-AF65-F5344CB8AC3E}">
-        <p14:creationId xmlns:p14="http://schemas.microsoft.com/office/powerpoint/2010/main" val="2138888139"/>
+        <p14:creationId xmlns:p14="http://schemas.microsoft.com/office/powerpoint/2010/main" val="3976475206"/>
       </p:ext>
     </p:extLst>
   </p:cSld>
@@ -969,7 +1005,7 @@
           <p:cNvPr id="2" name="Title 1">
             <a:extLst>
               <a:ext uri="{FF2B5EF4-FFF2-40B4-BE49-F238E27FC236}">
-                <a16:creationId xmlns:a16="http://schemas.microsoft.com/office/drawing/2014/main" id="{D6C9D202-2C09-4D8A-6C3D-F6F19A9AB1E2}"/>
+                <a16:creationId xmlns:a16="http://schemas.microsoft.com/office/drawing/2014/main" id="{292BCDCD-E589-E5D0-E0F4-3689F0D16BD4}"/>
               </a:ext>
             </a:extLst>
           </p:cNvPr>
@@ -1007,7 +1043,7 @@
           <p:cNvPr id="3" name="Text Placeholder 2">
             <a:extLst>
               <a:ext uri="{FF2B5EF4-FFF2-40B4-BE49-F238E27FC236}">
-                <a16:creationId xmlns:a16="http://schemas.microsoft.com/office/drawing/2014/main" id="{5E93B031-15CD-0E41-A576-650C548EAC1B}"/>
+                <a16:creationId xmlns:a16="http://schemas.microsoft.com/office/drawing/2014/main" id="{A78F6BEB-F42A-4627-0A6C-0CE71F4AC42F}"/>
               </a:ext>
             </a:extLst>
           </p:cNvPr>
@@ -1132,7 +1168,7 @@
           <p:cNvPr id="4" name="Date Placeholder 3">
             <a:extLst>
               <a:ext uri="{FF2B5EF4-FFF2-40B4-BE49-F238E27FC236}">
-                <a16:creationId xmlns:a16="http://schemas.microsoft.com/office/drawing/2014/main" id="{9853B8DF-2587-81EC-D438-746846ED165B}"/>
+                <a16:creationId xmlns:a16="http://schemas.microsoft.com/office/drawing/2014/main" id="{26CA2631-733C-1195-EC1F-C786B2AD2819}"/>
               </a:ext>
             </a:extLst>
           </p:cNvPr>
@@ -1161,7 +1197,7 @@
           <p:cNvPr id="5" name="Footer Placeholder 4">
             <a:extLst>
               <a:ext uri="{FF2B5EF4-FFF2-40B4-BE49-F238E27FC236}">
-                <a16:creationId xmlns:a16="http://schemas.microsoft.com/office/drawing/2014/main" id="{73C627D9-D204-CBFD-8334-9715BC82E834}"/>
+                <a16:creationId xmlns:a16="http://schemas.microsoft.com/office/drawing/2014/main" id="{0F2BF8A5-04A9-B4FC-61C3-A0AC33AAACDC}"/>
               </a:ext>
             </a:extLst>
           </p:cNvPr>
@@ -1186,7 +1222,7 @@
           <p:cNvPr id="6" name="Slide Number Placeholder 5">
             <a:extLst>
               <a:ext uri="{FF2B5EF4-FFF2-40B4-BE49-F238E27FC236}">
-                <a16:creationId xmlns:a16="http://schemas.microsoft.com/office/drawing/2014/main" id="{3BBA6710-9824-9CCE-C34D-7657F27987C4}"/>
+                <a16:creationId xmlns:a16="http://schemas.microsoft.com/office/drawing/2014/main" id="{0A23939E-38D2-EC14-895A-81EA261A754E}"/>
               </a:ext>
             </a:extLst>
           </p:cNvPr>
@@ -1213,7 +1249,7 @@
     </p:spTree>
     <p:extLst>
       <p:ext uri="{BB962C8B-B14F-4D97-AF65-F5344CB8AC3E}">
-        <p14:creationId xmlns:p14="http://schemas.microsoft.com/office/powerpoint/2010/main" val="2715323285"/>
+        <p14:creationId xmlns:p14="http://schemas.microsoft.com/office/powerpoint/2010/main" val="3095471099"/>
       </p:ext>
     </p:extLst>
   </p:cSld>
@@ -1245,7 +1281,7 @@
           <p:cNvPr id="2" name="Title 1">
             <a:extLst>
               <a:ext uri="{FF2B5EF4-FFF2-40B4-BE49-F238E27FC236}">
-                <a16:creationId xmlns:a16="http://schemas.microsoft.com/office/drawing/2014/main" id="{966E1199-9725-3E75-5BFC-0AFA020A37CE}"/>
+                <a16:creationId xmlns:a16="http://schemas.microsoft.com/office/drawing/2014/main" id="{75EB8F39-AB29-6226-4409-73FDF011F1E7}"/>
               </a:ext>
             </a:extLst>
           </p:cNvPr>
@@ -1274,7 +1310,7 @@
           <p:cNvPr id="3" name="Content Placeholder 2">
             <a:extLst>
               <a:ext uri="{FF2B5EF4-FFF2-40B4-BE49-F238E27FC236}">
-                <a16:creationId xmlns:a16="http://schemas.microsoft.com/office/drawing/2014/main" id="{EE354D8C-5759-4D24-882E-82B0E92EBC1D}"/>
+                <a16:creationId xmlns:a16="http://schemas.microsoft.com/office/drawing/2014/main" id="{339F2069-CEDE-814D-F7DE-7567354938E0}"/>
               </a:ext>
             </a:extLst>
           </p:cNvPr>
@@ -1337,7 +1373,7 @@
           <p:cNvPr id="4" name="Content Placeholder 3">
             <a:extLst>
               <a:ext uri="{FF2B5EF4-FFF2-40B4-BE49-F238E27FC236}">
-                <a16:creationId xmlns:a16="http://schemas.microsoft.com/office/drawing/2014/main" id="{5ADB35CF-19DD-29E9-871B-BDF8453539A9}"/>
+                <a16:creationId xmlns:a16="http://schemas.microsoft.com/office/drawing/2014/main" id="{D2D390EE-0396-F249-59D5-563B6E0AC33F}"/>
               </a:ext>
             </a:extLst>
           </p:cNvPr>
@@ -1400,7 +1436,7 @@
           <p:cNvPr id="5" name="Date Placeholder 4">
             <a:extLst>
               <a:ext uri="{FF2B5EF4-FFF2-40B4-BE49-F238E27FC236}">
-                <a16:creationId xmlns:a16="http://schemas.microsoft.com/office/drawing/2014/main" id="{DEBF02C5-0490-C039-088A-DACE02C9ADD5}"/>
+                <a16:creationId xmlns:a16="http://schemas.microsoft.com/office/drawing/2014/main" id="{4DEC057B-59F5-7177-13F2-148D25275C5B}"/>
               </a:ext>
             </a:extLst>
           </p:cNvPr>
@@ -1429,7 +1465,7 @@
           <p:cNvPr id="6" name="Footer Placeholder 5">
             <a:extLst>
               <a:ext uri="{FF2B5EF4-FFF2-40B4-BE49-F238E27FC236}">
-                <a16:creationId xmlns:a16="http://schemas.microsoft.com/office/drawing/2014/main" id="{7E386D89-FE65-CD40-08FF-15DA549DE2B6}"/>
+                <a16:creationId xmlns:a16="http://schemas.microsoft.com/office/drawing/2014/main" id="{C20116D3-404A-1043-4F8F-845E7FD19E62}"/>
               </a:ext>
             </a:extLst>
           </p:cNvPr>
@@ -1454,7 +1490,7 @@
           <p:cNvPr id="7" name="Slide Number Placeholder 6">
             <a:extLst>
               <a:ext uri="{FF2B5EF4-FFF2-40B4-BE49-F238E27FC236}">
-                <a16:creationId xmlns:a16="http://schemas.microsoft.com/office/drawing/2014/main" id="{2D5602D1-CCF3-51E6-27CD-4D1E472F3189}"/>
+                <a16:creationId xmlns:a16="http://schemas.microsoft.com/office/drawing/2014/main" id="{37262958-C7F8-E696-4D75-AA10671E88DC}"/>
               </a:ext>
             </a:extLst>
           </p:cNvPr>
@@ -1481,7 +1517,7 @@
     </p:spTree>
     <p:extLst>
       <p:ext uri="{BB962C8B-B14F-4D97-AF65-F5344CB8AC3E}">
-        <p14:creationId xmlns:p14="http://schemas.microsoft.com/office/powerpoint/2010/main" val="1313259172"/>
+        <p14:creationId xmlns:p14="http://schemas.microsoft.com/office/powerpoint/2010/main" val="863284326"/>
       </p:ext>
     </p:extLst>
   </p:cSld>
@@ -1513,7 +1549,7 @@
           <p:cNvPr id="2" name="Title 1">
             <a:extLst>
               <a:ext uri="{FF2B5EF4-FFF2-40B4-BE49-F238E27FC236}">
-                <a16:creationId xmlns:a16="http://schemas.microsoft.com/office/drawing/2014/main" id="{7E50C28D-3A8A-8F35-0A2D-12733808948B}"/>
+                <a16:creationId xmlns:a16="http://schemas.microsoft.com/office/drawing/2014/main" id="{73432062-8D27-A062-0936-90C4E9BB9B41}"/>
               </a:ext>
             </a:extLst>
           </p:cNvPr>
@@ -1547,7 +1583,7 @@
           <p:cNvPr id="3" name="Text Placeholder 2">
             <a:extLst>
               <a:ext uri="{FF2B5EF4-FFF2-40B4-BE49-F238E27FC236}">
-                <a16:creationId xmlns:a16="http://schemas.microsoft.com/office/drawing/2014/main" id="{70B3E4FB-62E1-4B92-2DAC-FB71BCF969ED}"/>
+                <a16:creationId xmlns:a16="http://schemas.microsoft.com/office/drawing/2014/main" id="{72682561-345F-6AF2-380C-41952922C38A}"/>
               </a:ext>
             </a:extLst>
           </p:cNvPr>
@@ -1618,7 +1654,7 @@
           <p:cNvPr id="4" name="Content Placeholder 3">
             <a:extLst>
               <a:ext uri="{FF2B5EF4-FFF2-40B4-BE49-F238E27FC236}">
-                <a16:creationId xmlns:a16="http://schemas.microsoft.com/office/drawing/2014/main" id="{342BB1B7-6D27-98DE-E24D-798B92559E91}"/>
+                <a16:creationId xmlns:a16="http://schemas.microsoft.com/office/drawing/2014/main" id="{0D87A1B3-7647-B3DB-0564-A10C14E1A213}"/>
               </a:ext>
             </a:extLst>
           </p:cNvPr>
@@ -1681,7 +1717,7 @@
           <p:cNvPr id="5" name="Text Placeholder 4">
             <a:extLst>
               <a:ext uri="{FF2B5EF4-FFF2-40B4-BE49-F238E27FC236}">
-                <a16:creationId xmlns:a16="http://schemas.microsoft.com/office/drawing/2014/main" id="{79FBFC4D-66BB-58F9-C5A6-DA38F0850CBB}"/>
+                <a16:creationId xmlns:a16="http://schemas.microsoft.com/office/drawing/2014/main" id="{0867A45A-8353-8EE1-87CC-6FFBC6A7BDBC}"/>
               </a:ext>
             </a:extLst>
           </p:cNvPr>
@@ -1752,7 +1788,7 @@
           <p:cNvPr id="6" name="Content Placeholder 5">
             <a:extLst>
               <a:ext uri="{FF2B5EF4-FFF2-40B4-BE49-F238E27FC236}">
-                <a16:creationId xmlns:a16="http://schemas.microsoft.com/office/drawing/2014/main" id="{73E109B6-0BA7-F5F5-3E44-1FB5564B9693}"/>
+                <a16:creationId xmlns:a16="http://schemas.microsoft.com/office/drawing/2014/main" id="{F41510F1-B7A5-40A4-FDF6-1C3DC61864DB}"/>
               </a:ext>
             </a:extLst>
           </p:cNvPr>
@@ -1815,7 +1851,7 @@
           <p:cNvPr id="7" name="Date Placeholder 6">
             <a:extLst>
               <a:ext uri="{FF2B5EF4-FFF2-40B4-BE49-F238E27FC236}">
-                <a16:creationId xmlns:a16="http://schemas.microsoft.com/office/drawing/2014/main" id="{01B1D8A0-2AD7-857D-FA51-3960118DD634}"/>
+                <a16:creationId xmlns:a16="http://schemas.microsoft.com/office/drawing/2014/main" id="{FB2D35B1-F080-06CB-DC16-91693692CC0F}"/>
               </a:ext>
             </a:extLst>
           </p:cNvPr>
@@ -1844,7 +1880,7 @@
           <p:cNvPr id="8" name="Footer Placeholder 7">
             <a:extLst>
               <a:ext uri="{FF2B5EF4-FFF2-40B4-BE49-F238E27FC236}">
-                <a16:creationId xmlns:a16="http://schemas.microsoft.com/office/drawing/2014/main" id="{500BCFAB-13A7-2FB3-4095-9A206A3AFE0F}"/>
+                <a16:creationId xmlns:a16="http://schemas.microsoft.com/office/drawing/2014/main" id="{38559978-E411-505B-314D-50D500325C65}"/>
               </a:ext>
             </a:extLst>
           </p:cNvPr>
@@ -1869,7 +1905,7 @@
           <p:cNvPr id="9" name="Slide Number Placeholder 8">
             <a:extLst>
               <a:ext uri="{FF2B5EF4-FFF2-40B4-BE49-F238E27FC236}">
-                <a16:creationId xmlns:a16="http://schemas.microsoft.com/office/drawing/2014/main" id="{E1B700EA-B6AF-7295-7789-18FB0D3D04B3}"/>
+                <a16:creationId xmlns:a16="http://schemas.microsoft.com/office/drawing/2014/main" id="{421BF2B4-2504-3E63-57F0-12E5E3C93188}"/>
               </a:ext>
             </a:extLst>
           </p:cNvPr>
@@ -1896,7 +1932,7 @@
     </p:spTree>
     <p:extLst>
       <p:ext uri="{BB962C8B-B14F-4D97-AF65-F5344CB8AC3E}">
-        <p14:creationId xmlns:p14="http://schemas.microsoft.com/office/powerpoint/2010/main" val="4220372334"/>
+        <p14:creationId xmlns:p14="http://schemas.microsoft.com/office/powerpoint/2010/main" val="713928325"/>
       </p:ext>
     </p:extLst>
   </p:cSld>
@@ -1928,7 +1964,7 @@
           <p:cNvPr id="2" name="Title 1">
             <a:extLst>
               <a:ext uri="{FF2B5EF4-FFF2-40B4-BE49-F238E27FC236}">
-                <a16:creationId xmlns:a16="http://schemas.microsoft.com/office/drawing/2014/main" id="{3E538867-95E0-8450-1340-22E7C114B62A}"/>
+                <a16:creationId xmlns:a16="http://schemas.microsoft.com/office/drawing/2014/main" id="{5CD04282-1187-2040-A11B-EFFC17BBFC21}"/>
               </a:ext>
             </a:extLst>
           </p:cNvPr>
@@ -1957,7 +1993,7 @@
           <p:cNvPr id="3" name="Date Placeholder 2">
             <a:extLst>
               <a:ext uri="{FF2B5EF4-FFF2-40B4-BE49-F238E27FC236}">
-                <a16:creationId xmlns:a16="http://schemas.microsoft.com/office/drawing/2014/main" id="{231D1C2C-B9CE-7F9B-0FBE-F0FBD8439EEF}"/>
+                <a16:creationId xmlns:a16="http://schemas.microsoft.com/office/drawing/2014/main" id="{1F312B78-314B-D6FB-11F8-51556021D336}"/>
               </a:ext>
             </a:extLst>
           </p:cNvPr>
@@ -1986,7 +2022,7 @@
           <p:cNvPr id="4" name="Footer Placeholder 3">
             <a:extLst>
               <a:ext uri="{FF2B5EF4-FFF2-40B4-BE49-F238E27FC236}">
-                <a16:creationId xmlns:a16="http://schemas.microsoft.com/office/drawing/2014/main" id="{6EB2AE06-3FE3-8314-82C7-D5E177499432}"/>
+                <a16:creationId xmlns:a16="http://schemas.microsoft.com/office/drawing/2014/main" id="{92775134-B6D6-5566-FD0C-4A171D23CC3E}"/>
               </a:ext>
             </a:extLst>
           </p:cNvPr>
@@ -2011,7 +2047,7 @@
           <p:cNvPr id="5" name="Slide Number Placeholder 4">
             <a:extLst>
               <a:ext uri="{FF2B5EF4-FFF2-40B4-BE49-F238E27FC236}">
-                <a16:creationId xmlns:a16="http://schemas.microsoft.com/office/drawing/2014/main" id="{8013323D-14DC-06F7-E3D8-A62D06172918}"/>
+                <a16:creationId xmlns:a16="http://schemas.microsoft.com/office/drawing/2014/main" id="{1B1DBDA5-74EB-14F5-ACC4-70D60D84E895}"/>
               </a:ext>
             </a:extLst>
           </p:cNvPr>
@@ -2038,7 +2074,7 @@
     </p:spTree>
     <p:extLst>
       <p:ext uri="{BB962C8B-B14F-4D97-AF65-F5344CB8AC3E}">
-        <p14:creationId xmlns:p14="http://schemas.microsoft.com/office/powerpoint/2010/main" val="812682093"/>
+        <p14:creationId xmlns:p14="http://schemas.microsoft.com/office/powerpoint/2010/main" val="2030476776"/>
       </p:ext>
     </p:extLst>
   </p:cSld>
@@ -2070,7 +2106,7 @@
           <p:cNvPr id="2" name="Date Placeholder 1">
             <a:extLst>
               <a:ext uri="{FF2B5EF4-FFF2-40B4-BE49-F238E27FC236}">
-                <a16:creationId xmlns:a16="http://schemas.microsoft.com/office/drawing/2014/main" id="{20F010ED-C1A8-7F31-E77A-0A5CB22F68A3}"/>
+                <a16:creationId xmlns:a16="http://schemas.microsoft.com/office/drawing/2014/main" id="{780218A8-BD34-957E-86EF-F66F998B827D}"/>
               </a:ext>
             </a:extLst>
           </p:cNvPr>
@@ -2099,7 +2135,7 @@
           <p:cNvPr id="3" name="Footer Placeholder 2">
             <a:extLst>
               <a:ext uri="{FF2B5EF4-FFF2-40B4-BE49-F238E27FC236}">
-                <a16:creationId xmlns:a16="http://schemas.microsoft.com/office/drawing/2014/main" id="{0E719973-D833-4414-346A-7DB4871679D1}"/>
+                <a16:creationId xmlns:a16="http://schemas.microsoft.com/office/drawing/2014/main" id="{ACC74F27-FFEE-3607-9DA6-71B314765B8A}"/>
               </a:ext>
             </a:extLst>
           </p:cNvPr>
@@ -2124,7 +2160,7 @@
           <p:cNvPr id="4" name="Slide Number Placeholder 3">
             <a:extLst>
               <a:ext uri="{FF2B5EF4-FFF2-40B4-BE49-F238E27FC236}">
-                <a16:creationId xmlns:a16="http://schemas.microsoft.com/office/drawing/2014/main" id="{FC10A909-344C-845A-8D40-65ADD5E3D23B}"/>
+                <a16:creationId xmlns:a16="http://schemas.microsoft.com/office/drawing/2014/main" id="{3D3A372D-B62E-9552-8330-9E754B733A8C}"/>
               </a:ext>
             </a:extLst>
           </p:cNvPr>
@@ -2151,7 +2187,7 @@
     </p:spTree>
     <p:extLst>
       <p:ext uri="{BB962C8B-B14F-4D97-AF65-F5344CB8AC3E}">
-        <p14:creationId xmlns:p14="http://schemas.microsoft.com/office/powerpoint/2010/main" val="1437371715"/>
+        <p14:creationId xmlns:p14="http://schemas.microsoft.com/office/powerpoint/2010/main" val="2606558432"/>
       </p:ext>
     </p:extLst>
   </p:cSld>
@@ -2183,7 +2219,7 @@
           <p:cNvPr id="2" name="Title 1">
             <a:extLst>
               <a:ext uri="{FF2B5EF4-FFF2-40B4-BE49-F238E27FC236}">
-                <a16:creationId xmlns:a16="http://schemas.microsoft.com/office/drawing/2014/main" id="{BAB2973F-2AB1-4862-6A70-22C2201128D4}"/>
+                <a16:creationId xmlns:a16="http://schemas.microsoft.com/office/drawing/2014/main" id="{4281277E-D0CF-8925-64FB-4E223BC224A4}"/>
               </a:ext>
             </a:extLst>
           </p:cNvPr>
@@ -2221,7 +2257,7 @@
           <p:cNvPr id="3" name="Content Placeholder 2">
             <a:extLst>
               <a:ext uri="{FF2B5EF4-FFF2-40B4-BE49-F238E27FC236}">
-                <a16:creationId xmlns:a16="http://schemas.microsoft.com/office/drawing/2014/main" id="{20C73BCA-CA24-2B90-B8A5-9A9903D488A0}"/>
+                <a16:creationId xmlns:a16="http://schemas.microsoft.com/office/drawing/2014/main" id="{9F92E5A4-F22C-A6AC-24F4-F47E1973E680}"/>
               </a:ext>
             </a:extLst>
           </p:cNvPr>
@@ -2312,7 +2348,7 @@
           <p:cNvPr id="4" name="Text Placeholder 3">
             <a:extLst>
               <a:ext uri="{FF2B5EF4-FFF2-40B4-BE49-F238E27FC236}">
-                <a16:creationId xmlns:a16="http://schemas.microsoft.com/office/drawing/2014/main" id="{9B53975B-6DF0-CC9A-9A8C-362E06703D43}"/>
+                <a16:creationId xmlns:a16="http://schemas.microsoft.com/office/drawing/2014/main" id="{580E9B87-FC8B-C3E1-DF7C-2A58AF9FF73C}"/>
               </a:ext>
             </a:extLst>
           </p:cNvPr>
@@ -2383,7 +2419,7 @@
           <p:cNvPr id="5" name="Date Placeholder 4">
             <a:extLst>
               <a:ext uri="{FF2B5EF4-FFF2-40B4-BE49-F238E27FC236}">
-                <a16:creationId xmlns:a16="http://schemas.microsoft.com/office/drawing/2014/main" id="{4E3CD26D-A212-16F9-0488-2C7B92056BB5}"/>
+                <a16:creationId xmlns:a16="http://schemas.microsoft.com/office/drawing/2014/main" id="{E11C6A30-5360-1C4E-D47C-792315EBA763}"/>
               </a:ext>
             </a:extLst>
           </p:cNvPr>
@@ -2412,7 +2448,7 @@
           <p:cNvPr id="6" name="Footer Placeholder 5">
             <a:extLst>
               <a:ext uri="{FF2B5EF4-FFF2-40B4-BE49-F238E27FC236}">
-                <a16:creationId xmlns:a16="http://schemas.microsoft.com/office/drawing/2014/main" id="{A22174F8-D54E-B7BA-14ED-3D7B469DB606}"/>
+                <a16:creationId xmlns:a16="http://schemas.microsoft.com/office/drawing/2014/main" id="{AB597F7C-555E-C71D-D5B0-742D6E875DDD}"/>
               </a:ext>
             </a:extLst>
           </p:cNvPr>
@@ -2437,7 +2473,7 @@
           <p:cNvPr id="7" name="Slide Number Placeholder 6">
             <a:extLst>
               <a:ext uri="{FF2B5EF4-FFF2-40B4-BE49-F238E27FC236}">
-                <a16:creationId xmlns:a16="http://schemas.microsoft.com/office/drawing/2014/main" id="{F544C766-D9DD-40D4-9F63-B45055D1C8A7}"/>
+                <a16:creationId xmlns:a16="http://schemas.microsoft.com/office/drawing/2014/main" id="{73E5786B-6EC2-255B-DD7C-BA7F36EA0185}"/>
               </a:ext>
             </a:extLst>
           </p:cNvPr>
@@ -2464,7 +2500,7 @@
     </p:spTree>
     <p:extLst>
       <p:ext uri="{BB962C8B-B14F-4D97-AF65-F5344CB8AC3E}">
-        <p14:creationId xmlns:p14="http://schemas.microsoft.com/office/powerpoint/2010/main" val="1763363"/>
+        <p14:creationId xmlns:p14="http://schemas.microsoft.com/office/powerpoint/2010/main" val="3533136753"/>
       </p:ext>
     </p:extLst>
   </p:cSld>
@@ -2496,7 +2532,7 @@
           <p:cNvPr id="2" name="Title 1">
             <a:extLst>
               <a:ext uri="{FF2B5EF4-FFF2-40B4-BE49-F238E27FC236}">
-                <a16:creationId xmlns:a16="http://schemas.microsoft.com/office/drawing/2014/main" id="{C9C9257D-D596-19BB-1A36-279287DFAA01}"/>
+                <a16:creationId xmlns:a16="http://schemas.microsoft.com/office/drawing/2014/main" id="{EC0D069D-B4FA-43C4-3FC9-2FFA138AF4AC}"/>
               </a:ext>
             </a:extLst>
           </p:cNvPr>
@@ -2534,7 +2570,7 @@
           <p:cNvPr id="3" name="Picture Placeholder 2">
             <a:extLst>
               <a:ext uri="{FF2B5EF4-FFF2-40B4-BE49-F238E27FC236}">
-                <a16:creationId xmlns:a16="http://schemas.microsoft.com/office/drawing/2014/main" id="{7DEBE0E4-5DB7-4D27-3352-B0DAC21666E7}"/>
+                <a16:creationId xmlns:a16="http://schemas.microsoft.com/office/drawing/2014/main" id="{7CE45750-EF2C-FE0A-4CB7-80055C0898D2}"/>
               </a:ext>
             </a:extLst>
           </p:cNvPr>
@@ -2592,6 +2628,10 @@
             </a:lvl9pPr>
           </a:lstStyle>
           <a:p>
+            <a:r>
+              <a:rPr lang="en-US"/>
+              <a:t>Click icon to add picture</a:t>
+            </a:r>
             <a:endParaRPr lang="ru-RU"/>
           </a:p>
         </p:txBody>
@@ -2601,7 +2641,7 @@
           <p:cNvPr id="4" name="Text Placeholder 3">
             <a:extLst>
               <a:ext uri="{FF2B5EF4-FFF2-40B4-BE49-F238E27FC236}">
-                <a16:creationId xmlns:a16="http://schemas.microsoft.com/office/drawing/2014/main" id="{CBE144EA-0CBF-378C-6924-45CAF3B4F73A}"/>
+                <a16:creationId xmlns:a16="http://schemas.microsoft.com/office/drawing/2014/main" id="{0C0F4425-8C0E-F992-A967-1602FF6A369B}"/>
               </a:ext>
             </a:extLst>
           </p:cNvPr>
@@ -2672,7 +2712,7 @@
           <p:cNvPr id="5" name="Date Placeholder 4">
             <a:extLst>
               <a:ext uri="{FF2B5EF4-FFF2-40B4-BE49-F238E27FC236}">
-                <a16:creationId xmlns:a16="http://schemas.microsoft.com/office/drawing/2014/main" id="{A7466663-DC64-4BAD-BC58-06DEC84BFCA4}"/>
+                <a16:creationId xmlns:a16="http://schemas.microsoft.com/office/drawing/2014/main" id="{FFDA1982-4AE2-CD04-D76F-736EA61036AB}"/>
               </a:ext>
             </a:extLst>
           </p:cNvPr>
@@ -2701,7 +2741,7 @@
           <p:cNvPr id="6" name="Footer Placeholder 5">
             <a:extLst>
               <a:ext uri="{FF2B5EF4-FFF2-40B4-BE49-F238E27FC236}">
-                <a16:creationId xmlns:a16="http://schemas.microsoft.com/office/drawing/2014/main" id="{8A31C0AB-4235-E0C3-E3D3-2F91E43B442A}"/>
+                <a16:creationId xmlns:a16="http://schemas.microsoft.com/office/drawing/2014/main" id="{BF0DF686-6ADF-E280-9AC9-05F53C399FB4}"/>
               </a:ext>
             </a:extLst>
           </p:cNvPr>
@@ -2726,7 +2766,7 @@
           <p:cNvPr id="7" name="Slide Number Placeholder 6">
             <a:extLst>
               <a:ext uri="{FF2B5EF4-FFF2-40B4-BE49-F238E27FC236}">
-                <a16:creationId xmlns:a16="http://schemas.microsoft.com/office/drawing/2014/main" id="{3F1A434A-1AC5-0CFE-E006-20C3AB4AFD63}"/>
+                <a16:creationId xmlns:a16="http://schemas.microsoft.com/office/drawing/2014/main" id="{6321B749-4FC5-EC35-36C4-C69E9CD37249}"/>
               </a:ext>
             </a:extLst>
           </p:cNvPr>
@@ -2753,7 +2793,7 @@
     </p:spTree>
     <p:extLst>
       <p:ext uri="{BB962C8B-B14F-4D97-AF65-F5344CB8AC3E}">
-        <p14:creationId xmlns:p14="http://schemas.microsoft.com/office/powerpoint/2010/main" val="258780133"/>
+        <p14:creationId xmlns:p14="http://schemas.microsoft.com/office/powerpoint/2010/main" val="3713646744"/>
       </p:ext>
     </p:extLst>
   </p:cSld>
@@ -2767,8 +2807,8 @@
 <p:sldMaster xmlns:a="http://schemas.openxmlformats.org/drawingml/2006/main" xmlns:r="http://schemas.openxmlformats.org/officeDocument/2006/relationships" xmlns:p="http://schemas.openxmlformats.org/presentationml/2006/main">
   <p:cSld>
     <p:bg>
-      <p:bgRef idx="1001">
-        <a:schemeClr val="bg1"/>
+      <p:bgRef idx="1003">
+        <a:schemeClr val="bg2"/>
       </p:bgRef>
     </p:bg>
     <p:spTree>
@@ -2790,7 +2830,7 @@
           <p:cNvPr id="2" name="Title Placeholder 1">
             <a:extLst>
               <a:ext uri="{FF2B5EF4-FFF2-40B4-BE49-F238E27FC236}">
-                <a16:creationId xmlns:a16="http://schemas.microsoft.com/office/drawing/2014/main" id="{77BE522E-F41D-DF4E-8F6C-5E346AC10951}"/>
+                <a16:creationId xmlns:a16="http://schemas.microsoft.com/office/drawing/2014/main" id="{C9778BE5-C12F-AB5F-B3E3-279BE47A3A49}"/>
               </a:ext>
             </a:extLst>
           </p:cNvPr>
@@ -2829,7 +2869,7 @@
           <p:cNvPr id="3" name="Text Placeholder 2">
             <a:extLst>
               <a:ext uri="{FF2B5EF4-FFF2-40B4-BE49-F238E27FC236}">
-                <a16:creationId xmlns:a16="http://schemas.microsoft.com/office/drawing/2014/main" id="{04BA3C55-71C8-B408-5156-797C3F0BAB80}"/>
+                <a16:creationId xmlns:a16="http://schemas.microsoft.com/office/drawing/2014/main" id="{D66204DE-3DE4-8E70-6203-CB1C165DF4D3}"/>
               </a:ext>
             </a:extLst>
           </p:cNvPr>
@@ -2897,7 +2937,7 @@
           <p:cNvPr id="4" name="Date Placeholder 3">
             <a:extLst>
               <a:ext uri="{FF2B5EF4-FFF2-40B4-BE49-F238E27FC236}">
-                <a16:creationId xmlns:a16="http://schemas.microsoft.com/office/drawing/2014/main" id="{9C3BCFC2-9E02-1F0F-D2AA-BD3CE60B5128}"/>
+                <a16:creationId xmlns:a16="http://schemas.microsoft.com/office/drawing/2014/main" id="{96427151-A1CC-8E7A-47D8-BE96D2F39389}"/>
               </a:ext>
             </a:extLst>
           </p:cNvPr>
@@ -2944,7 +2984,7 @@
           <p:cNvPr id="5" name="Footer Placeholder 4">
             <a:extLst>
               <a:ext uri="{FF2B5EF4-FFF2-40B4-BE49-F238E27FC236}">
-                <a16:creationId xmlns:a16="http://schemas.microsoft.com/office/drawing/2014/main" id="{892531BE-A9E5-71DE-8D8B-945F78EB4B1A}"/>
+                <a16:creationId xmlns:a16="http://schemas.microsoft.com/office/drawing/2014/main" id="{B625E0B5-B508-1064-A626-F25F069372DB}"/>
               </a:ext>
             </a:extLst>
           </p:cNvPr>
@@ -2987,7 +3027,7 @@
           <p:cNvPr id="6" name="Slide Number Placeholder 5">
             <a:extLst>
               <a:ext uri="{FF2B5EF4-FFF2-40B4-BE49-F238E27FC236}">
-                <a16:creationId xmlns:a16="http://schemas.microsoft.com/office/drawing/2014/main" id="{FE063810-B72A-E0BA-0978-EA6E48865877}"/>
+                <a16:creationId xmlns:a16="http://schemas.microsoft.com/office/drawing/2014/main" id="{11D632C1-FB35-0210-B226-1DE2320CA1CC}"/>
               </a:ext>
             </a:extLst>
           </p:cNvPr>
@@ -3032,23 +3072,24 @@
     </p:spTree>
     <p:extLst>
       <p:ext uri="{BB962C8B-B14F-4D97-AF65-F5344CB8AC3E}">
-        <p14:creationId xmlns:p14="http://schemas.microsoft.com/office/powerpoint/2010/main" val="414377569"/>
+        <p14:creationId xmlns:p14="http://schemas.microsoft.com/office/powerpoint/2010/main" val="155354605"/>
       </p:ext>
     </p:extLst>
   </p:cSld>
-  <p:clrMap bg1="lt1" tx1="dk1" bg2="lt2" tx2="dk2" accent1="accent1" accent2="accent2" accent3="accent3" accent4="accent4" accent5="accent5" accent6="accent6" hlink="hlink" folHlink="folHlink"/>
+  <p:clrMap bg1="dk1" tx1="lt1" bg2="dk2" tx2="lt2" accent1="accent1" accent2="accent2" accent3="accent3" accent4="accent4" accent5="accent5" accent6="accent6" hlink="hlink" folHlink="folHlink"/>
   <p:sldLayoutIdLst>
-    <p:sldLayoutId id="2147483649" r:id="rId1"/>
-    <p:sldLayoutId id="2147483650" r:id="rId2"/>
-    <p:sldLayoutId id="2147483651" r:id="rId3"/>
-    <p:sldLayoutId id="2147483652" r:id="rId4"/>
-    <p:sldLayoutId id="2147483653" r:id="rId5"/>
-    <p:sldLayoutId id="2147483654" r:id="rId6"/>
-    <p:sldLayoutId id="2147483655" r:id="rId7"/>
-    <p:sldLayoutId id="2147483656" r:id="rId8"/>
-    <p:sldLayoutId id="2147483657" r:id="rId9"/>
-    <p:sldLayoutId id="2147483658" r:id="rId10"/>
-    <p:sldLayoutId id="2147483659" r:id="rId11"/>
+    <p:sldLayoutId id="2147483828" r:id="rId1"/>
+    <p:sldLayoutId id="2147483829" r:id="rId2"/>
+    <p:sldLayoutId id="2147483830" r:id="rId3"/>
+    <p:sldLayoutId id="2147483831" r:id="rId4"/>
+    <p:sldLayoutId id="2147483832" r:id="rId5"/>
+    <p:sldLayoutId id="2147483833" r:id="rId6"/>
+    <p:sldLayoutId id="2147483834" r:id="rId7"/>
+    <p:sldLayoutId id="2147483835" r:id="rId8"/>
+    <p:sldLayoutId id="2147483836" r:id="rId9"/>
+    <p:sldLayoutId id="2147483837" r:id="rId10"/>
+    <p:sldLayoutId id="2147483838" r:id="rId11"/>
+    <p:sldLayoutId id="2147483839" r:id="rId12"/>
   </p:sldLayoutIdLst>
   <p:txStyles>
     <p:titleStyle>
@@ -3338,9 +3379,36 @@
   <p:cSld>
     <p:bg>
       <p:bgPr>
-        <a:solidFill>
-          <a:srgbClr val="121626"/>
-        </a:solidFill>
+        <a:gradFill flip="none" rotWithShape="1">
+          <a:gsLst>
+            <a:gs pos="0">
+              <a:schemeClr val="accent3">
+                <a:lumMod val="5000"/>
+                <a:lumOff val="95000"/>
+              </a:schemeClr>
+            </a:gs>
+            <a:gs pos="56000">
+              <a:schemeClr val="accent3">
+                <a:lumMod val="45000"/>
+                <a:lumOff val="55000"/>
+              </a:schemeClr>
+            </a:gs>
+            <a:gs pos="83000">
+              <a:schemeClr val="accent3">
+                <a:lumMod val="45000"/>
+                <a:lumOff val="55000"/>
+              </a:schemeClr>
+            </a:gs>
+            <a:gs pos="100000">
+              <a:schemeClr val="accent3">
+                <a:lumMod val="30000"/>
+                <a:lumOff val="70000"/>
+              </a:schemeClr>
+            </a:gs>
+          </a:gsLst>
+          <a:lin ang="5400000" scaled="1"/>
+          <a:tileRect/>
+        </a:gradFill>
         <a:effectLst/>
       </p:bgPr>
     </p:bg>
@@ -3373,7 +3441,7 @@
         <p:spPr>
           <a:xfrm>
             <a:off x="635000" y="104577"/>
-            <a:ext cx="10922000" cy="615553"/>
+            <a:ext cx="10922000" cy="461665"/>
           </a:xfrm>
           <a:prstGeom prst="rect">
             <a:avLst/>
@@ -3387,14 +3455,38 @@
           <a:lstStyle/>
           <a:p>
             <a:r>
-              <a:rPr lang="nb-NO" sz="3400" b="1">
+              <a:rPr lang="nb-NO" sz="2400" b="1" dirty="0" err="1">
                 <a:solidFill>
                   <a:srgbClr val="146DFF"/>
                 </a:solidFill>
               </a:rPr>
-              <a:t>What is Dapr?</a:t>
-            </a:r>
-            <a:endParaRPr lang="ru-RU" sz="3400" b="1">
+              <a:t>What</a:t>
+            </a:r>
+            <a:r>
+              <a:rPr lang="nb-NO" sz="2400" b="1" dirty="0">
+                <a:solidFill>
+                  <a:srgbClr val="146DFF"/>
+                </a:solidFill>
+              </a:rPr>
+              <a:t> is </a:t>
+            </a:r>
+            <a:r>
+              <a:rPr lang="nb-NO" sz="2400" b="1" dirty="0" err="1">
+                <a:solidFill>
+                  <a:srgbClr val="146DFF"/>
+                </a:solidFill>
+              </a:rPr>
+              <a:t>Dapr</a:t>
+            </a:r>
+            <a:r>
+              <a:rPr lang="nb-NO" sz="2400" b="1" dirty="0">
+                <a:solidFill>
+                  <a:srgbClr val="146DFF"/>
+                </a:solidFill>
+              </a:rPr>
+              <a:t>?</a:t>
+            </a:r>
+            <a:endParaRPr lang="ru-RU" sz="2400" b="1" dirty="0">
               <a:solidFill>
                 <a:srgbClr val="146DFF"/>
               </a:solidFill>
@@ -3416,7 +3508,7 @@
         </p:nvCxnSpPr>
         <p:spPr>
           <a:xfrm>
-            <a:off x="543560" y="1090168"/>
+            <a:off x="477970" y="800801"/>
             <a:ext cx="10922000" cy="0"/>
           </a:xfrm>
           <a:prstGeom prst="line">
@@ -3457,7 +3549,7 @@
         </p:nvSpPr>
         <p:spPr>
           <a:xfrm>
-            <a:off x="543560" y="690264"/>
+            <a:off x="508000" y="458417"/>
             <a:ext cx="10922000" cy="307777"/>
           </a:xfrm>
           <a:prstGeom prst="rect">
@@ -3472,14 +3564,46 @@
           <a:lstStyle/>
           <a:p>
             <a:r>
-              <a:rPr lang="en-US" sz="1400">
+              <a:rPr lang="en-US" sz="1400" dirty="0">
                 <a:solidFill>
                   <a:srgbClr val="646E82"/>
                 </a:solidFill>
               </a:rPr>
-              <a:t>Distributed Application Runtime  |  CNCF Incubating Project  |  dapr.io  |  v1.17 used in this demo</a:t>
-            </a:r>
-            <a:endParaRPr lang="ru-RU" sz="1400">
+              <a:t>Distributed Application Runtime  |  CNCF Project  |  </a:t>
+            </a:r>
+            <a:r>
+              <a:rPr lang="en-US" sz="1400" b="1" dirty="0">
+                <a:solidFill>
+                  <a:srgbClr val="646E82"/>
+                </a:solidFill>
+              </a:rPr>
+              <a:t>dapr.io  </a:t>
+            </a:r>
+            <a:r>
+              <a:rPr lang="en-US" sz="1400" dirty="0">
+                <a:solidFill>
+                  <a:srgbClr val="646E82"/>
+                </a:solidFill>
+              </a:rPr>
+              <a:t>|  latest </a:t>
+            </a:r>
+            <a:r>
+              <a:rPr lang="en-US" sz="1400" dirty="0" err="1">
+                <a:solidFill>
+                  <a:srgbClr val="646E82"/>
+                </a:solidFill>
+              </a:rPr>
+              <a:t>Dapr</a:t>
+            </a:r>
+            <a:r>
+              <a:rPr lang="en-US" sz="1400" dirty="0">
+                <a:solidFill>
+                  <a:srgbClr val="646E82"/>
+                </a:solidFill>
+              </a:rPr>
+              <a:t> v1.17 used in this demo</a:t>
+            </a:r>
+            <a:endParaRPr lang="ru-RU" sz="1400" dirty="0">
               <a:solidFill>
                 <a:srgbClr val="646E82"/>
               </a:solidFill>
@@ -3501,8 +3625,8 @@
         </p:nvSpPr>
         <p:spPr>
           <a:xfrm>
-            <a:off x="635000" y="1182296"/>
-            <a:ext cx="10795000" cy="312906"/>
+            <a:off x="604970" y="835409"/>
+            <a:ext cx="10795000" cy="1821011"/>
           </a:xfrm>
           <a:prstGeom prst="rect">
             <a:avLst/>
@@ -3516,280 +3640,253 @@
           <a:lstStyle/>
           <a:p>
             <a:r>
-              <a:rPr lang="nb-NO" sz="1400" b="1" dirty="0">
-                <a:solidFill>
-                  <a:srgbClr val="146DFF"/>
-                </a:solidFill>
-              </a:rPr>
-              <a:t>▸  Sidecar pattern   </a:t>
-            </a:r>
-            <a:r>
-              <a:rPr lang="en-US" sz="1300" dirty="0">
-                <a:solidFill>
-                  <a:srgbClr val="DCE1EB"/>
-                </a:solidFill>
-              </a:rPr>
-              <a:t>Your service calls localhost; </a:t>
-            </a:r>
-            <a:r>
-              <a:rPr lang="en-US" sz="1300" dirty="0" err="1">
-                <a:solidFill>
-                  <a:srgbClr val="DCE1EB"/>
+              <a:rPr lang="en-US" sz="1400" dirty="0">
+                <a:solidFill>
+                  <a:srgbClr val="1F5F87"/>
+                </a:solidFill>
+              </a:rPr>
+              <a:t>Why </a:t>
+            </a:r>
+            <a:r>
+              <a:rPr lang="en-US" sz="1400" dirty="0" err="1">
+                <a:solidFill>
+                  <a:srgbClr val="1F5F87"/>
                 </a:solidFill>
               </a:rPr>
               <a:t>Dapr</a:t>
             </a:r>
             <a:r>
-              <a:rPr lang="en-US" sz="1300" dirty="0">
-                <a:solidFill>
-                  <a:srgbClr val="DCE1EB"/>
-                </a:solidFill>
-              </a:rPr>
-              <a:t> handles brokers, retries, secrets — no library imports required</a:t>
-            </a:r>
-            <a:endParaRPr lang="ru-RU" sz="1300" dirty="0">
+              <a:rPr lang="en-US" sz="1400" dirty="0">
+                <a:solidFill>
+                  <a:srgbClr val="1F5F87"/>
+                </a:solidFill>
+              </a:rPr>
+              <a:t> is a strong software choice</a:t>
+            </a:r>
+            <a:endParaRPr lang="ru-RU" sz="1400" dirty="0">
               <a:solidFill>
-                <a:srgbClr val="DCE1EB"/>
+                <a:srgbClr val="1F5F87"/>
               </a:solidFill>
             </a:endParaRPr>
           </a:p>
-        </p:txBody>
-      </p:sp>
-      <p:sp>
-        <p:nvSpPr>
-          <p:cNvPr id="6" name="TextBox 5">
-            <a:extLst>
-              <a:ext uri="{FF2B5EF4-FFF2-40B4-BE49-F238E27FC236}">
-                <a16:creationId xmlns:a16="http://schemas.microsoft.com/office/drawing/2014/main" id="{0B1CBCEB-BAE9-F2B7-5F11-7AA83A31762F}"/>
-              </a:ext>
-            </a:extLst>
-          </p:cNvPr>
-          <p:cNvSpPr txBox="1"/>
-          <p:nvPr/>
-        </p:nvSpPr>
-        <p:spPr>
-          <a:xfrm>
-            <a:off x="635000" y="1401668"/>
-            <a:ext cx="10795000" cy="312906"/>
-          </a:xfrm>
-          <a:prstGeom prst="rect">
-            <a:avLst/>
-          </a:prstGeom>
-          <a:noFill/>
-        </p:spPr>
-        <p:txBody>
-          <a:bodyPr vert="horz" wrap="square" lIns="76200" tIns="50800" rtlCol="0">
-            <a:spAutoFit/>
-          </a:bodyPr>
-          <a:lstStyle/>
-          <a:p>
-            <a:r>
-              <a:rPr lang="nb-NO" sz="1400" b="1" dirty="0">
-                <a:solidFill>
-                  <a:srgbClr val="146DFF"/>
-                </a:solidFill>
-              </a:rPr>
-              <a:t>▸  10 building blocks   </a:t>
-            </a:r>
-            <a:r>
-              <a:rPr lang="en-US" sz="1300" dirty="0">
-                <a:solidFill>
-                  <a:srgbClr val="DCE1EB"/>
-                </a:solidFill>
-              </a:rPr>
-              <a:t>Pub/Sub, Service Invocation, State, Actors, Workflows, Bindings, Secrets, Config, Lock, Crypto</a:t>
-            </a:r>
-            <a:endParaRPr lang="ru-RU" sz="1300" dirty="0">
+          <a:p>
+            <a:pPr marL="285750" indent="-285750">
+              <a:buFont typeface="Arial" panose="020B0604020202020204" pitchFamily="34" charset="0"/>
+              <a:buChar char="•"/>
+            </a:pPr>
+            <a:r>
+              <a:rPr lang="en-US" sz="1400" b="1" dirty="0">
+                <a:solidFill>
+                  <a:srgbClr val="1F5F87"/>
+                </a:solidFill>
+              </a:rPr>
+              <a:t>Mature and trusted</a:t>
+            </a:r>
+            <a:r>
+              <a:rPr lang="en-US" sz="1400" dirty="0">
+                <a:solidFill>
+                  <a:srgbClr val="1F5F87"/>
+                </a:solidFill>
+              </a:rPr>
+              <a:t> — CNCF Graduated project since 30 Oct 2024, signaling production readiness and stable governance.</a:t>
+            </a:r>
+            <a:endParaRPr lang="ru-RU" sz="1400" dirty="0">
               <a:solidFill>
-                <a:srgbClr val="DCE1EB"/>
+                <a:srgbClr val="1F5F87"/>
               </a:solidFill>
             </a:endParaRPr>
           </a:p>
-        </p:txBody>
-      </p:sp>
-      <p:sp>
-        <p:nvSpPr>
-          <p:cNvPr id="7" name="TextBox 6">
-            <a:extLst>
-              <a:ext uri="{FF2B5EF4-FFF2-40B4-BE49-F238E27FC236}">
-                <a16:creationId xmlns:a16="http://schemas.microsoft.com/office/drawing/2014/main" id="{187189BA-1E34-599E-F1D7-B5386108C78D}"/>
-              </a:ext>
-            </a:extLst>
-          </p:cNvPr>
-          <p:cNvSpPr txBox="1"/>
-          <p:nvPr/>
-        </p:nvSpPr>
-        <p:spPr>
-          <a:xfrm>
-            <a:off x="635000" y="1643225"/>
-            <a:ext cx="10795000" cy="312906"/>
-          </a:xfrm>
-          <a:prstGeom prst="rect">
-            <a:avLst/>
-          </a:prstGeom>
-          <a:noFill/>
-        </p:spPr>
-        <p:txBody>
-          <a:bodyPr vert="horz" wrap="square" lIns="76200" tIns="50800" rtlCol="0">
-            <a:spAutoFit/>
-          </a:bodyPr>
-          <a:lstStyle/>
-          <a:p>
-            <a:r>
-              <a:rPr lang="nb-NO" sz="1400" b="1" dirty="0">
-                <a:solidFill>
-                  <a:srgbClr val="146DFF"/>
-                </a:solidFill>
-              </a:rPr>
-              <a:t>▸  Pluggable components   </a:t>
-            </a:r>
-            <a:r>
-              <a:rPr lang="en-US" sz="1300" dirty="0">
-                <a:solidFill>
-                  <a:srgbClr val="DCE1EB"/>
-                </a:solidFill>
-              </a:rPr>
-              <a:t>Switch from Azure Service Bus to Kafka or RabbitMQ by editing one YAML file — zero code change</a:t>
-            </a:r>
-            <a:endParaRPr lang="ru-RU" sz="1300" dirty="0">
+          <a:p>
+            <a:pPr marL="285750" indent="-285750">
+              <a:buFont typeface="Arial" panose="020B0604020202020204" pitchFamily="34" charset="0"/>
+              <a:buChar char="•"/>
+            </a:pPr>
+            <a:r>
+              <a:rPr lang="en-US" sz="1400" b="1" dirty="0">
+                <a:solidFill>
+                  <a:srgbClr val="1F5F87"/>
+                </a:solidFill>
+              </a:rPr>
+              <a:t>Open standards by default</a:t>
+            </a:r>
+            <a:r>
+              <a:rPr lang="en-US" sz="1400" dirty="0">
+                <a:solidFill>
+                  <a:srgbClr val="1F5F87"/>
+                </a:solidFill>
+              </a:rPr>
+              <a:t> — uses </a:t>
+            </a:r>
+            <a:r>
+              <a:rPr lang="en-US" sz="1400" dirty="0" err="1">
+                <a:solidFill>
+                  <a:srgbClr val="1F5F87"/>
+                </a:solidFill>
+              </a:rPr>
+              <a:t>CloudEvents</a:t>
+            </a:r>
+            <a:r>
+              <a:rPr lang="en-US" sz="1400" dirty="0">
+                <a:solidFill>
+                  <a:srgbClr val="1F5F87"/>
+                </a:solidFill>
+              </a:rPr>
+              <a:t> 1.0 for pub/sub and </a:t>
+            </a:r>
+            <a:r>
+              <a:rPr lang="en-US" sz="1400" dirty="0" err="1">
+                <a:solidFill>
+                  <a:srgbClr val="1F5F87"/>
+                </a:solidFill>
+              </a:rPr>
+              <a:t>OpenTelemetry</a:t>
+            </a:r>
+            <a:r>
+              <a:rPr lang="en-US" sz="1400" dirty="0">
+                <a:solidFill>
+                  <a:srgbClr val="1F5F87"/>
+                </a:solidFill>
+              </a:rPr>
+              <a:t> + W3C Trace Context for tracing.</a:t>
+            </a:r>
+            <a:endParaRPr lang="ru-RU" sz="1400" dirty="0">
               <a:solidFill>
-                <a:srgbClr val="DCE1EB"/>
+                <a:srgbClr val="1F5F87"/>
               </a:solidFill>
             </a:endParaRPr>
           </a:p>
-        </p:txBody>
-      </p:sp>
-      <p:sp>
-        <p:nvSpPr>
-          <p:cNvPr id="8" name="TextBox 7">
-            <a:extLst>
-              <a:ext uri="{FF2B5EF4-FFF2-40B4-BE49-F238E27FC236}">
-                <a16:creationId xmlns:a16="http://schemas.microsoft.com/office/drawing/2014/main" id="{8BF27323-BDA9-FD7A-57B4-482F3EAA2F2F}"/>
-              </a:ext>
-            </a:extLst>
-          </p:cNvPr>
-          <p:cNvSpPr txBox="1"/>
-          <p:nvPr/>
-        </p:nvSpPr>
-        <p:spPr>
-          <a:xfrm>
-            <a:off x="635000" y="1925174"/>
-            <a:ext cx="10795000" cy="312906"/>
-          </a:xfrm>
-          <a:prstGeom prst="rect">
-            <a:avLst/>
-          </a:prstGeom>
-          <a:noFill/>
-        </p:spPr>
-        <p:txBody>
-          <a:bodyPr vert="horz" wrap="square" lIns="76200" tIns="50800" rtlCol="0">
-            <a:spAutoFit/>
-          </a:bodyPr>
-          <a:lstStyle/>
-          <a:p>
-            <a:r>
-              <a:rPr lang="nb-NO" sz="1400" b="1" dirty="0">
-                <a:solidFill>
-                  <a:srgbClr val="146DFF"/>
-                </a:solidFill>
-              </a:rPr>
-              <a:t>▸  Built-in resiliency   </a:t>
-            </a:r>
-            <a:r>
-              <a:rPr lang="en-US" sz="1300" dirty="0">
-                <a:solidFill>
-                  <a:srgbClr val="DCE1EB"/>
-                </a:solidFill>
-              </a:rPr>
-              <a:t>Retries, timeouts, circuit breakers declared in </a:t>
-            </a:r>
-            <a:r>
-              <a:rPr lang="en-US" sz="1300" dirty="0" err="1">
-                <a:solidFill>
-                  <a:srgbClr val="DCE1EB"/>
-                </a:solidFill>
-              </a:rPr>
-              <a:t>resiliency.yaml</a:t>
-            </a:r>
-            <a:r>
-              <a:rPr lang="en-US" sz="1300" dirty="0">
-                <a:solidFill>
-                  <a:srgbClr val="DCE1EB"/>
-                </a:solidFill>
-              </a:rPr>
-              <a:t> — not scattered through application code</a:t>
-            </a:r>
-            <a:endParaRPr lang="ru-RU" sz="1300" dirty="0">
+          <a:p>
+            <a:pPr marL="285750" indent="-285750">
+              <a:buFont typeface="Arial" panose="020B0604020202020204" pitchFamily="34" charset="0"/>
+              <a:buChar char="•"/>
+            </a:pPr>
+            <a:r>
+              <a:rPr lang="en-US" sz="1400" b="1" dirty="0">
+                <a:solidFill>
+                  <a:srgbClr val="1F5F87"/>
+                </a:solidFill>
+              </a:rPr>
+              <a:t>Portable architecture</a:t>
+            </a:r>
+            <a:r>
+              <a:rPr lang="en-US" sz="1400" dirty="0">
+                <a:solidFill>
+                  <a:srgbClr val="1F5F87"/>
+                </a:solidFill>
+              </a:rPr>
+              <a:t> — decouples app code from brokers, state stores, and underlying infrastructure.</a:t>
+            </a:r>
+            <a:endParaRPr lang="ru-RU" sz="1400" dirty="0">
               <a:solidFill>
-                <a:srgbClr val="DCE1EB"/>
+                <a:srgbClr val="1F5F87"/>
               </a:solidFill>
             </a:endParaRPr>
           </a:p>
-        </p:txBody>
-      </p:sp>
-      <p:sp>
-        <p:nvSpPr>
-          <p:cNvPr id="9" name="TextBox 8">
-            <a:extLst>
-              <a:ext uri="{FF2B5EF4-FFF2-40B4-BE49-F238E27FC236}">
-                <a16:creationId xmlns:a16="http://schemas.microsoft.com/office/drawing/2014/main" id="{DC46B8C1-6FCB-D74B-C2E2-0D32E89FD4D9}"/>
-              </a:ext>
-            </a:extLst>
-          </p:cNvPr>
-          <p:cNvSpPr txBox="1"/>
-          <p:nvPr/>
-        </p:nvSpPr>
-        <p:spPr>
-          <a:xfrm>
-            <a:off x="635000" y="2180373"/>
-            <a:ext cx="10795000" cy="312906"/>
-          </a:xfrm>
-          <a:prstGeom prst="rect">
-            <a:avLst/>
-          </a:prstGeom>
-          <a:noFill/>
-        </p:spPr>
-        <p:txBody>
-          <a:bodyPr vert="horz" wrap="square" lIns="76200" tIns="50800" rtlCol="0">
-            <a:spAutoFit/>
-          </a:bodyPr>
-          <a:lstStyle/>
-          <a:p>
-            <a:r>
-              <a:rPr lang="nb-NO" sz="1400" b="1" dirty="0">
-                <a:solidFill>
-                  <a:srgbClr val="146DFF"/>
-                </a:solidFill>
-              </a:rPr>
-              <a:t>▸  Observability   </a:t>
-            </a:r>
-            <a:r>
-              <a:rPr lang="en-US" sz="1300" dirty="0">
-                <a:solidFill>
-                  <a:srgbClr val="DCE1EB"/>
-                </a:solidFill>
-              </a:rPr>
-              <a:t>W3C distributed tracing, Prometheus metrics, structured logs via </a:t>
-            </a:r>
-            <a:r>
-              <a:rPr lang="en-US" sz="1300" dirty="0" err="1">
-                <a:solidFill>
-                  <a:srgbClr val="DCE1EB"/>
-                </a:solidFill>
-              </a:rPr>
-              <a:t>OpenTelemetry</a:t>
-            </a:r>
-            <a:r>
-              <a:rPr lang="en-US" sz="1300" dirty="0">
-                <a:solidFill>
-                  <a:srgbClr val="DCE1EB"/>
-                </a:solidFill>
-              </a:rPr>
-              <a:t> — automatic propagation</a:t>
-            </a:r>
-            <a:endParaRPr lang="ru-RU" sz="1300" dirty="0">
+          <a:p>
+            <a:pPr marL="285750" indent="-285750">
+              <a:buFont typeface="Arial" panose="020B0604020202020204" pitchFamily="34" charset="0"/>
+              <a:buChar char="•"/>
+            </a:pPr>
+            <a:r>
+              <a:rPr lang="en-US" sz="1400" b="1" dirty="0">
+                <a:solidFill>
+                  <a:srgbClr val="1F5F87"/>
+                </a:solidFill>
+              </a:rPr>
+              <a:t>Rich building blocks</a:t>
+            </a:r>
+            <a:r>
+              <a:rPr lang="en-US" sz="1400" dirty="0">
+                <a:solidFill>
+                  <a:srgbClr val="1F5F87"/>
+                </a:solidFill>
+              </a:rPr>
+              <a:t> — covers pub/sub, service invocation, state, actors, workflows, secrets, config, locks, and more.</a:t>
+            </a:r>
+            <a:endParaRPr lang="ru-RU" sz="1400" dirty="0">
               <a:solidFill>
-                <a:srgbClr val="DCE1EB"/>
+                <a:srgbClr val="1F5F87"/>
+              </a:solidFill>
+            </a:endParaRPr>
+          </a:p>
+          <a:p>
+            <a:pPr marL="285750" indent="-285750">
+              <a:buFont typeface="Arial" panose="020B0604020202020204" pitchFamily="34" charset="0"/>
+              <a:buChar char="•"/>
+            </a:pPr>
+            <a:r>
+              <a:rPr lang="en-US" sz="1400" b="1" dirty="0">
+                <a:solidFill>
+                  <a:srgbClr val="1F5F87"/>
+                </a:solidFill>
+              </a:rPr>
+              <a:t>Developer productivity</a:t>
+            </a:r>
+            <a:r>
+              <a:rPr lang="en-US" sz="1400" dirty="0">
+                <a:solidFill>
+                  <a:srgbClr val="1F5F87"/>
+                </a:solidFill>
+              </a:rPr>
+              <a:t> — sidecar APIs reduce boilerplate and keep business code cleaner and more focused.</a:t>
+            </a:r>
+            <a:endParaRPr lang="ru-RU" sz="1400" dirty="0">
+              <a:solidFill>
+                <a:srgbClr val="1F5F87"/>
+              </a:solidFill>
+            </a:endParaRPr>
+          </a:p>
+          <a:p>
+            <a:pPr marL="285750" indent="-285750">
+              <a:buFont typeface="Arial" panose="020B0604020202020204" pitchFamily="34" charset="0"/>
+              <a:buChar char="•"/>
+            </a:pPr>
+            <a:r>
+              <a:rPr lang="en-US" sz="1400" b="1" dirty="0">
+                <a:solidFill>
+                  <a:srgbClr val="1F5F87"/>
+                </a:solidFill>
+              </a:rPr>
+              <a:t>Operational resilience and observability</a:t>
+            </a:r>
+            <a:r>
+              <a:rPr lang="en-US" sz="1400" dirty="0">
+                <a:solidFill>
+                  <a:srgbClr val="1F5F87"/>
+                </a:solidFill>
+              </a:rPr>
+              <a:t> — built around security, resiliency, metrics, logs, and distributed tracing.</a:t>
+            </a:r>
+            <a:endParaRPr lang="ru-RU" sz="1400" dirty="0">
+              <a:solidFill>
+                <a:srgbClr val="1F5F87"/>
+              </a:solidFill>
+            </a:endParaRPr>
+          </a:p>
+          <a:p>
+            <a:pPr marL="285750" indent="-285750">
+              <a:buFont typeface="Arial" panose="020B0604020202020204" pitchFamily="34" charset="0"/>
+              <a:buChar char="•"/>
+            </a:pPr>
+            <a:r>
+              <a:rPr lang="en-US" sz="1400" b="1" dirty="0">
+                <a:solidFill>
+                  <a:srgbClr val="1F5F87"/>
+                </a:solidFill>
+              </a:rPr>
+              <a:t>Ecosystem and extensibility</a:t>
+            </a:r>
+            <a:r>
+              <a:rPr lang="en-US" sz="1400" dirty="0">
+                <a:solidFill>
+                  <a:srgbClr val="1F5F87"/>
+                </a:solidFill>
+              </a:rPr>
+              <a:t> — broad component model makes it easier to integrate different backends without rewriting services.</a:t>
+            </a:r>
+            <a:endParaRPr lang="ru-RU" sz="1400" dirty="0">
+              <a:solidFill>
+                <a:srgbClr val="1F5F87"/>
               </a:solidFill>
             </a:endParaRPr>
           </a:p>
@@ -3810,7 +3907,7 @@
           <p:nvPr/>
         </p:nvPicPr>
         <p:blipFill>
-          <a:blip r:embed="rId2">
+          <a:blip r:embed="rId3">
             <a:extLst>
               <a:ext uri="{28A0092B-C50C-407E-A947-70E740481C1C}">
                 <a14:useLocalDpi xmlns:a14="http://schemas.microsoft.com/office/drawing/2010/main" val="0"/>
@@ -3824,13 +3921,20 @@
         </p:blipFill>
         <p:spPr bwMode="auto">
           <a:xfrm>
-            <a:off x="1563624" y="2501455"/>
-            <a:ext cx="7744968" cy="4356545"/>
+            <a:off x="2193085" y="2659842"/>
+            <a:ext cx="7277476" cy="4093581"/>
           </a:xfrm>
           <a:prstGeom prst="rect">
             <a:avLst/>
           </a:prstGeom>
           <a:noFill/>
+          <a:effectLst>
+            <a:outerShdw blurRad="50800" dist="38100" dir="2700000" algn="tl" rotWithShape="0">
+              <a:prstClr val="black">
+                <a:alpha val="40000"/>
+              </a:prstClr>
+            </a:outerShdw>
+          </a:effectLst>
           <a:extLst>
             <a:ext uri="{909E8E84-426E-40DD-AFC4-6F175D3DCCD1}">
               <a14:hiddenFill xmlns:a14="http://schemas.microsoft.com/office/drawing/2010/main">
@@ -3850,7 +3954,7 @@
     </p:extLst>
   </p:cSld>
   <p:clrMapOvr>
-    <a:masterClrMapping/>
+    <a:overrideClrMapping bg1="dk1" tx1="lt1" bg2="dk2" tx2="lt2" accent1="accent1" accent2="accent2" accent3="accent3" accent4="accent4" accent5="accent5" accent6="accent6" hlink="hlink" folHlink="folHlink"/>
   </p:clrMapOvr>
 </p:sld>
 </file>
@@ -3858,370 +3962,38 @@
 <file path=ppt/slides/slide2.xml><?xml version="1.0" encoding="utf-8"?>
 <p:sld xmlns:a="http://schemas.openxmlformats.org/drawingml/2006/main" xmlns:r="http://schemas.openxmlformats.org/officeDocument/2006/relationships" xmlns:p="http://schemas.openxmlformats.org/presentationml/2006/main">
   <p:cSld>
-    <p:spTree>
-      <p:nvGrpSpPr>
-        <p:cNvPr id="1" name=""/>
-        <p:cNvGrpSpPr/>
-        <p:nvPr/>
-      </p:nvGrpSpPr>
-      <p:grpSpPr>
-        <a:xfrm>
-          <a:off x="0" y="0"/>
-          <a:ext cx="0" cy="0"/>
-          <a:chOff x="0" y="0"/>
-          <a:chExt cx="0" cy="0"/>
-        </a:xfrm>
-      </p:grpSpPr>
-      <p:sp>
-        <p:nvSpPr>
-          <p:cNvPr id="3" name="TextBox 2">
-            <a:extLst>
-              <a:ext uri="{FF2B5EF4-FFF2-40B4-BE49-F238E27FC236}">
-                <a16:creationId xmlns:a16="http://schemas.microsoft.com/office/drawing/2014/main" id="{25B48D5F-1246-D446-A0AE-8545C0A7A8DB}"/>
-              </a:ext>
-            </a:extLst>
-          </p:cNvPr>
-          <p:cNvSpPr txBox="1"/>
-          <p:nvPr/>
-        </p:nvSpPr>
-        <p:spPr>
-          <a:xfrm>
-            <a:off x="2324862" y="529852"/>
-            <a:ext cx="6094476" cy="4832092"/>
-          </a:xfrm>
-          <a:prstGeom prst="rect">
-            <a:avLst/>
-          </a:prstGeom>
-          <a:noFill/>
-        </p:spPr>
-        <p:txBody>
-          <a:bodyPr wrap="square">
-            <a:spAutoFit/>
-          </a:bodyPr>
-          <a:lstStyle/>
-          <a:p>
-            <a:pPr>
-              <a:buNone/>
-            </a:pPr>
-            <a:r>
-              <a:rPr lang="en-US" sz="1100" dirty="0"/>
-              <a:t>1. Vendor and Broker Portability</a:t>
-            </a:r>
-          </a:p>
-          <a:p>
-            <a:pPr>
-              <a:buNone/>
-            </a:pPr>
-            <a:r>
-              <a:rPr lang="en-US" sz="1100" dirty="0" err="1"/>
-              <a:t>Dapr</a:t>
-            </a:r>
-            <a:r>
-              <a:rPr lang="en-US" sz="1100" dirty="0"/>
-              <a:t> abstracts the underlying message broker behind a consistent API. This allows you to swap brokers (e.g., using </a:t>
-            </a:r>
-            <a:r>
-              <a:rPr lang="en-US" sz="1100" b="1" dirty="0"/>
-              <a:t>Redis Streams</a:t>
-            </a:r>
-            <a:r>
-              <a:rPr lang="en-US" sz="1100" dirty="0"/>
-              <a:t> for local development and </a:t>
-            </a:r>
-            <a:r>
-              <a:rPr lang="en-US" sz="1100" b="1" dirty="0"/>
-              <a:t>Azure Service Bus</a:t>
-            </a:r>
-            <a:r>
-              <a:rPr lang="en-US" sz="1100" dirty="0"/>
-              <a:t> for production) by simply changing a configuration file, without altering any application code. </a:t>
-            </a:r>
-          </a:p>
-          <a:p>
-            <a:pPr>
-              <a:buNone/>
-            </a:pPr>
-            <a:r>
-              <a:rPr lang="en-US" sz="1100" dirty="0"/>
-              <a:t>2. Standardized Communication (</a:t>
-            </a:r>
-            <a:r>
-              <a:rPr lang="en-US" sz="1100" dirty="0" err="1"/>
-              <a:t>CloudEvents</a:t>
-            </a:r>
-            <a:r>
-              <a:rPr lang="en-US" sz="1100" dirty="0"/>
-              <a:t>)</a:t>
-            </a:r>
-          </a:p>
-          <a:p>
-            <a:pPr>
-              <a:buNone/>
-            </a:pPr>
-            <a:r>
-              <a:rPr lang="en-US" sz="1100" dirty="0" err="1"/>
-              <a:t>Dapr</a:t>
-            </a:r>
-            <a:r>
-              <a:rPr lang="en-US" sz="1100" dirty="0"/>
-              <a:t> automatically wraps outgoing messages in a standardized </a:t>
-            </a:r>
-            <a:r>
-              <a:rPr lang="en-US" sz="1100" b="1" dirty="0" err="1"/>
-              <a:t>CloudEvents</a:t>
-            </a:r>
-            <a:r>
-              <a:rPr lang="en-US" sz="1100" dirty="0"/>
-              <a:t> envelope. This ensures consistent metadata and formatting across all services, which simplifies cross-platform integration and event routing. </a:t>
-            </a:r>
-          </a:p>
-          <a:p>
-            <a:pPr>
-              <a:buNone/>
-            </a:pPr>
-            <a:r>
-              <a:rPr lang="en-US" sz="1100" dirty="0"/>
-              <a:t>3. Built-in Resiliency and Reliability </a:t>
-            </a:r>
-          </a:p>
-          <a:p>
-            <a:pPr>
-              <a:buNone/>
-            </a:pPr>
-            <a:r>
-              <a:rPr lang="en-US" sz="1100" dirty="0" err="1"/>
-              <a:t>Dapr</a:t>
-            </a:r>
-            <a:r>
-              <a:rPr lang="en-US" sz="1100" dirty="0"/>
-              <a:t> provides features that you would otherwise have to implement manually using a direct SDK: </a:t>
-            </a:r>
-          </a:p>
-          <a:p>
-            <a:pPr>
-              <a:buFont typeface="Arial" panose="020B0604020202020204" pitchFamily="34" charset="0"/>
-              <a:buChar char="•"/>
-            </a:pPr>
-            <a:r>
-              <a:rPr lang="en-US" sz="1100" b="1" dirty="0"/>
-              <a:t>At-least-once delivery:</a:t>
-            </a:r>
-            <a:r>
-              <a:rPr lang="en-US" sz="1100" dirty="0"/>
-              <a:t> </a:t>
-            </a:r>
-            <a:r>
-              <a:rPr lang="en-US" sz="1100" dirty="0" err="1"/>
-              <a:t>Dapr</a:t>
-            </a:r>
-            <a:r>
-              <a:rPr lang="en-US" sz="1100" dirty="0"/>
-              <a:t> guarantees messages reach subscribers even if the application or broker temporarily fails.</a:t>
-            </a:r>
-          </a:p>
-          <a:p>
-            <a:pPr>
-              <a:buFont typeface="Arial" panose="020B0604020202020204" pitchFamily="34" charset="0"/>
-              <a:buChar char="•"/>
-            </a:pPr>
-            <a:r>
-              <a:rPr lang="en-US" sz="1100" b="1" dirty="0"/>
-              <a:t>Automatic Retries:</a:t>
-            </a:r>
-            <a:r>
-              <a:rPr lang="en-US" sz="1100" dirty="0"/>
-              <a:t> </a:t>
-            </a:r>
-            <a:r>
-              <a:rPr lang="en-US" sz="1100" dirty="0" err="1"/>
-              <a:t>Dapr</a:t>
-            </a:r>
-            <a:r>
-              <a:rPr lang="en-US" sz="1100" dirty="0"/>
-              <a:t> handles retries for failed message deliveries based on configurable policies.</a:t>
-            </a:r>
-          </a:p>
-          <a:p>
-            <a:pPr>
-              <a:buFont typeface="Arial" panose="020B0604020202020204" pitchFamily="34" charset="0"/>
-              <a:buChar char="•"/>
-            </a:pPr>
-            <a:r>
-              <a:rPr lang="en-US" sz="1100" b="1" dirty="0"/>
-              <a:t>Competing Consumers:</a:t>
-            </a:r>
-            <a:r>
-              <a:rPr lang="en-US" sz="1100" dirty="0"/>
-              <a:t> </a:t>
-            </a:r>
-            <a:r>
-              <a:rPr lang="en-US" sz="1100" dirty="0" err="1"/>
-              <a:t>Dapr</a:t>
-            </a:r>
-            <a:r>
-              <a:rPr lang="en-US" sz="1100" dirty="0"/>
-              <a:t> manages consumer groups and ensures that only one instance of a scaled-out service processes a specific message. </a:t>
-            </a:r>
-          </a:p>
-          <a:p>
-            <a:pPr>
-              <a:buNone/>
-            </a:pPr>
-            <a:r>
-              <a:rPr lang="en-US" sz="1100" dirty="0"/>
-              <a:t>4. Reduced Code Complexity </a:t>
-            </a:r>
-          </a:p>
-          <a:p>
-            <a:pPr>
-              <a:buFont typeface="Arial" panose="020B0604020202020204" pitchFamily="34" charset="0"/>
-              <a:buChar char="•"/>
-            </a:pPr>
-            <a:r>
-              <a:rPr lang="en-US" sz="1100" b="1" dirty="0"/>
-              <a:t>Smaller SDK footprint:</a:t>
-            </a:r>
-            <a:r>
-              <a:rPr lang="en-US" sz="1100" dirty="0"/>
-              <a:t> By using </a:t>
-            </a:r>
-            <a:r>
-              <a:rPr lang="en-US" sz="1100" dirty="0" err="1"/>
-              <a:t>Dapr’s</a:t>
-            </a:r>
-            <a:r>
-              <a:rPr lang="en-US" sz="1100" dirty="0"/>
-              <a:t> HTTP or </a:t>
-            </a:r>
-            <a:r>
-              <a:rPr lang="en-US" sz="1100" dirty="0" err="1"/>
-              <a:t>gRPC</a:t>
-            </a:r>
-            <a:r>
-              <a:rPr lang="en-US" sz="1100" dirty="0"/>
-              <a:t> APIs, you avoid importing heavy, broker-specific SDKs into your code.</a:t>
-            </a:r>
-          </a:p>
-          <a:p>
-            <a:pPr>
-              <a:buFont typeface="Arial" panose="020B0604020202020204" pitchFamily="34" charset="0"/>
-              <a:buChar char="•"/>
-            </a:pPr>
-            <a:r>
-              <a:rPr lang="en-US" sz="1100" b="1" dirty="0"/>
-              <a:t>Simplified Subscriptions:</a:t>
-            </a:r>
-            <a:r>
-              <a:rPr lang="en-US" sz="1100" dirty="0"/>
-              <a:t> You can define subscriptions </a:t>
-            </a:r>
-            <a:r>
-              <a:rPr lang="en-US" sz="1100" b="1" dirty="0"/>
-              <a:t>declaratively</a:t>
-            </a:r>
-            <a:r>
-              <a:rPr lang="en-US" sz="1100" dirty="0"/>
-              <a:t> in YAML files rather than writing code to manage connection strings and listener loops.</a:t>
-            </a:r>
-          </a:p>
-          <a:p>
-            <a:pPr>
-              <a:buFont typeface="Arial" panose="020B0604020202020204" pitchFamily="34" charset="0"/>
-              <a:buChar char="•"/>
-            </a:pPr>
-            <a:r>
-              <a:rPr lang="en-US" sz="1100" b="1" dirty="0"/>
-              <a:t>Content-Based Routing:</a:t>
-            </a:r>
-            <a:r>
-              <a:rPr lang="en-US" sz="1100" dirty="0"/>
-              <a:t> </a:t>
-            </a:r>
-            <a:r>
-              <a:rPr lang="en-US" sz="1100" dirty="0" err="1"/>
-              <a:t>Dapr</a:t>
-            </a:r>
-            <a:r>
-              <a:rPr lang="en-US" sz="1100" dirty="0"/>
-              <a:t> allows you to route messages to different service endpoints based on the event's content without writing complex branching logic in your application. </a:t>
-            </a:r>
-          </a:p>
-          <a:p>
-            <a:pPr>
-              <a:buNone/>
-            </a:pPr>
-            <a:r>
-              <a:rPr lang="en-US" sz="1100" dirty="0"/>
-              <a:t>5. Enhanced Observability and Security </a:t>
-            </a:r>
-          </a:p>
-          <a:p>
-            <a:pPr>
-              <a:buFont typeface="Arial" panose="020B0604020202020204" pitchFamily="34" charset="0"/>
-              <a:buChar char="•"/>
-            </a:pPr>
-            <a:r>
-              <a:rPr lang="en-US" sz="1100" b="1" dirty="0"/>
-              <a:t>Tracing:</a:t>
-            </a:r>
-            <a:r>
-              <a:rPr lang="en-US" sz="1100" dirty="0"/>
-              <a:t> </a:t>
-            </a:r>
-            <a:r>
-              <a:rPr lang="en-US" sz="1100" dirty="0" err="1"/>
-              <a:t>Dapr</a:t>
-            </a:r>
-            <a:r>
-              <a:rPr lang="en-US" sz="1100" dirty="0"/>
-              <a:t> automatically injects trace headers, enabling end-to-end distributed tracing of messages through your entire system.</a:t>
-            </a:r>
-          </a:p>
-          <a:p>
-            <a:pPr>
-              <a:buFont typeface="Arial" panose="020B0604020202020204" pitchFamily="34" charset="0"/>
-              <a:buChar char="•"/>
-            </a:pPr>
-            <a:r>
-              <a:rPr lang="en-US" sz="1100" b="1" dirty="0"/>
-              <a:t>Scoped Access:</a:t>
-            </a:r>
-            <a:r>
-              <a:rPr lang="en-US" sz="1100" dirty="0"/>
-              <a:t> You can use </a:t>
-            </a:r>
-            <a:r>
-              <a:rPr lang="en-US" sz="1100" dirty="0" err="1"/>
-              <a:t>Dapr</a:t>
-            </a:r>
-            <a:r>
-              <a:rPr lang="en-US" sz="1100" dirty="0"/>
-              <a:t> components to strictly control which applications are permitted to publish or subscribe to specific topics. </a:t>
-            </a:r>
-          </a:p>
-        </p:txBody>
-      </p:sp>
-    </p:spTree>
-    <p:extLst>
-      <p:ext uri="{BB962C8B-B14F-4D97-AF65-F5344CB8AC3E}">
-        <p14:creationId xmlns:p14="http://schemas.microsoft.com/office/powerpoint/2010/main" val="1678035857"/>
-      </p:ext>
-    </p:extLst>
-  </p:cSld>
-  <p:clrMapOvr>
-    <a:masterClrMapping/>
-  </p:clrMapOvr>
-</p:sld>
-</file>
-
-<file path=ppt/slides/slide3.xml><?xml version="1.0" encoding="utf-8"?>
-<p:sld xmlns:a="http://schemas.openxmlformats.org/drawingml/2006/main" xmlns:r="http://schemas.openxmlformats.org/officeDocument/2006/relationships" xmlns:p="http://schemas.openxmlformats.org/presentationml/2006/main">
-  <p:cSld>
     <p:bg>
       <p:bgPr>
-        <a:solidFill>
-          <a:srgbClr val="121626"/>
-        </a:solidFill>
+        <a:gradFill flip="none" rotWithShape="1">
+          <a:gsLst>
+            <a:gs pos="0">
+              <a:schemeClr val="accent3">
+                <a:lumMod val="5000"/>
+                <a:lumOff val="95000"/>
+              </a:schemeClr>
+            </a:gs>
+            <a:gs pos="56000">
+              <a:schemeClr val="accent3">
+                <a:lumMod val="45000"/>
+                <a:lumOff val="55000"/>
+              </a:schemeClr>
+            </a:gs>
+            <a:gs pos="83000">
+              <a:schemeClr val="accent3">
+                <a:lumMod val="45000"/>
+                <a:lumOff val="55000"/>
+              </a:schemeClr>
+            </a:gs>
+            <a:gs pos="100000">
+              <a:schemeClr val="accent3">
+                <a:lumMod val="30000"/>
+                <a:lumOff val="70000"/>
+              </a:schemeClr>
+            </a:gs>
+          </a:gsLst>
+          <a:lin ang="5400000" scaled="1"/>
+          <a:tileRect/>
+        </a:gradFill>
         <a:effectLst/>
       </p:bgPr>
     </p:bg>
@@ -4241,10 +4013,10 @@
       </p:grpSpPr>
       <p:sp>
         <p:nvSpPr>
-          <p:cNvPr id="2" name="TextBox 1">
-            <a:extLst>
-              <a:ext uri="{FF2B5EF4-FFF2-40B4-BE49-F238E27FC236}">
-                <a16:creationId xmlns:a16="http://schemas.microsoft.com/office/drawing/2014/main" id="{D8E473CE-A71C-843C-8324-264866ED4786}"/>
+          <p:cNvPr id="3" name="TextBox 2">
+            <a:extLst>
+              <a:ext uri="{FF2B5EF4-FFF2-40B4-BE49-F238E27FC236}">
+                <a16:creationId xmlns:a16="http://schemas.microsoft.com/office/drawing/2014/main" id="{25B48D5F-1246-D446-A0AE-8545C0A7A8DB}"/>
               </a:ext>
             </a:extLst>
           </p:cNvPr>
@@ -4253,7 +4025,558 @@
         </p:nvSpPr>
         <p:spPr>
           <a:xfrm>
-            <a:off x="635000" y="635000"/>
+            <a:off x="432122" y="655896"/>
+            <a:ext cx="10860911" cy="5693866"/>
+          </a:xfrm>
+          <a:prstGeom prst="rect">
+            <a:avLst/>
+          </a:prstGeom>
+          <a:noFill/>
+        </p:spPr>
+        <p:txBody>
+          <a:bodyPr wrap="square">
+            <a:spAutoFit/>
+          </a:bodyPr>
+          <a:lstStyle/>
+          <a:p>
+            <a:pPr>
+              <a:buNone/>
+            </a:pPr>
+            <a:r>
+              <a:rPr lang="en-US" sz="1400" b="1" dirty="0">
+                <a:solidFill>
+                  <a:srgbClr val="1F5F87"/>
+                </a:solidFill>
+              </a:rPr>
+              <a:t>1. Vendor and Broker Portability</a:t>
+            </a:r>
+          </a:p>
+          <a:p>
+            <a:pPr>
+              <a:buNone/>
+            </a:pPr>
+            <a:r>
+              <a:rPr lang="en-US" sz="1400" dirty="0" err="1">
+                <a:solidFill>
+                  <a:srgbClr val="1F5F87"/>
+                </a:solidFill>
+              </a:rPr>
+              <a:t>Dapr</a:t>
+            </a:r>
+            <a:r>
+              <a:rPr lang="en-US" sz="1400" dirty="0">
+                <a:solidFill>
+                  <a:srgbClr val="1F5F87"/>
+                </a:solidFill>
+              </a:rPr>
+              <a:t> abstracts the underlying message broker behind a consistent API. This allows you to swap brokers (e.g., using Redis Streams for local development and Azure Service Bus for production) by simply changing a configuration file, without altering any application code.</a:t>
+            </a:r>
+          </a:p>
+          <a:p>
+            <a:pPr>
+              <a:buNone/>
+            </a:pPr>
+            <a:endParaRPr lang="en-US" sz="1400" dirty="0">
+              <a:solidFill>
+                <a:srgbClr val="1F5F87"/>
+              </a:solidFill>
+            </a:endParaRPr>
+          </a:p>
+          <a:p>
+            <a:pPr>
+              <a:buNone/>
+            </a:pPr>
+            <a:r>
+              <a:rPr lang="en-US" sz="1400" b="1" dirty="0">
+                <a:solidFill>
+                  <a:srgbClr val="1F5F87"/>
+                </a:solidFill>
+              </a:rPr>
+              <a:t>2. Standardized delivery methods and communication</a:t>
+            </a:r>
+          </a:p>
+          <a:p>
+            <a:pPr marL="285750" indent="-285750">
+              <a:buFont typeface="Arial" panose="020B0604020202020204" pitchFamily="34" charset="0"/>
+              <a:buChar char="•"/>
+            </a:pPr>
+            <a:r>
+              <a:rPr lang="en-US" sz="1400" b="1" dirty="0" err="1">
+                <a:solidFill>
+                  <a:srgbClr val="1F5F87"/>
+                </a:solidFill>
+              </a:rPr>
+              <a:t>CloudEvents</a:t>
+            </a:r>
+            <a:r>
+              <a:rPr lang="en-US" sz="1400" dirty="0">
+                <a:solidFill>
+                  <a:srgbClr val="1F5F87"/>
+                </a:solidFill>
+              </a:rPr>
+              <a:t> envelope - </a:t>
+            </a:r>
+            <a:r>
+              <a:rPr lang="en-US" sz="1400" dirty="0" err="1">
+                <a:solidFill>
+                  <a:srgbClr val="1F5F87"/>
+                </a:solidFill>
+              </a:rPr>
+              <a:t>Dapr</a:t>
+            </a:r>
+            <a:r>
+              <a:rPr lang="en-US" sz="1400" dirty="0">
+                <a:solidFill>
+                  <a:srgbClr val="1F5F87"/>
+                </a:solidFill>
+              </a:rPr>
+              <a:t> automatically wraps outgoing messages in a standardized format. This ensures consistent metadata and formatting across all services, which simplifies cross-platform integration and event routing. </a:t>
+            </a:r>
+          </a:p>
+          <a:p>
+            <a:pPr marL="285750" indent="-285750">
+              <a:buFont typeface="Arial" panose="020B0604020202020204" pitchFamily="34" charset="0"/>
+              <a:buChar char="•"/>
+            </a:pPr>
+            <a:r>
+              <a:rPr lang="en-US" sz="1400" b="1" dirty="0">
+                <a:solidFill>
+                  <a:srgbClr val="1F5F87"/>
+                </a:solidFill>
+              </a:rPr>
+              <a:t>Push and Pull </a:t>
+            </a:r>
+            <a:endParaRPr lang="ru-RU" sz="1400" b="1" dirty="0">
+              <a:solidFill>
+                <a:srgbClr val="1F5F87"/>
+              </a:solidFill>
+            </a:endParaRPr>
+          </a:p>
+          <a:p>
+            <a:pPr marL="285750" indent="-285750">
+              <a:buFont typeface="Arial" panose="020B0604020202020204" pitchFamily="34" charset="0"/>
+              <a:buChar char="•"/>
+            </a:pPr>
+            <a:r>
+              <a:rPr lang="en-US" sz="1400" b="1" dirty="0">
+                <a:solidFill>
+                  <a:srgbClr val="1F5F87"/>
+                </a:solidFill>
+              </a:rPr>
+              <a:t>Ordered delivery </a:t>
+            </a:r>
+          </a:p>
+          <a:p>
+            <a:pPr marL="285750" indent="-285750">
+              <a:buFont typeface="Arial" panose="020B0604020202020204" pitchFamily="34" charset="0"/>
+              <a:buChar char="•"/>
+            </a:pPr>
+            <a:endParaRPr lang="en-US" sz="1400" dirty="0">
+              <a:solidFill>
+                <a:srgbClr val="1F5F87"/>
+              </a:solidFill>
+            </a:endParaRPr>
+          </a:p>
+          <a:p>
+            <a:pPr>
+              <a:buNone/>
+            </a:pPr>
+            <a:r>
+              <a:rPr lang="en-US" sz="1400" b="1" dirty="0">
+                <a:solidFill>
+                  <a:srgbClr val="1F5F87"/>
+                </a:solidFill>
+              </a:rPr>
+              <a:t>3. Built-in Resiliency and Reliability </a:t>
+            </a:r>
+          </a:p>
+          <a:p>
+            <a:pPr>
+              <a:buNone/>
+            </a:pPr>
+            <a:r>
+              <a:rPr lang="en-US" sz="1400" dirty="0" err="1">
+                <a:solidFill>
+                  <a:srgbClr val="1F5F87"/>
+                </a:solidFill>
+              </a:rPr>
+              <a:t>Dapr</a:t>
+            </a:r>
+            <a:r>
+              <a:rPr lang="en-US" sz="1400" dirty="0">
+                <a:solidFill>
+                  <a:srgbClr val="1F5F87"/>
+                </a:solidFill>
+              </a:rPr>
+              <a:t> provides features that you would otherwise have to implement manually using a direct SDK: </a:t>
+            </a:r>
+          </a:p>
+          <a:p>
+            <a:pPr marL="171450" indent="-171450">
+              <a:buFont typeface="Arial" panose="020B0604020202020204" pitchFamily="34" charset="0"/>
+              <a:buChar char="•"/>
+            </a:pPr>
+            <a:r>
+              <a:rPr lang="en-US" sz="1400" b="1" dirty="0">
+                <a:solidFill>
+                  <a:srgbClr val="1F5F87"/>
+                </a:solidFill>
+              </a:rPr>
+              <a:t>At-least-once delivery</a:t>
+            </a:r>
+            <a:r>
+              <a:rPr lang="en-US" sz="1400" dirty="0">
+                <a:solidFill>
+                  <a:srgbClr val="1F5F87"/>
+                </a:solidFill>
+              </a:rPr>
+              <a:t>: </a:t>
+            </a:r>
+            <a:r>
+              <a:rPr lang="en-US" sz="1400" dirty="0" err="1">
+                <a:solidFill>
+                  <a:srgbClr val="1F5F87"/>
+                </a:solidFill>
+              </a:rPr>
+              <a:t>Dapr</a:t>
+            </a:r>
+            <a:r>
+              <a:rPr lang="en-US" sz="1400" dirty="0">
+                <a:solidFill>
+                  <a:srgbClr val="1F5F87"/>
+                </a:solidFill>
+              </a:rPr>
+              <a:t> guarantees messages reach subscribers even if the application or broker temporarily fails.</a:t>
+            </a:r>
+          </a:p>
+          <a:p>
+            <a:pPr marL="171450" indent="-171450">
+              <a:buFont typeface="Arial" panose="020B0604020202020204" pitchFamily="34" charset="0"/>
+              <a:buChar char="•"/>
+            </a:pPr>
+            <a:r>
+              <a:rPr lang="en-US" sz="1400" b="1" dirty="0">
+                <a:solidFill>
+                  <a:srgbClr val="1F5F87"/>
+                </a:solidFill>
+              </a:rPr>
+              <a:t>Automatic Retries</a:t>
+            </a:r>
+            <a:r>
+              <a:rPr lang="en-US" sz="1400" dirty="0">
+                <a:solidFill>
+                  <a:srgbClr val="1F5F87"/>
+                </a:solidFill>
+              </a:rPr>
+              <a:t>: </a:t>
+            </a:r>
+            <a:r>
+              <a:rPr lang="en-US" sz="1400" dirty="0" err="1">
+                <a:solidFill>
+                  <a:srgbClr val="1F5F87"/>
+                </a:solidFill>
+              </a:rPr>
+              <a:t>Dapr</a:t>
+            </a:r>
+            <a:r>
+              <a:rPr lang="en-US" sz="1400" dirty="0">
+                <a:solidFill>
+                  <a:srgbClr val="1F5F87"/>
+                </a:solidFill>
+              </a:rPr>
+              <a:t> handles retries for failed message deliveries based on configurable policies.</a:t>
+            </a:r>
+          </a:p>
+          <a:p>
+            <a:pPr marL="171450" indent="-171450">
+              <a:buFont typeface="Arial" panose="020B0604020202020204" pitchFamily="34" charset="0"/>
+              <a:buChar char="•"/>
+            </a:pPr>
+            <a:r>
+              <a:rPr lang="en-US" sz="1400" b="1" dirty="0">
+                <a:solidFill>
+                  <a:srgbClr val="1F5F87"/>
+                </a:solidFill>
+              </a:rPr>
+              <a:t>Competing Consumers</a:t>
+            </a:r>
+            <a:r>
+              <a:rPr lang="en-US" sz="1400" dirty="0">
+                <a:solidFill>
+                  <a:srgbClr val="1F5F87"/>
+                </a:solidFill>
+              </a:rPr>
+              <a:t>: </a:t>
+            </a:r>
+            <a:r>
+              <a:rPr lang="en-US" sz="1400" dirty="0" err="1">
+                <a:solidFill>
+                  <a:srgbClr val="1F5F87"/>
+                </a:solidFill>
+              </a:rPr>
+              <a:t>Dapr</a:t>
+            </a:r>
+            <a:r>
+              <a:rPr lang="en-US" sz="1400" dirty="0">
+                <a:solidFill>
+                  <a:srgbClr val="1F5F87"/>
+                </a:solidFill>
+              </a:rPr>
+              <a:t> manages consumer groups and ensures that only one instance of a scaled-out service processes a specific message. </a:t>
+            </a:r>
+          </a:p>
+          <a:p>
+            <a:pPr>
+              <a:buFont typeface="Arial" panose="020B0604020202020204" pitchFamily="34" charset="0"/>
+              <a:buChar char="•"/>
+            </a:pPr>
+            <a:endParaRPr lang="en-US" sz="1400" dirty="0">
+              <a:solidFill>
+                <a:srgbClr val="1F5F87"/>
+              </a:solidFill>
+            </a:endParaRPr>
+          </a:p>
+          <a:p>
+            <a:pPr>
+              <a:buNone/>
+            </a:pPr>
+            <a:r>
+              <a:rPr lang="en-US" sz="1400" b="1" dirty="0">
+                <a:solidFill>
+                  <a:srgbClr val="1F5F87"/>
+                </a:solidFill>
+              </a:rPr>
+              <a:t>4. Reduced Code Complexity </a:t>
+            </a:r>
+          </a:p>
+          <a:p>
+            <a:pPr marL="171450" indent="-171450">
+              <a:buFont typeface="Arial" panose="020B0604020202020204" pitchFamily="34" charset="0"/>
+              <a:buChar char="•"/>
+            </a:pPr>
+            <a:r>
+              <a:rPr lang="en-US" sz="1400" b="1" dirty="0">
+                <a:solidFill>
+                  <a:srgbClr val="1F5F87"/>
+                </a:solidFill>
+              </a:rPr>
+              <a:t>Smaller SDK footprint</a:t>
+            </a:r>
+            <a:r>
+              <a:rPr lang="en-US" sz="1400" dirty="0">
+                <a:solidFill>
+                  <a:srgbClr val="1F5F87"/>
+                </a:solidFill>
+              </a:rPr>
+              <a:t>: By using </a:t>
+            </a:r>
+            <a:r>
+              <a:rPr lang="en-US" sz="1400" dirty="0" err="1">
+                <a:solidFill>
+                  <a:srgbClr val="1F5F87"/>
+                </a:solidFill>
+              </a:rPr>
+              <a:t>Dapr’s</a:t>
+            </a:r>
+            <a:r>
+              <a:rPr lang="en-US" sz="1400" dirty="0">
+                <a:solidFill>
+                  <a:srgbClr val="1F5F87"/>
+                </a:solidFill>
+              </a:rPr>
+              <a:t> HTTP or </a:t>
+            </a:r>
+            <a:r>
+              <a:rPr lang="en-US" sz="1400" dirty="0" err="1">
+                <a:solidFill>
+                  <a:srgbClr val="1F5F87"/>
+                </a:solidFill>
+              </a:rPr>
+              <a:t>gRPC</a:t>
+            </a:r>
+            <a:r>
+              <a:rPr lang="en-US" sz="1400" dirty="0">
+                <a:solidFill>
+                  <a:srgbClr val="1F5F87"/>
+                </a:solidFill>
+              </a:rPr>
+              <a:t> APIs, you avoid importing heavy, broker-specific SDKs into your code.</a:t>
+            </a:r>
+          </a:p>
+          <a:p>
+            <a:pPr marL="171450" indent="-171450">
+              <a:buFont typeface="Arial" panose="020B0604020202020204" pitchFamily="34" charset="0"/>
+              <a:buChar char="•"/>
+            </a:pPr>
+            <a:r>
+              <a:rPr lang="en-US" sz="1400" b="1" dirty="0">
+                <a:solidFill>
+                  <a:srgbClr val="1F5F87"/>
+                </a:solidFill>
+              </a:rPr>
+              <a:t>Simplified Subscriptions</a:t>
+            </a:r>
+            <a:r>
+              <a:rPr lang="en-US" sz="1400" dirty="0">
+                <a:solidFill>
+                  <a:srgbClr val="1F5F87"/>
+                </a:solidFill>
+              </a:rPr>
+              <a:t>: You can define subscriptions declaratively in YAML files rather than writing code to manage connection strings and listener loops.</a:t>
+            </a:r>
+          </a:p>
+          <a:p>
+            <a:pPr marL="171450" indent="-171450">
+              <a:buFont typeface="Arial" panose="020B0604020202020204" pitchFamily="34" charset="0"/>
+              <a:buChar char="•"/>
+            </a:pPr>
+            <a:r>
+              <a:rPr lang="en-US" sz="1400" b="1" dirty="0">
+                <a:solidFill>
+                  <a:srgbClr val="1F5F87"/>
+                </a:solidFill>
+              </a:rPr>
+              <a:t>Content-Based Routing</a:t>
+            </a:r>
+            <a:r>
+              <a:rPr lang="en-US" sz="1400" dirty="0">
+                <a:solidFill>
+                  <a:srgbClr val="1F5F87"/>
+                </a:solidFill>
+              </a:rPr>
+              <a:t>: </a:t>
+            </a:r>
+            <a:r>
+              <a:rPr lang="en-US" sz="1400" dirty="0" err="1">
+                <a:solidFill>
+                  <a:srgbClr val="1F5F87"/>
+                </a:solidFill>
+              </a:rPr>
+              <a:t>Dapr</a:t>
+            </a:r>
+            <a:r>
+              <a:rPr lang="en-US" sz="1400" dirty="0">
+                <a:solidFill>
+                  <a:srgbClr val="1F5F87"/>
+                </a:solidFill>
+              </a:rPr>
+              <a:t> allows you to route messages to different service endpoints based on the event's content without writing complex branching logic in your application. </a:t>
+            </a:r>
+          </a:p>
+          <a:p>
+            <a:pPr marL="171450" indent="-171450">
+              <a:buFont typeface="Arial" panose="020B0604020202020204" pitchFamily="34" charset="0"/>
+              <a:buChar char="•"/>
+            </a:pPr>
+            <a:endParaRPr lang="en-US" sz="1400" dirty="0">
+              <a:solidFill>
+                <a:srgbClr val="1F5F87"/>
+              </a:solidFill>
+            </a:endParaRPr>
+          </a:p>
+          <a:p>
+            <a:r>
+              <a:rPr lang="en-US" sz="1400" b="1" dirty="0">
+                <a:solidFill>
+                  <a:srgbClr val="1F5F87"/>
+                </a:solidFill>
+              </a:rPr>
+              <a:t>5. Enhanced Observability and Security </a:t>
+            </a:r>
+          </a:p>
+          <a:p>
+            <a:pPr marL="171450" indent="-171450">
+              <a:buFont typeface="Arial" panose="020B0604020202020204" pitchFamily="34" charset="0"/>
+              <a:buChar char="•"/>
+            </a:pPr>
+            <a:r>
+              <a:rPr lang="en-US" sz="1400" b="1" dirty="0">
+                <a:solidFill>
+                  <a:srgbClr val="1F5F87"/>
+                </a:solidFill>
+              </a:rPr>
+              <a:t>Tracing</a:t>
+            </a:r>
+            <a:r>
+              <a:rPr lang="en-US" sz="1400" dirty="0">
+                <a:solidFill>
+                  <a:srgbClr val="1F5F87"/>
+                </a:solidFill>
+              </a:rPr>
+              <a:t>: </a:t>
+            </a:r>
+            <a:r>
+              <a:rPr lang="en-US" sz="1400" dirty="0" err="1">
+                <a:solidFill>
+                  <a:srgbClr val="1F5F87"/>
+                </a:solidFill>
+              </a:rPr>
+              <a:t>Dapr</a:t>
+            </a:r>
+            <a:r>
+              <a:rPr lang="en-US" sz="1400" dirty="0">
+                <a:solidFill>
+                  <a:srgbClr val="1F5F87"/>
+                </a:solidFill>
+              </a:rPr>
+              <a:t> automatically injects trace headers, enabling end-to-end distributed tracing of messages through your entire system.</a:t>
+            </a:r>
+          </a:p>
+          <a:p>
+            <a:pPr marL="171450" indent="-171450">
+              <a:buFont typeface="Arial" panose="020B0604020202020204" pitchFamily="34" charset="0"/>
+              <a:buChar char="•"/>
+            </a:pPr>
+            <a:r>
+              <a:rPr lang="en-US" sz="1400" b="1" dirty="0">
+                <a:solidFill>
+                  <a:srgbClr val="1F5F87"/>
+                </a:solidFill>
+              </a:rPr>
+              <a:t>Scoped Access</a:t>
+            </a:r>
+            <a:r>
+              <a:rPr lang="en-US" sz="1400" dirty="0">
+                <a:solidFill>
+                  <a:srgbClr val="1F5F87"/>
+                </a:solidFill>
+              </a:rPr>
+              <a:t>: You can use </a:t>
+            </a:r>
+            <a:r>
+              <a:rPr lang="en-US" sz="1400" dirty="0" err="1">
+                <a:solidFill>
+                  <a:srgbClr val="1F5F87"/>
+                </a:solidFill>
+              </a:rPr>
+              <a:t>Dapr</a:t>
+            </a:r>
+            <a:r>
+              <a:rPr lang="en-US" sz="1400" dirty="0">
+                <a:solidFill>
+                  <a:srgbClr val="1F5F87"/>
+                </a:solidFill>
+              </a:rPr>
+              <a:t> components to strictly control which applications are permitted to publish or subscribe to specific topics. </a:t>
+            </a:r>
+          </a:p>
+        </p:txBody>
+      </p:sp>
+      <p:sp>
+        <p:nvSpPr>
+          <p:cNvPr id="2" name="TextBox 1">
+            <a:extLst>
+              <a:ext uri="{FF2B5EF4-FFF2-40B4-BE49-F238E27FC236}">
+                <a16:creationId xmlns:a16="http://schemas.microsoft.com/office/drawing/2014/main" id="{33374DFB-E430-7CAF-4144-F283F4C24BF0}"/>
+              </a:ext>
+            </a:extLst>
+          </p:cNvPr>
+          <p:cNvSpPr txBox="1"/>
+          <p:nvPr/>
+        </p:nvSpPr>
+        <p:spPr>
+          <a:xfrm>
+            <a:off x="729848" y="65505"/>
             <a:ext cx="10922000" cy="615553"/>
           </a:xfrm>
           <a:prstGeom prst="rect">
@@ -4268,14 +4591,1031 @@
           <a:lstStyle/>
           <a:p>
             <a:r>
-              <a:rPr lang="en-US" sz="3400" b="1">
+              <a:rPr lang="en-US" sz="2400" b="1" dirty="0" err="1">
                 <a:solidFill>
                   <a:srgbClr val="146DFF"/>
                 </a:solidFill>
               </a:rPr>
-              <a:t>Dapr Pub/Sub vs Manual Azure Service Bus SDK</a:t>
-            </a:r>
-            <a:endParaRPr lang="ru-RU" sz="3400" b="1">
+              <a:t>Dapr</a:t>
+            </a:r>
+            <a:r>
+              <a:rPr lang="en-US" sz="3400" b="1" dirty="0">
+                <a:solidFill>
+                  <a:srgbClr val="146DFF"/>
+                </a:solidFill>
+              </a:rPr>
+              <a:t> </a:t>
+            </a:r>
+            <a:r>
+              <a:rPr lang="en-US" sz="2400" b="1" dirty="0">
+                <a:solidFill>
+                  <a:srgbClr val="146DFF"/>
+                </a:solidFill>
+              </a:rPr>
+              <a:t>Pub/Sub capabilities</a:t>
+            </a:r>
+            <a:endParaRPr lang="ru-RU" sz="2400" b="1" dirty="0">
+              <a:solidFill>
+                <a:srgbClr val="146DFF"/>
+              </a:solidFill>
+            </a:endParaRPr>
+          </a:p>
+        </p:txBody>
+      </p:sp>
+    </p:spTree>
+    <p:extLst>
+      <p:ext uri="{BB962C8B-B14F-4D97-AF65-F5344CB8AC3E}">
+        <p14:creationId xmlns:p14="http://schemas.microsoft.com/office/powerpoint/2010/main" val="1678035857"/>
+      </p:ext>
+    </p:extLst>
+  </p:cSld>
+  <p:clrMapOvr>
+    <a:overrideClrMapping bg1="dk1" tx1="lt1" bg2="dk2" tx2="lt2" accent1="accent1" accent2="accent2" accent3="accent3" accent4="accent4" accent5="accent5" accent6="accent6" hlink="hlink" folHlink="folHlink"/>
+  </p:clrMapOvr>
+</p:sld>
+</file>
+
+<file path=ppt/slides/slide3.xml><?xml version="1.0" encoding="utf-8"?>
+<p:sld xmlns:a="http://schemas.openxmlformats.org/drawingml/2006/main" xmlns:r="http://schemas.openxmlformats.org/officeDocument/2006/relationships" xmlns:p="http://schemas.openxmlformats.org/presentationml/2006/main">
+  <p:cSld>
+    <p:bg>
+      <p:bgPr>
+        <a:gradFill flip="none" rotWithShape="1">
+          <a:gsLst>
+            <a:gs pos="0">
+              <a:schemeClr val="accent3">
+                <a:lumMod val="5000"/>
+                <a:lumOff val="95000"/>
+              </a:schemeClr>
+            </a:gs>
+            <a:gs pos="56000">
+              <a:schemeClr val="accent3">
+                <a:lumMod val="45000"/>
+                <a:lumOff val="55000"/>
+              </a:schemeClr>
+            </a:gs>
+            <a:gs pos="83000">
+              <a:schemeClr val="accent3">
+                <a:lumMod val="45000"/>
+                <a:lumOff val="55000"/>
+              </a:schemeClr>
+            </a:gs>
+            <a:gs pos="100000">
+              <a:schemeClr val="accent3">
+                <a:lumMod val="30000"/>
+                <a:lumOff val="70000"/>
+              </a:schemeClr>
+            </a:gs>
+          </a:gsLst>
+          <a:lin ang="5400000" scaled="1"/>
+          <a:tileRect/>
+        </a:gradFill>
+        <a:effectLst/>
+      </p:bgPr>
+    </p:bg>
+    <p:spTree>
+      <p:nvGrpSpPr>
+        <p:cNvPr id="1" name=""/>
+        <p:cNvGrpSpPr/>
+        <p:nvPr/>
+      </p:nvGrpSpPr>
+      <p:grpSpPr>
+        <a:xfrm>
+          <a:off x="0" y="0"/>
+          <a:ext cx="0" cy="0"/>
+          <a:chOff x="0" y="0"/>
+          <a:chExt cx="0" cy="0"/>
+        </a:xfrm>
+      </p:grpSpPr>
+      <p:sp>
+        <p:nvSpPr>
+          <p:cNvPr id="8" name="Shape 6">
+            <a:extLst>
+              <a:ext uri="{FF2B5EF4-FFF2-40B4-BE49-F238E27FC236}">
+                <a16:creationId xmlns:a16="http://schemas.microsoft.com/office/drawing/2014/main" id="{14407B64-3C57-BEB2-FB99-8EA04F733672}"/>
+              </a:ext>
+            </a:extLst>
+          </p:cNvPr>
+          <p:cNvSpPr/>
+          <p:nvPr/>
+        </p:nvSpPr>
+        <p:spPr>
+          <a:xfrm>
+            <a:off x="4548051" y="595971"/>
+            <a:ext cx="7265126" cy="1393938"/>
+          </a:xfrm>
+          <a:prstGeom prst="roundRect">
+            <a:avLst/>
+          </a:prstGeom>
+          <a:gradFill flip="none" rotWithShape="1">
+            <a:gsLst>
+              <a:gs pos="0">
+                <a:schemeClr val="accent3">
+                  <a:lumMod val="5000"/>
+                  <a:lumOff val="95000"/>
+                </a:schemeClr>
+              </a:gs>
+              <a:gs pos="74000">
+                <a:schemeClr val="accent3">
+                  <a:lumMod val="45000"/>
+                  <a:lumOff val="55000"/>
+                </a:schemeClr>
+              </a:gs>
+              <a:gs pos="83000">
+                <a:schemeClr val="accent3">
+                  <a:lumMod val="45000"/>
+                  <a:lumOff val="55000"/>
+                </a:schemeClr>
+              </a:gs>
+              <a:gs pos="100000">
+                <a:schemeClr val="accent3">
+                  <a:lumMod val="30000"/>
+                  <a:lumOff val="70000"/>
+                </a:schemeClr>
+              </a:gs>
+            </a:gsLst>
+            <a:lin ang="5400000" scaled="1"/>
+            <a:tileRect/>
+          </a:gradFill>
+          <a:ln w="12700">
+            <a:solidFill>
+              <a:schemeClr val="bg2">
+                <a:lumMod val="50000"/>
+              </a:schemeClr>
+            </a:solidFill>
+            <a:prstDash val="solid"/>
+          </a:ln>
+          <a:effectLst>
+            <a:outerShdw blurRad="38100" dist="19050" dir="2700000" algn="bl" rotWithShape="0">
+              <a:srgbClr val="000000">
+                <a:alpha val="10000"/>
+              </a:srgbClr>
+            </a:outerShdw>
+          </a:effectLst>
+        </p:spPr>
+        <p:txBody>
+          <a:bodyPr/>
+          <a:lstStyle/>
+          <a:p>
+            <a:endParaRPr lang="en-US" dirty="0"/>
+          </a:p>
+        </p:txBody>
+      </p:sp>
+      <p:sp>
+        <p:nvSpPr>
+          <p:cNvPr id="7" name="Shape 6">
+            <a:extLst>
+              <a:ext uri="{FF2B5EF4-FFF2-40B4-BE49-F238E27FC236}">
+                <a16:creationId xmlns:a16="http://schemas.microsoft.com/office/drawing/2014/main" id="{C88BA992-D7E1-5960-D32E-F8F9862B46C1}"/>
+              </a:ext>
+            </a:extLst>
+          </p:cNvPr>
+          <p:cNvSpPr/>
+          <p:nvPr/>
+        </p:nvSpPr>
+        <p:spPr>
+          <a:xfrm>
+            <a:off x="298268" y="595971"/>
+            <a:ext cx="4125686" cy="1393938"/>
+          </a:xfrm>
+          <a:prstGeom prst="roundRect">
+            <a:avLst/>
+          </a:prstGeom>
+          <a:gradFill flip="none" rotWithShape="1">
+            <a:gsLst>
+              <a:gs pos="0">
+                <a:schemeClr val="accent3">
+                  <a:lumMod val="5000"/>
+                  <a:lumOff val="95000"/>
+                </a:schemeClr>
+              </a:gs>
+              <a:gs pos="74000">
+                <a:schemeClr val="accent3">
+                  <a:lumMod val="45000"/>
+                  <a:lumOff val="55000"/>
+                </a:schemeClr>
+              </a:gs>
+              <a:gs pos="83000">
+                <a:schemeClr val="accent3">
+                  <a:lumMod val="45000"/>
+                  <a:lumOff val="55000"/>
+                </a:schemeClr>
+              </a:gs>
+              <a:gs pos="100000">
+                <a:schemeClr val="accent3">
+                  <a:lumMod val="30000"/>
+                  <a:lumOff val="70000"/>
+                </a:schemeClr>
+              </a:gs>
+            </a:gsLst>
+            <a:lin ang="5400000" scaled="1"/>
+            <a:tileRect/>
+          </a:gradFill>
+          <a:ln w="12700">
+            <a:solidFill>
+              <a:schemeClr val="bg2">
+                <a:lumMod val="50000"/>
+              </a:schemeClr>
+            </a:solidFill>
+            <a:prstDash val="solid"/>
+          </a:ln>
+          <a:effectLst>
+            <a:outerShdw blurRad="38100" dist="19050" dir="2700000" algn="bl" rotWithShape="0">
+              <a:srgbClr val="000000">
+                <a:alpha val="10000"/>
+              </a:srgbClr>
+            </a:outerShdw>
+          </a:effectLst>
+        </p:spPr>
+        <p:txBody>
+          <a:bodyPr/>
+          <a:lstStyle/>
+          <a:p>
+            <a:endParaRPr lang="en-US" dirty="0"/>
+          </a:p>
+        </p:txBody>
+      </p:sp>
+      <p:sp>
+        <p:nvSpPr>
+          <p:cNvPr id="2" name="TextBox 1">
+            <a:extLst>
+              <a:ext uri="{FF2B5EF4-FFF2-40B4-BE49-F238E27FC236}">
+                <a16:creationId xmlns:a16="http://schemas.microsoft.com/office/drawing/2014/main" id="{B6E5CEEF-4B4A-0946-0B90-4DC4BD43E816}"/>
+              </a:ext>
+            </a:extLst>
+          </p:cNvPr>
+          <p:cNvSpPr txBox="1"/>
+          <p:nvPr/>
+        </p:nvSpPr>
+        <p:spPr>
+          <a:xfrm>
+            <a:off x="729848" y="65505"/>
+            <a:ext cx="10922000" cy="461665"/>
+          </a:xfrm>
+          <a:prstGeom prst="rect">
+            <a:avLst/>
+          </a:prstGeom>
+          <a:noFill/>
+        </p:spPr>
+        <p:txBody>
+          <a:bodyPr vert="horz" wrap="square" rtlCol="0">
+            <a:spAutoFit/>
+          </a:bodyPr>
+          <a:lstStyle/>
+          <a:p>
+            <a:r>
+              <a:rPr lang="en-US" sz="2400" b="1" dirty="0" err="1">
+                <a:solidFill>
+                  <a:srgbClr val="146DFF"/>
+                </a:solidFill>
+              </a:rPr>
+              <a:t>Dapr</a:t>
+            </a:r>
+            <a:r>
+              <a:rPr lang="en-US" sz="2400" b="1" dirty="0">
+                <a:solidFill>
+                  <a:srgbClr val="146DFF"/>
+                </a:solidFill>
+              </a:rPr>
+              <a:t>-based Stateful Actor for Pub</a:t>
+            </a:r>
+            <a:r>
+              <a:rPr lang="nb-NO" sz="2400" b="1" dirty="0">
+                <a:solidFill>
+                  <a:srgbClr val="146DFF"/>
+                </a:solidFill>
+              </a:rPr>
+              <a:t>/Sub</a:t>
+            </a:r>
+            <a:endParaRPr lang="ru-RU" sz="2400" b="1" dirty="0">
+              <a:solidFill>
+                <a:srgbClr val="146DFF"/>
+              </a:solidFill>
+            </a:endParaRPr>
+          </a:p>
+        </p:txBody>
+      </p:sp>
+      <p:sp>
+        <p:nvSpPr>
+          <p:cNvPr id="4" name="TextBox 3">
+            <a:extLst>
+              <a:ext uri="{FF2B5EF4-FFF2-40B4-BE49-F238E27FC236}">
+                <a16:creationId xmlns:a16="http://schemas.microsoft.com/office/drawing/2014/main" id="{59212024-5F92-711A-49E6-728C5BFBCEB5}"/>
+              </a:ext>
+            </a:extLst>
+          </p:cNvPr>
+          <p:cNvSpPr txBox="1"/>
+          <p:nvPr/>
+        </p:nvSpPr>
+        <p:spPr>
+          <a:xfrm>
+            <a:off x="513805" y="595971"/>
+            <a:ext cx="3966754" cy="1323439"/>
+          </a:xfrm>
+          <a:prstGeom prst="rect">
+            <a:avLst/>
+          </a:prstGeom>
+          <a:noFill/>
+        </p:spPr>
+        <p:txBody>
+          <a:bodyPr wrap="square">
+            <a:spAutoFit/>
+          </a:bodyPr>
+          <a:lstStyle/>
+          <a:p>
+            <a:r>
+              <a:rPr lang="en-US" sz="1600" dirty="0">
+                <a:solidFill>
+                  <a:srgbClr val="1F5F87"/>
+                </a:solidFill>
+              </a:rPr>
+              <a:t>The biggest gains are on the subscriber side: </a:t>
+            </a:r>
+          </a:p>
+          <a:p>
+            <a:pPr marL="285750" indent="-285750">
+              <a:buFont typeface="Arial" panose="020B0604020202020204" pitchFamily="34" charset="0"/>
+              <a:buChar char="•"/>
+            </a:pPr>
+            <a:r>
+              <a:rPr lang="en-US" sz="1600" dirty="0">
+                <a:solidFill>
+                  <a:srgbClr val="1F5F87"/>
+                </a:solidFill>
+              </a:rPr>
+              <a:t>Crash recovery</a:t>
+            </a:r>
+          </a:p>
+          <a:p>
+            <a:pPr marL="285750" indent="-285750">
+              <a:buFont typeface="Arial" panose="020B0604020202020204" pitchFamily="34" charset="0"/>
+              <a:buChar char="•"/>
+            </a:pPr>
+            <a:r>
+              <a:rPr lang="en-US" sz="1600" dirty="0">
+                <a:solidFill>
+                  <a:srgbClr val="1F5F87"/>
+                </a:solidFill>
+              </a:rPr>
+              <a:t>Controlled ordering</a:t>
+            </a:r>
+          </a:p>
+          <a:p>
+            <a:pPr marL="285750" indent="-285750">
+              <a:buFont typeface="Arial" panose="020B0604020202020204" pitchFamily="34" charset="0"/>
+              <a:buChar char="•"/>
+            </a:pPr>
+            <a:r>
+              <a:rPr lang="en-US" sz="1600" dirty="0">
+                <a:solidFill>
+                  <a:srgbClr val="1F5F87"/>
+                </a:solidFill>
+              </a:rPr>
+              <a:t>Duplicate tolerance</a:t>
+            </a:r>
+          </a:p>
+          <a:p>
+            <a:pPr marL="285750" indent="-285750">
+              <a:buFont typeface="Arial" panose="020B0604020202020204" pitchFamily="34" charset="0"/>
+              <a:buChar char="•"/>
+            </a:pPr>
+            <a:r>
+              <a:rPr lang="en-US" sz="1600" dirty="0">
+                <a:solidFill>
+                  <a:srgbClr val="1F5F87"/>
+                </a:solidFill>
+              </a:rPr>
+              <a:t>Checkpointing</a:t>
+            </a:r>
+          </a:p>
+        </p:txBody>
+      </p:sp>
+      <p:sp>
+        <p:nvSpPr>
+          <p:cNvPr id="6" name="TextBox 5">
+            <a:extLst>
+              <a:ext uri="{FF2B5EF4-FFF2-40B4-BE49-F238E27FC236}">
+                <a16:creationId xmlns:a16="http://schemas.microsoft.com/office/drawing/2014/main" id="{8867049F-143B-5F3C-3329-DC4E03741C6D}"/>
+              </a:ext>
+            </a:extLst>
+          </p:cNvPr>
+          <p:cNvSpPr txBox="1"/>
+          <p:nvPr/>
+        </p:nvSpPr>
+        <p:spPr>
+          <a:xfrm>
+            <a:off x="4763588" y="743133"/>
+            <a:ext cx="6096000" cy="830997"/>
+          </a:xfrm>
+          <a:prstGeom prst="rect">
+            <a:avLst/>
+          </a:prstGeom>
+          <a:noFill/>
+        </p:spPr>
+        <p:txBody>
+          <a:bodyPr wrap="square">
+            <a:spAutoFit/>
+          </a:bodyPr>
+          <a:lstStyle/>
+          <a:p>
+            <a:pPr>
+              <a:buNone/>
+            </a:pPr>
+            <a:r>
+              <a:rPr lang="en-US" sz="1600" dirty="0">
+                <a:solidFill>
+                  <a:srgbClr val="1F5F87"/>
+                </a:solidFill>
+              </a:rPr>
+              <a:t>The core idea is this:</a:t>
+            </a:r>
+          </a:p>
+          <a:p>
+            <a:pPr>
+              <a:buNone/>
+            </a:pPr>
+            <a:r>
+              <a:rPr lang="en-US" sz="1600" dirty="0">
+                <a:solidFill>
+                  <a:srgbClr val="1F5F87"/>
+                </a:solidFill>
+              </a:rPr>
+              <a:t>A pub/sub broker gets the event to your service, and a stateful actor becomes the durable, identity-based processor for that event.</a:t>
+            </a:r>
+          </a:p>
+        </p:txBody>
+      </p:sp>
+      <p:sp>
+        <p:nvSpPr>
+          <p:cNvPr id="10" name="TextBox 9">
+            <a:extLst>
+              <a:ext uri="{FF2B5EF4-FFF2-40B4-BE49-F238E27FC236}">
+                <a16:creationId xmlns:a16="http://schemas.microsoft.com/office/drawing/2014/main" id="{A4B67C59-9DAD-F3B8-8F66-451B87F9BC78}"/>
+              </a:ext>
+            </a:extLst>
+          </p:cNvPr>
+          <p:cNvSpPr txBox="1"/>
+          <p:nvPr/>
+        </p:nvSpPr>
+        <p:spPr>
+          <a:xfrm>
+            <a:off x="343989" y="2137071"/>
+            <a:ext cx="10994571" cy="3754874"/>
+          </a:xfrm>
+          <a:prstGeom prst="rect">
+            <a:avLst/>
+          </a:prstGeom>
+          <a:noFill/>
+        </p:spPr>
+        <p:txBody>
+          <a:bodyPr wrap="square">
+            <a:spAutoFit/>
+          </a:bodyPr>
+          <a:lstStyle/>
+          <a:p>
+            <a:pPr>
+              <a:buNone/>
+            </a:pPr>
+            <a:r>
+              <a:rPr lang="en-US" sz="1400" b="1" dirty="0">
+                <a:solidFill>
+                  <a:srgbClr val="1F5F87"/>
+                </a:solidFill>
+              </a:rPr>
+              <a:t>1. Crash resiliency</a:t>
+            </a:r>
+            <a:br>
+              <a:rPr lang="en-US" sz="1400" b="1" dirty="0">
+                <a:solidFill>
+                  <a:srgbClr val="1F5F87"/>
+                </a:solidFill>
+              </a:rPr>
+            </a:br>
+            <a:r>
+              <a:rPr lang="en-US" sz="1400" dirty="0" err="1">
+                <a:solidFill>
+                  <a:srgbClr val="1F5F87"/>
+                </a:solidFill>
+              </a:rPr>
+              <a:t>Dapr</a:t>
+            </a:r>
+            <a:r>
+              <a:rPr lang="en-US" sz="1400" dirty="0">
+                <a:solidFill>
+                  <a:srgbClr val="1F5F87"/>
+                </a:solidFill>
+              </a:rPr>
+              <a:t> pub/sub provides at-least-once delivery, so messages may be redelivered if delivery or processing fails. </a:t>
+            </a:r>
+            <a:r>
+              <a:rPr lang="en-US" sz="1400" dirty="0" err="1">
+                <a:solidFill>
+                  <a:srgbClr val="1F5F87"/>
+                </a:solidFill>
+              </a:rPr>
+              <a:t>Dapr</a:t>
+            </a:r>
+            <a:r>
+              <a:rPr lang="en-US" sz="1400" dirty="0">
+                <a:solidFill>
+                  <a:srgbClr val="1F5F87"/>
+                </a:solidFill>
+              </a:rPr>
+              <a:t> explicitly says it will retry delivery until successful delivery. </a:t>
+            </a:r>
+          </a:p>
+          <a:p>
+            <a:pPr>
+              <a:buNone/>
+            </a:pPr>
+            <a:r>
+              <a:rPr lang="en-US" sz="1400" dirty="0">
+                <a:solidFill>
+                  <a:srgbClr val="1F5F87"/>
+                </a:solidFill>
+              </a:rPr>
+              <a:t>A stateful actor helps because it keeps processing state in a </a:t>
+            </a:r>
+            <a:r>
+              <a:rPr lang="en-US" sz="1400" dirty="0" err="1">
+                <a:solidFill>
+                  <a:srgbClr val="1F5F87"/>
+                </a:solidFill>
+              </a:rPr>
+              <a:t>Dapr</a:t>
+            </a:r>
+            <a:r>
+              <a:rPr lang="en-US" sz="1400" dirty="0">
+                <a:solidFill>
+                  <a:srgbClr val="1F5F87"/>
+                </a:solidFill>
+              </a:rPr>
+              <a:t> state store, and that state outlives the in-memory actor instance. </a:t>
+            </a:r>
+          </a:p>
+          <a:p>
+            <a:pPr>
+              <a:buNone/>
+            </a:pPr>
+            <a:endParaRPr lang="en-US" sz="1400" dirty="0">
+              <a:solidFill>
+                <a:srgbClr val="1F5F87"/>
+              </a:solidFill>
+            </a:endParaRPr>
+          </a:p>
+          <a:p>
+            <a:pPr>
+              <a:buNone/>
+            </a:pPr>
+            <a:r>
+              <a:rPr lang="en-US" sz="1400" b="1" dirty="0">
+                <a:solidFill>
+                  <a:srgbClr val="1F5F87"/>
+                </a:solidFill>
+              </a:rPr>
+              <a:t>2. Safer handling of duplicate delivery</a:t>
+            </a:r>
+            <a:br>
+              <a:rPr lang="en-US" sz="1400" dirty="0">
+                <a:solidFill>
+                  <a:srgbClr val="1F5F87"/>
+                </a:solidFill>
+              </a:rPr>
+            </a:br>
+            <a:r>
+              <a:rPr lang="en-US" sz="1400" dirty="0">
+                <a:solidFill>
+                  <a:srgbClr val="1F5F87"/>
+                </a:solidFill>
+              </a:rPr>
+              <a:t>Because </a:t>
+            </a:r>
+            <a:r>
+              <a:rPr lang="en-US" sz="1400" dirty="0" err="1">
+                <a:solidFill>
+                  <a:srgbClr val="1F5F87"/>
+                </a:solidFill>
+              </a:rPr>
+              <a:t>Dapr</a:t>
+            </a:r>
+            <a:r>
+              <a:rPr lang="en-US" sz="1400" dirty="0">
+                <a:solidFill>
+                  <a:srgbClr val="1F5F87"/>
+                </a:solidFill>
+              </a:rPr>
+              <a:t> pub/sub is at-least-once, duplicates are a normal architectural concern. </a:t>
+            </a:r>
+            <a:br>
+              <a:rPr lang="en-US" sz="1400" dirty="0">
+                <a:solidFill>
+                  <a:srgbClr val="1F5F87"/>
+                </a:solidFill>
+              </a:rPr>
+            </a:br>
+            <a:r>
+              <a:rPr lang="en-US" sz="1400" dirty="0">
+                <a:solidFill>
+                  <a:srgbClr val="1F5F87"/>
+                </a:solidFill>
+              </a:rPr>
+              <a:t>A stateful actor can persist: last processed message ID, last processed sequence number, current workflow step </a:t>
+            </a:r>
+            <a:r>
+              <a:rPr lang="en-US" sz="1400" dirty="0" err="1">
+                <a:solidFill>
+                  <a:srgbClr val="1F5F87"/>
+                </a:solidFill>
+              </a:rPr>
+              <a:t>etc</a:t>
+            </a:r>
+            <a:endParaRPr lang="en-US" sz="1400" dirty="0">
+              <a:solidFill>
+                <a:srgbClr val="1F5F87"/>
+              </a:solidFill>
+            </a:endParaRPr>
+          </a:p>
+          <a:p>
+            <a:pPr>
+              <a:buNone/>
+            </a:pPr>
+            <a:endParaRPr lang="en-US" sz="1400" dirty="0">
+              <a:solidFill>
+                <a:srgbClr val="1F5F87"/>
+              </a:solidFill>
+            </a:endParaRPr>
+          </a:p>
+          <a:p>
+            <a:pPr>
+              <a:buNone/>
+            </a:pPr>
+            <a:r>
+              <a:rPr lang="en-US" sz="1400" b="1" dirty="0">
+                <a:solidFill>
+                  <a:srgbClr val="1F5F87"/>
+                </a:solidFill>
+              </a:rPr>
+              <a:t>3. Better ordering per business key</a:t>
+            </a:r>
+            <a:br>
+              <a:rPr lang="en-US" sz="1400" dirty="0">
+                <a:solidFill>
+                  <a:srgbClr val="1F5F87"/>
+                </a:solidFill>
+              </a:rPr>
+            </a:br>
+            <a:r>
+              <a:rPr lang="en-US" sz="1400" dirty="0" err="1">
+                <a:solidFill>
+                  <a:srgbClr val="1F5F87"/>
+                </a:solidFill>
+              </a:rPr>
+              <a:t>Dapr</a:t>
+            </a:r>
+            <a:r>
+              <a:rPr lang="en-US" sz="1400" dirty="0">
+                <a:solidFill>
+                  <a:srgbClr val="1F5F87"/>
+                </a:solidFill>
+              </a:rPr>
+              <a:t> actor runtime uses turn-based concurrency, meaning a single actor processes one request at a time. </a:t>
+            </a:r>
+          </a:p>
+          <a:p>
+            <a:pPr>
+              <a:buNone/>
+            </a:pPr>
+            <a:r>
+              <a:rPr lang="en-US" sz="1400" dirty="0" err="1">
+                <a:solidFill>
+                  <a:srgbClr val="1F5F87"/>
+                </a:solidFill>
+              </a:rPr>
+              <a:t>Dapr</a:t>
+            </a:r>
+            <a:r>
+              <a:rPr lang="en-US" sz="1400" dirty="0">
+                <a:solidFill>
+                  <a:srgbClr val="1F5F87"/>
+                </a:solidFill>
+              </a:rPr>
+              <a:t> says no more than one thread can be active inside an actor object at any time. </a:t>
+            </a:r>
+          </a:p>
+          <a:p>
+            <a:pPr>
+              <a:buNone/>
+            </a:pPr>
+            <a:r>
+              <a:rPr lang="en-US" sz="1400" dirty="0">
+                <a:solidFill>
+                  <a:srgbClr val="1F5F87"/>
+                </a:solidFill>
+              </a:rPr>
+              <a:t>That is useful for pub/sub when events for the same entity must be processed in order. If all events for Order-123 are routed to actor OrderActor-123, that actor naturally serializes processing for that entity.</a:t>
+            </a:r>
+          </a:p>
+          <a:p>
+            <a:pPr>
+              <a:buNone/>
+            </a:pPr>
+            <a:endParaRPr lang="en-US" sz="1400" dirty="0">
+              <a:solidFill>
+                <a:srgbClr val="1F5F87"/>
+              </a:solidFill>
+            </a:endParaRPr>
+          </a:p>
+          <a:p>
+            <a:pPr>
+              <a:buNone/>
+            </a:pPr>
+            <a:r>
+              <a:rPr lang="en-US" sz="1400" b="1" dirty="0">
+                <a:solidFill>
+                  <a:srgbClr val="1F5F87"/>
+                </a:solidFill>
+              </a:rPr>
+              <a:t>4. Durable checkpointing and progress tracking</a:t>
+            </a:r>
+          </a:p>
+          <a:p>
+            <a:pPr>
+              <a:buNone/>
+            </a:pPr>
+            <a:r>
+              <a:rPr lang="en-US" sz="1400" dirty="0">
+                <a:solidFill>
+                  <a:srgbClr val="1F5F87"/>
+                </a:solidFill>
+              </a:rPr>
+              <a:t>Actors may involve ongoing state, such as: current status, retry count, last successful step </a:t>
+            </a:r>
+            <a:r>
+              <a:rPr lang="en-US" sz="1400" dirty="0" err="1">
+                <a:solidFill>
+                  <a:srgbClr val="1F5F87"/>
+                </a:solidFill>
+              </a:rPr>
+              <a:t>etc</a:t>
+            </a:r>
+            <a:endParaRPr lang="en-US" sz="1400" dirty="0">
+              <a:solidFill>
+                <a:srgbClr val="1F5F87"/>
+              </a:solidFill>
+            </a:endParaRPr>
+          </a:p>
+        </p:txBody>
+      </p:sp>
+    </p:spTree>
+    <p:extLst>
+      <p:ext uri="{BB962C8B-B14F-4D97-AF65-F5344CB8AC3E}">
+        <p14:creationId xmlns:p14="http://schemas.microsoft.com/office/powerpoint/2010/main" val="3580469987"/>
+      </p:ext>
+    </p:extLst>
+  </p:cSld>
+  <p:clrMapOvr>
+    <a:overrideClrMapping bg1="dk1" tx1="lt1" bg2="dk2" tx2="lt2" accent1="accent1" accent2="accent2" accent3="accent3" accent4="accent4" accent5="accent5" accent6="accent6" hlink="hlink" folHlink="folHlink"/>
+  </p:clrMapOvr>
+  <p:timing>
+    <p:tnLst>
+      <p:par>
+        <p:cTn id="1" dur="indefinite" restart="never" nodeType="tmRoot">
+          <p:childTnLst>
+            <p:seq concurrent="1" nextAc="seek">
+              <p:cTn id="2" dur="indefinite" nodeType="mainSeq">
+                <p:childTnLst>
+                  <p:par>
+                    <p:cTn id="3" fill="hold">
+                      <p:stCondLst>
+                        <p:cond delay="indefinite"/>
+                      </p:stCondLst>
+                      <p:childTnLst>
+                        <p:par>
+                          <p:cTn id="4" fill="hold">
+                            <p:stCondLst>
+                              <p:cond delay="0"/>
+                            </p:stCondLst>
+                            <p:childTnLst>
+                              <p:par>
+                                <p:cTn id="5" presetID="10" presetClass="entr" presetSubtype="0" fill="hold" grpId="0" nodeType="clickEffect">
+                                  <p:stCondLst>
+                                    <p:cond delay="0"/>
+                                  </p:stCondLst>
+                                  <p:childTnLst>
+                                    <p:set>
+                                      <p:cBhvr>
+                                        <p:cTn id="6" dur="1" fill="hold">
+                                          <p:stCondLst>
+                                            <p:cond delay="0"/>
+                                          </p:stCondLst>
+                                        </p:cTn>
+                                        <p:tgtEl>
+                                          <p:spTgt spid="7"/>
+                                        </p:tgtEl>
+                                        <p:attrNameLst>
+                                          <p:attrName>style.visibility</p:attrName>
+                                        </p:attrNameLst>
+                                      </p:cBhvr>
+                                      <p:to>
+                                        <p:strVal val="visible"/>
+                                      </p:to>
+                                    </p:set>
+                                    <p:animEffect transition="in" filter="fade">
+                                      <p:cBhvr>
+                                        <p:cTn id="7" dur="500"/>
+                                        <p:tgtEl>
+                                          <p:spTgt spid="7"/>
+                                        </p:tgtEl>
+                                      </p:cBhvr>
+                                    </p:animEffect>
+                                  </p:childTnLst>
+                                </p:cTn>
+                              </p:par>
+                            </p:childTnLst>
+                          </p:cTn>
+                        </p:par>
+                      </p:childTnLst>
+                    </p:cTn>
+                  </p:par>
+                  <p:par>
+                    <p:cTn id="8" fill="hold">
+                      <p:stCondLst>
+                        <p:cond delay="indefinite"/>
+                      </p:stCondLst>
+                      <p:childTnLst>
+                        <p:par>
+                          <p:cTn id="9" fill="hold">
+                            <p:stCondLst>
+                              <p:cond delay="0"/>
+                            </p:stCondLst>
+                            <p:childTnLst>
+                              <p:par>
+                                <p:cTn id="10" presetID="10" presetClass="entr" presetSubtype="0" fill="hold" grpId="0" nodeType="clickEffect">
+                                  <p:stCondLst>
+                                    <p:cond delay="0"/>
+                                  </p:stCondLst>
+                                  <p:childTnLst>
+                                    <p:set>
+                                      <p:cBhvr>
+                                        <p:cTn id="11" dur="1" fill="hold">
+                                          <p:stCondLst>
+                                            <p:cond delay="0"/>
+                                          </p:stCondLst>
+                                        </p:cTn>
+                                        <p:tgtEl>
+                                          <p:spTgt spid="8"/>
+                                        </p:tgtEl>
+                                        <p:attrNameLst>
+                                          <p:attrName>style.visibility</p:attrName>
+                                        </p:attrNameLst>
+                                      </p:cBhvr>
+                                      <p:to>
+                                        <p:strVal val="visible"/>
+                                      </p:to>
+                                    </p:set>
+                                    <p:animEffect transition="in" filter="fade">
+                                      <p:cBhvr>
+                                        <p:cTn id="12" dur="500"/>
+                                        <p:tgtEl>
+                                          <p:spTgt spid="8"/>
+                                        </p:tgtEl>
+                                      </p:cBhvr>
+                                    </p:animEffect>
+                                  </p:childTnLst>
+                                </p:cTn>
+                              </p:par>
+                            </p:childTnLst>
+                          </p:cTn>
+                        </p:par>
+                      </p:childTnLst>
+                    </p:cTn>
+                  </p:par>
+                </p:childTnLst>
+              </p:cTn>
+              <p:prevCondLst>
+                <p:cond evt="onPrev" delay="0">
+                  <p:tgtEl>
+                    <p:sldTgt/>
+                  </p:tgtEl>
+                </p:cond>
+              </p:prevCondLst>
+              <p:nextCondLst>
+                <p:cond evt="onNext" delay="0">
+                  <p:tgtEl>
+                    <p:sldTgt/>
+                  </p:tgtEl>
+                </p:cond>
+              </p:nextCondLst>
+            </p:seq>
+          </p:childTnLst>
+        </p:cTn>
+      </p:par>
+    </p:tnLst>
+    <p:bldLst>
+      <p:bldP spid="8" grpId="0" animBg="1"/>
+      <p:bldP spid="7" grpId="0" animBg="1"/>
+    </p:bldLst>
+  </p:timing>
+</p:sld>
+</file>
+
+<file path=ppt/slides/slide4.xml><?xml version="1.0" encoding="utf-8"?>
+<p:sld xmlns:a="http://schemas.openxmlformats.org/drawingml/2006/main" xmlns:r="http://schemas.openxmlformats.org/officeDocument/2006/relationships" xmlns:p="http://schemas.openxmlformats.org/presentationml/2006/main">
+  <p:cSld>
+    <p:bg>
+      <p:bgPr>
+        <a:gradFill flip="none" rotWithShape="1">
+          <a:gsLst>
+            <a:gs pos="0">
+              <a:schemeClr val="accent3">
+                <a:lumMod val="5000"/>
+                <a:lumOff val="95000"/>
+              </a:schemeClr>
+            </a:gs>
+            <a:gs pos="56000">
+              <a:schemeClr val="accent3">
+                <a:lumMod val="45000"/>
+                <a:lumOff val="55000"/>
+              </a:schemeClr>
+            </a:gs>
+            <a:gs pos="83000">
+              <a:schemeClr val="accent3">
+                <a:lumMod val="45000"/>
+                <a:lumOff val="55000"/>
+              </a:schemeClr>
+            </a:gs>
+            <a:gs pos="100000">
+              <a:schemeClr val="accent3">
+                <a:lumMod val="30000"/>
+                <a:lumOff val="70000"/>
+              </a:schemeClr>
+            </a:gs>
+          </a:gsLst>
+          <a:lin ang="5400000" scaled="1"/>
+          <a:tileRect/>
+        </a:gradFill>
+        <a:effectLst/>
+      </p:bgPr>
+    </p:bg>
+    <p:spTree>
+      <p:nvGrpSpPr>
+        <p:cNvPr id="1" name=""/>
+        <p:cNvGrpSpPr/>
+        <p:nvPr/>
+      </p:nvGrpSpPr>
+      <p:grpSpPr>
+        <a:xfrm>
+          <a:off x="0" y="0"/>
+          <a:ext cx="0" cy="0"/>
+          <a:chOff x="0" y="0"/>
+          <a:chExt cx="0" cy="0"/>
+        </a:xfrm>
+      </p:grpSpPr>
+      <p:sp>
+        <p:nvSpPr>
+          <p:cNvPr id="2" name="TextBox 1">
+            <a:extLst>
+              <a:ext uri="{FF2B5EF4-FFF2-40B4-BE49-F238E27FC236}">
+                <a16:creationId xmlns:a16="http://schemas.microsoft.com/office/drawing/2014/main" id="{D8E473CE-A71C-843C-8324-264866ED4786}"/>
+              </a:ext>
+            </a:extLst>
+          </p:cNvPr>
+          <p:cNvSpPr txBox="1"/>
+          <p:nvPr/>
+        </p:nvSpPr>
+        <p:spPr>
+          <a:xfrm>
+            <a:off x="729848" y="65505"/>
+            <a:ext cx="10922000" cy="461665"/>
+          </a:xfrm>
+          <a:prstGeom prst="rect">
+            <a:avLst/>
+          </a:prstGeom>
+          <a:noFill/>
+        </p:spPr>
+        <p:txBody>
+          <a:bodyPr vert="horz" wrap="square" rtlCol="0">
+            <a:spAutoFit/>
+          </a:bodyPr>
+          <a:lstStyle/>
+          <a:p>
+            <a:r>
+              <a:rPr lang="en-US" sz="2400" b="1" dirty="0" err="1">
+                <a:solidFill>
+                  <a:srgbClr val="146DFF"/>
+                </a:solidFill>
+              </a:rPr>
+              <a:t>Dapr</a:t>
+            </a:r>
+            <a:r>
+              <a:rPr lang="en-US" sz="2400" b="1" dirty="0">
+                <a:solidFill>
+                  <a:srgbClr val="146DFF"/>
+                </a:solidFill>
+              </a:rPr>
+              <a:t> Pub/Sub vs Manual Azure Service Bus SDK</a:t>
+            </a:r>
+            <a:endParaRPr lang="ru-RU" sz="2400" b="1" dirty="0">
               <a:solidFill>
                 <a:srgbClr val="146DFF"/>
               </a:solidFill>
@@ -4297,7 +5637,7 @@
         </p:nvCxnSpPr>
         <p:spPr>
           <a:xfrm>
-            <a:off x="635000" y="1803400"/>
+            <a:off x="698500" y="599634"/>
             <a:ext cx="10922000" cy="0"/>
           </a:xfrm>
           <a:prstGeom prst="line">
@@ -4338,7 +5678,7 @@
         </p:nvSpPr>
         <p:spPr>
           <a:xfrm>
-            <a:off x="698500" y="1905000"/>
+            <a:off x="698500" y="1426580"/>
             <a:ext cx="5270500" cy="307777"/>
           </a:xfrm>
           <a:prstGeom prst="rect">
@@ -4383,7 +5723,7 @@
         </p:nvSpPr>
         <p:spPr>
           <a:xfrm>
-            <a:off x="6096000" y="1905000"/>
+            <a:off x="6096000" y="1426580"/>
             <a:ext cx="5397500" cy="307777"/>
           </a:xfrm>
           <a:prstGeom prst="rect">
@@ -4399,14 +5739,22 @@
           <a:p>
             <a:pPr algn="ctr"/>
             <a:r>
-              <a:rPr lang="nb-NO" sz="1400" b="1">
+              <a:rPr lang="nb-NO" sz="1400" b="1" dirty="0" err="1">
                 <a:solidFill>
                   <a:srgbClr val="00C878"/>
                 </a:solidFill>
               </a:rPr>
-              <a:t>Dapr Pub/Sub</a:t>
-            </a:r>
-            <a:endParaRPr lang="ru-RU" sz="1400" b="1">
+              <a:t>Dapr</a:t>
+            </a:r>
+            <a:r>
+              <a:rPr lang="nb-NO" sz="1400" b="1" dirty="0">
+                <a:solidFill>
+                  <a:srgbClr val="00C878"/>
+                </a:solidFill>
+              </a:rPr>
+              <a:t> Pub/Sub</a:t>
+            </a:r>
+            <a:endParaRPr lang="ru-RU" sz="1400" b="1" dirty="0">
               <a:solidFill>
                 <a:srgbClr val="00C878"/>
               </a:solidFill>
@@ -4428,8 +5776,8 @@
         </p:nvSpPr>
         <p:spPr>
           <a:xfrm>
-            <a:off x="698500" y="2362200"/>
-            <a:ext cx="10922000" cy="261610"/>
+            <a:off x="634999" y="1801914"/>
+            <a:ext cx="10922000" cy="307777"/>
           </a:xfrm>
           <a:prstGeom prst="rect">
             <a:avLst/>
@@ -4443,16 +5791,16 @@
           <a:lstStyle/>
           <a:p>
             <a:r>
-              <a:rPr lang="nb-NO" sz="1100" b="1">
-                <a:solidFill>
-                  <a:srgbClr val="A0AFC8"/>
-                </a:solidFill>
-              </a:rPr>
-              <a:t>Connection management</a:t>
-            </a:r>
-            <a:endParaRPr lang="ru-RU" sz="1100" b="1">
+              <a:rPr lang="nb-NO" sz="1400" b="1" dirty="0">
+                <a:solidFill>
+                  <a:schemeClr val="bg2"/>
+                </a:solidFill>
+              </a:rPr>
+              <a:t>♦ Connection management</a:t>
+            </a:r>
+            <a:endParaRPr lang="ru-RU" sz="1400" b="1" dirty="0">
               <a:solidFill>
-                <a:srgbClr val="A0AFC8"/>
+                <a:schemeClr val="bg2"/>
               </a:solidFill>
             </a:endParaRPr>
           </a:p>
@@ -4472,8 +5820,8 @@
         </p:nvSpPr>
         <p:spPr>
           <a:xfrm>
-            <a:off x="698500" y="2578100"/>
-            <a:ext cx="5270500" cy="261610"/>
+            <a:off x="413152" y="2099680"/>
+            <a:ext cx="5555848" cy="276999"/>
           </a:xfrm>
           <a:prstGeom prst="rect">
             <a:avLst/>
@@ -4489,14 +5837,14 @@
           <a:lstStyle/>
           <a:p>
             <a:r>
-              <a:rPr lang="en-US" sz="1100">
+              <a:rPr lang="en-US" sz="1200">
                 <a:solidFill>
                   <a:srgbClr val="FFC88C"/>
                 </a:solidFill>
               </a:rPr>
               <a:t>ServiceBusClient + senders / receivers — connection lifecycle in app code</a:t>
             </a:r>
-            <a:endParaRPr lang="ru-RU" sz="1100">
+            <a:endParaRPr lang="ru-RU" sz="1200">
               <a:solidFill>
                 <a:srgbClr val="FFC88C"/>
               </a:solidFill>
@@ -4518,8 +5866,8 @@
         </p:nvSpPr>
         <p:spPr>
           <a:xfrm>
-            <a:off x="6096000" y="2578100"/>
-            <a:ext cx="5397500" cy="261610"/>
+            <a:off x="6096000" y="2099680"/>
+            <a:ext cx="5682848" cy="276999"/>
           </a:xfrm>
           <a:prstGeom prst="rect">
             <a:avLst/>
@@ -4535,7 +5883,7 @@
           <a:lstStyle/>
           <a:p>
             <a:r>
-              <a:rPr lang="en-US" sz="1100" dirty="0">
+              <a:rPr lang="en-US" sz="1200" dirty="0">
                 <a:solidFill>
                   <a:srgbClr val="8CFFBE"/>
                 </a:solidFill>
@@ -4543,7 +5891,7 @@
               <a:t>Zero lines — </a:t>
             </a:r>
             <a:r>
-              <a:rPr lang="en-US" sz="1100" dirty="0" err="1">
+              <a:rPr lang="en-US" sz="1200" dirty="0" err="1">
                 <a:solidFill>
                   <a:srgbClr val="8CFFBE"/>
                 </a:solidFill>
@@ -4551,14 +5899,14 @@
               <a:t>Dapr</a:t>
             </a:r>
             <a:r>
-              <a:rPr lang="en-US" sz="1100" dirty="0">
+              <a:rPr lang="en-US" sz="1200" dirty="0">
                 <a:solidFill>
                   <a:srgbClr val="8CFFBE"/>
                 </a:solidFill>
               </a:rPr>
               <a:t> sidecar owns the connection entirely</a:t>
             </a:r>
-            <a:endParaRPr lang="ru-RU" sz="1100" dirty="0">
+            <a:endParaRPr lang="ru-RU" sz="1200" dirty="0">
               <a:solidFill>
                 <a:srgbClr val="8CFFBE"/>
               </a:solidFill>
@@ -4580,8 +5928,8 @@
         </p:nvSpPr>
         <p:spPr>
           <a:xfrm>
-            <a:off x="698500" y="3035300"/>
-            <a:ext cx="10922000" cy="261610"/>
+            <a:off x="698500" y="2449902"/>
+            <a:ext cx="10922000" cy="307777"/>
           </a:xfrm>
           <a:prstGeom prst="rect">
             <a:avLst/>
@@ -4592,21 +5940,28 @@
           <a:bodyPr vert="horz" wrap="square" rtlCol="0">
             <a:spAutoFit/>
           </a:bodyPr>
-          <a:lstStyle/>
-          <a:p>
-            <a:r>
-              <a:rPr lang="nb-NO" sz="1100" b="1">
-                <a:solidFill>
-                  <a:srgbClr val="A0AFC8"/>
-                </a:solidFill>
-              </a:rPr>
-              <a:t>Broker coupling</a:t>
-            </a:r>
-            <a:endParaRPr lang="ru-RU" sz="1100" b="1">
-              <a:solidFill>
-                <a:srgbClr val="A0AFC8"/>
-              </a:solidFill>
-            </a:endParaRPr>
+          <a:lstStyle>
+            <a:defPPr>
+              <a:defRPr lang="ru-RU"/>
+            </a:defPPr>
+            <a:lvl1pPr>
+              <a:defRPr sz="1400" b="1">
+                <a:solidFill>
+                  <a:schemeClr val="bg2"/>
+                </a:solidFill>
+              </a:defRPr>
+            </a:lvl1pPr>
+          </a:lstStyle>
+          <a:p>
+            <a:r>
+              <a:rPr lang="nb-NO" dirty="0"/>
+              <a:t>♦ Broker </a:t>
+            </a:r>
+            <a:r>
+              <a:rPr lang="nb-NO" dirty="0" err="1"/>
+              <a:t>coupling</a:t>
+            </a:r>
+            <a:endParaRPr lang="ru-RU" dirty="0"/>
           </a:p>
         </p:txBody>
       </p:sp>
@@ -4624,8 +5979,8 @@
         </p:nvSpPr>
         <p:spPr>
           <a:xfrm>
-            <a:off x="698500" y="3251200"/>
-            <a:ext cx="5270500" cy="261610"/>
+            <a:off x="413152" y="2772780"/>
+            <a:ext cx="5555848" cy="276999"/>
           </a:xfrm>
           <a:prstGeom prst="rect">
             <a:avLst/>
@@ -4641,14 +5996,14 @@
           <a:lstStyle/>
           <a:p>
             <a:r>
-              <a:rPr lang="en-US" sz="1100">
+              <a:rPr lang="en-US" sz="1200">
                 <a:solidFill>
                   <a:srgbClr val="FFC88C"/>
                 </a:solidFill>
               </a:rPr>
               <a:t>Azure.Messaging.ServiceBus locks you to ASB; broker change means a rewrite</a:t>
             </a:r>
-            <a:endParaRPr lang="ru-RU" sz="1100">
+            <a:endParaRPr lang="ru-RU" sz="1200">
               <a:solidFill>
                 <a:srgbClr val="FFC88C"/>
               </a:solidFill>
@@ -4670,8 +6025,8 @@
         </p:nvSpPr>
         <p:spPr>
           <a:xfrm>
-            <a:off x="6096000" y="3251200"/>
-            <a:ext cx="5397500" cy="261610"/>
+            <a:off x="6095999" y="2772780"/>
+            <a:ext cx="5715095" cy="276999"/>
           </a:xfrm>
           <a:prstGeom prst="rect">
             <a:avLst/>
@@ -4687,14 +6042,14 @@
           <a:lstStyle/>
           <a:p>
             <a:r>
-              <a:rPr lang="nb-NO" sz="1100" dirty="0">
+              <a:rPr lang="nb-NO" sz="1200" dirty="0">
                 <a:solidFill>
                   <a:srgbClr val="8CFFBE"/>
                 </a:solidFill>
               </a:rPr>
               <a:t>YAML component swap — RabbitMQ, Kafka, Redis Streams; app code unchanged</a:t>
             </a:r>
-            <a:endParaRPr lang="ru-RU" sz="1100" dirty="0">
+            <a:endParaRPr lang="ru-RU" sz="1200" dirty="0">
               <a:solidFill>
                 <a:srgbClr val="8CFFBE"/>
               </a:solidFill>
@@ -4704,10 +6059,10 @@
       </p:sp>
       <p:sp>
         <p:nvSpPr>
-          <p:cNvPr id="12" name="TextBox 11">
-            <a:extLst>
-              <a:ext uri="{FF2B5EF4-FFF2-40B4-BE49-F238E27FC236}">
-                <a16:creationId xmlns:a16="http://schemas.microsoft.com/office/drawing/2014/main" id="{28B5E17B-0D8C-41F7-2E06-51E6A4EA2542}"/>
+          <p:cNvPr id="15" name="TextBox 14">
+            <a:extLst>
+              <a:ext uri="{FF2B5EF4-FFF2-40B4-BE49-F238E27FC236}">
+                <a16:creationId xmlns:a16="http://schemas.microsoft.com/office/drawing/2014/main" id="{C810F752-2EE7-B03A-5188-672569ADB767}"/>
               </a:ext>
             </a:extLst>
           </p:cNvPr>
@@ -4716,8 +6071,8 @@
         </p:nvSpPr>
         <p:spPr>
           <a:xfrm>
-            <a:off x="698500" y="3708400"/>
-            <a:ext cx="10922000" cy="261610"/>
+            <a:off x="698500" y="3173802"/>
+            <a:ext cx="10922000" cy="307777"/>
           </a:xfrm>
           <a:prstGeom prst="rect">
             <a:avLst/>
@@ -4731,16 +6086,24 @@
           <a:lstStyle/>
           <a:p>
             <a:r>
-              <a:rPr lang="nb-NO" sz="1100" b="1">
-                <a:solidFill>
-                  <a:srgbClr val="A0AFC8"/>
-                </a:solidFill>
-              </a:rPr>
-              <a:t>Ordered delivery (sessions)</a:t>
-            </a:r>
-            <a:endParaRPr lang="ru-RU" sz="1100" b="1">
+              <a:rPr lang="nb-NO" sz="1400" b="1" dirty="0">
+                <a:solidFill>
+                  <a:schemeClr val="bg2"/>
+                </a:solidFill>
+              </a:rPr>
+              <a:t>♦ </a:t>
+            </a:r>
+            <a:r>
+              <a:rPr lang="nb-NO" sz="1400" b="1" dirty="0" err="1">
+                <a:solidFill>
+                  <a:schemeClr val="bg2"/>
+                </a:solidFill>
+              </a:rPr>
+              <a:t>Resiliency</a:t>
+            </a:r>
+            <a:endParaRPr lang="ru-RU" sz="1400" b="1" dirty="0">
               <a:solidFill>
-                <a:srgbClr val="A0AFC8"/>
+                <a:schemeClr val="bg2"/>
               </a:solidFill>
             </a:endParaRPr>
           </a:p>
@@ -4748,10 +6111,10 @@
       </p:sp>
       <p:sp>
         <p:nvSpPr>
-          <p:cNvPr id="13" name="TextBox 12">
-            <a:extLst>
-              <a:ext uri="{FF2B5EF4-FFF2-40B4-BE49-F238E27FC236}">
-                <a16:creationId xmlns:a16="http://schemas.microsoft.com/office/drawing/2014/main" id="{5C00F4DF-77CD-4EE0-35DD-42647B3D6CBE}"/>
+          <p:cNvPr id="16" name="TextBox 15">
+            <a:extLst>
+              <a:ext uri="{FF2B5EF4-FFF2-40B4-BE49-F238E27FC236}">
+                <a16:creationId xmlns:a16="http://schemas.microsoft.com/office/drawing/2014/main" id="{374168B0-87F7-B101-A810-51A315D1B94F}"/>
               </a:ext>
             </a:extLst>
           </p:cNvPr>
@@ -4760,8 +6123,8 @@
         </p:nvSpPr>
         <p:spPr>
           <a:xfrm>
-            <a:off x="698500" y="3924300"/>
-            <a:ext cx="5270500" cy="261610"/>
+            <a:off x="413152" y="3481579"/>
+            <a:ext cx="5555848" cy="276999"/>
           </a:xfrm>
           <a:prstGeom prst="rect">
             <a:avLst/>
@@ -4777,14 +6140,14 @@
           <a:lstStyle/>
           <a:p>
             <a:r>
-              <a:rPr lang="nb-NO" sz="1100">
+              <a:rPr lang="en-US" sz="1200">
                 <a:solidFill>
                   <a:srgbClr val="FFC88C"/>
                 </a:solidFill>
               </a:rPr>
-              <a:t>ServiceBusSessionProcessor, AcceptNextSessionAsync, lock renewal — 50+ lines</a:t>
-            </a:r>
-            <a:endParaRPr lang="ru-RU" sz="1100">
+              <a:t>Try/catch loops, manual retry policies, dead-letter wiring in every service</a:t>
+            </a:r>
+            <a:endParaRPr lang="ru-RU" sz="1200">
               <a:solidFill>
                 <a:srgbClr val="FFC88C"/>
               </a:solidFill>
@@ -4794,10 +6157,10 @@
       </p:sp>
       <p:sp>
         <p:nvSpPr>
-          <p:cNvPr id="14" name="TextBox 13">
-            <a:extLst>
-              <a:ext uri="{FF2B5EF4-FFF2-40B4-BE49-F238E27FC236}">
-                <a16:creationId xmlns:a16="http://schemas.microsoft.com/office/drawing/2014/main" id="{BD25CEB1-BCCD-EC9B-1612-1E41F92ED42E}"/>
+          <p:cNvPr id="17" name="TextBox 16">
+            <a:extLst>
+              <a:ext uri="{FF2B5EF4-FFF2-40B4-BE49-F238E27FC236}">
+                <a16:creationId xmlns:a16="http://schemas.microsoft.com/office/drawing/2014/main" id="{C36AEBE7-32B1-212C-1812-88DC2F172995}"/>
               </a:ext>
             </a:extLst>
           </p:cNvPr>
@@ -4806,8 +6169,8 @@
         </p:nvSpPr>
         <p:spPr>
           <a:xfrm>
-            <a:off x="6096000" y="3924300"/>
-            <a:ext cx="5397500" cy="261610"/>
+            <a:off x="6095999" y="3481579"/>
+            <a:ext cx="5715095" cy="276999"/>
           </a:xfrm>
           <a:prstGeom prst="rect">
             <a:avLst/>
@@ -4823,38 +6186,14 @@
           <a:lstStyle/>
           <a:p>
             <a:r>
-              <a:rPr lang="en-US" sz="1100" dirty="0" err="1">
+              <a:rPr lang="en-US" sz="1200">
                 <a:solidFill>
                   <a:srgbClr val="8CFFBE"/>
                 </a:solidFill>
               </a:rPr>
-              <a:t>requireSessions</a:t>
-            </a:r>
-            <a:r>
-              <a:rPr lang="en-US" sz="1100" dirty="0">
-                <a:solidFill>
-                  <a:srgbClr val="8CFFBE"/>
-                </a:solidFill>
-              </a:rPr>
-              <a:t>: "true" in </a:t>
-            </a:r>
-            <a:r>
-              <a:rPr lang="en-US" sz="1100" dirty="0" err="1">
-                <a:solidFill>
-                  <a:srgbClr val="8CFFBE"/>
-                </a:solidFill>
-              </a:rPr>
-              <a:t>subscription.yaml</a:t>
-            </a:r>
-            <a:r>
-              <a:rPr lang="en-US" sz="1100" dirty="0">
-                <a:solidFill>
-                  <a:srgbClr val="8CFFBE"/>
-                </a:solidFill>
-              </a:rPr>
-              <a:t> — one config line</a:t>
-            </a:r>
-            <a:endParaRPr lang="ru-RU" sz="1100" dirty="0">
+              <a:t>Retries, timeouts, circuit breakers in resiliency.yaml — no code at all</a:t>
+            </a:r>
+            <a:endParaRPr lang="ru-RU" sz="1200">
               <a:solidFill>
                 <a:srgbClr val="8CFFBE"/>
               </a:solidFill>
@@ -4864,10 +6203,10 @@
       </p:sp>
       <p:sp>
         <p:nvSpPr>
-          <p:cNvPr id="15" name="TextBox 14">
-            <a:extLst>
-              <a:ext uri="{FF2B5EF4-FFF2-40B4-BE49-F238E27FC236}">
-                <a16:creationId xmlns:a16="http://schemas.microsoft.com/office/drawing/2014/main" id="{C810F752-2EE7-B03A-5188-672569ADB767}"/>
+          <p:cNvPr id="18" name="TextBox 17">
+            <a:extLst>
+              <a:ext uri="{FF2B5EF4-FFF2-40B4-BE49-F238E27FC236}">
+                <a16:creationId xmlns:a16="http://schemas.microsoft.com/office/drawing/2014/main" id="{ED2C0FC4-6A7D-493D-97AC-970E2FC2ADE8}"/>
               </a:ext>
             </a:extLst>
           </p:cNvPr>
@@ -4876,8 +6215,8 @@
         </p:nvSpPr>
         <p:spPr>
           <a:xfrm>
-            <a:off x="698500" y="4381500"/>
-            <a:ext cx="10922000" cy="261610"/>
+            <a:off x="698500" y="3846902"/>
+            <a:ext cx="10922000" cy="307777"/>
           </a:xfrm>
           <a:prstGeom prst="rect">
             <a:avLst/>
@@ -4891,16 +6230,24 @@
           <a:lstStyle/>
           <a:p>
             <a:r>
-              <a:rPr lang="nb-NO" sz="1100" b="1">
-                <a:solidFill>
-                  <a:srgbClr val="A0AFC8"/>
-                </a:solidFill>
-              </a:rPr>
-              <a:t>Resiliency</a:t>
-            </a:r>
-            <a:endParaRPr lang="ru-RU" sz="1100" b="1">
+              <a:rPr lang="nb-NO" sz="1400" b="1" dirty="0">
+                <a:solidFill>
+                  <a:schemeClr val="bg2"/>
+                </a:solidFill>
+              </a:rPr>
+              <a:t>♦ </a:t>
+            </a:r>
+            <a:r>
+              <a:rPr lang="nb-NO" sz="1400" b="1" dirty="0" err="1">
+                <a:solidFill>
+                  <a:schemeClr val="bg2"/>
+                </a:solidFill>
+              </a:rPr>
+              <a:t>Observability</a:t>
+            </a:r>
+            <a:endParaRPr lang="ru-RU" sz="1400" b="1" dirty="0">
               <a:solidFill>
-                <a:srgbClr val="A0AFC8"/>
+                <a:schemeClr val="bg2"/>
               </a:solidFill>
             </a:endParaRPr>
           </a:p>
@@ -4908,10 +6255,10 @@
       </p:sp>
       <p:sp>
         <p:nvSpPr>
-          <p:cNvPr id="16" name="TextBox 15">
-            <a:extLst>
-              <a:ext uri="{FF2B5EF4-FFF2-40B4-BE49-F238E27FC236}">
-                <a16:creationId xmlns:a16="http://schemas.microsoft.com/office/drawing/2014/main" id="{374168B0-87F7-B101-A810-51A315D1B94F}"/>
+          <p:cNvPr id="19" name="TextBox 18">
+            <a:extLst>
+              <a:ext uri="{FF2B5EF4-FFF2-40B4-BE49-F238E27FC236}">
+                <a16:creationId xmlns:a16="http://schemas.microsoft.com/office/drawing/2014/main" id="{E69D297A-2D4F-8916-C070-38FEB0AE9AC2}"/>
               </a:ext>
             </a:extLst>
           </p:cNvPr>
@@ -4920,8 +6267,8 @@
         </p:nvSpPr>
         <p:spPr>
           <a:xfrm>
-            <a:off x="698500" y="4597400"/>
-            <a:ext cx="5270500" cy="261610"/>
+            <a:off x="413152" y="4154679"/>
+            <a:ext cx="5555848" cy="276999"/>
           </a:xfrm>
           <a:prstGeom prst="rect">
             <a:avLst/>
@@ -4937,14 +6284,14 @@
           <a:lstStyle/>
           <a:p>
             <a:r>
-              <a:rPr lang="en-US" sz="1100">
+              <a:rPr lang="en-US" sz="1200" dirty="0">
                 <a:solidFill>
                   <a:srgbClr val="FFC88C"/>
                 </a:solidFill>
               </a:rPr>
-              <a:t>Try/catch loops, manual retry policies, dead-letter wiring in every service</a:t>
-            </a:r>
-            <a:endParaRPr lang="ru-RU" sz="1100">
+              <a:t>Manual correlation-ID threading; custom logging and metrics wiring per service</a:t>
+            </a:r>
+            <a:endParaRPr lang="ru-RU" sz="1200" dirty="0">
               <a:solidFill>
                 <a:srgbClr val="FFC88C"/>
               </a:solidFill>
@@ -4954,10 +6301,10 @@
       </p:sp>
       <p:sp>
         <p:nvSpPr>
-          <p:cNvPr id="17" name="TextBox 16">
-            <a:extLst>
-              <a:ext uri="{FF2B5EF4-FFF2-40B4-BE49-F238E27FC236}">
-                <a16:creationId xmlns:a16="http://schemas.microsoft.com/office/drawing/2014/main" id="{C36AEBE7-32B1-212C-1812-88DC2F172995}"/>
+          <p:cNvPr id="20" name="TextBox 19">
+            <a:extLst>
+              <a:ext uri="{FF2B5EF4-FFF2-40B4-BE49-F238E27FC236}">
+                <a16:creationId xmlns:a16="http://schemas.microsoft.com/office/drawing/2014/main" id="{4904E0EB-6C72-20A0-DF35-5220E9D40204}"/>
               </a:ext>
             </a:extLst>
           </p:cNvPr>
@@ -4966,8 +6313,8 @@
         </p:nvSpPr>
         <p:spPr>
           <a:xfrm>
-            <a:off x="6096000" y="4597400"/>
-            <a:ext cx="5397500" cy="261610"/>
+            <a:off x="6095999" y="4154679"/>
+            <a:ext cx="5715095" cy="276999"/>
           </a:xfrm>
           <a:prstGeom prst="rect">
             <a:avLst/>
@@ -4983,14 +6330,14 @@
           <a:lstStyle/>
           <a:p>
             <a:r>
-              <a:rPr lang="en-US" sz="1100">
+              <a:rPr lang="en-US" sz="1200">
                 <a:solidFill>
                   <a:srgbClr val="8CFFBE"/>
                 </a:solidFill>
               </a:rPr>
-              <a:t>Retries, timeouts, circuit breakers in resiliency.yaml — no code at all</a:t>
-            </a:r>
-            <a:endParaRPr lang="ru-RU" sz="1100">
+              <a:t>W3C trace context propagated automatically; OpenTelemetry export built in</a:t>
+            </a:r>
+            <a:endParaRPr lang="ru-RU" sz="1200">
               <a:solidFill>
                 <a:srgbClr val="8CFFBE"/>
               </a:solidFill>
@@ -5000,10 +6347,10 @@
       </p:sp>
       <p:sp>
         <p:nvSpPr>
-          <p:cNvPr id="18" name="TextBox 17">
-            <a:extLst>
-              <a:ext uri="{FF2B5EF4-FFF2-40B4-BE49-F238E27FC236}">
-                <a16:creationId xmlns:a16="http://schemas.microsoft.com/office/drawing/2014/main" id="{ED2C0FC4-6A7D-493D-97AC-970E2FC2ADE8}"/>
+          <p:cNvPr id="21" name="TextBox 20">
+            <a:extLst>
+              <a:ext uri="{FF2B5EF4-FFF2-40B4-BE49-F238E27FC236}">
+                <a16:creationId xmlns:a16="http://schemas.microsoft.com/office/drawing/2014/main" id="{3BBB1A3D-0B32-2F9E-EDC1-DA539EC5CB4E}"/>
               </a:ext>
             </a:extLst>
           </p:cNvPr>
@@ -5012,8 +6359,8 @@
         </p:nvSpPr>
         <p:spPr>
           <a:xfrm>
-            <a:off x="698500" y="5054600"/>
-            <a:ext cx="10922000" cy="261610"/>
+            <a:off x="667634" y="4608902"/>
+            <a:ext cx="10922000" cy="307777"/>
           </a:xfrm>
           <a:prstGeom prst="rect">
             <a:avLst/>
@@ -5027,16 +6374,24 @@
           <a:lstStyle/>
           <a:p>
             <a:r>
-              <a:rPr lang="nb-NO" sz="1100" b="1">
-                <a:solidFill>
-                  <a:srgbClr val="A0AFC8"/>
-                </a:solidFill>
-              </a:rPr>
-              <a:t>Observability</a:t>
-            </a:r>
-            <a:endParaRPr lang="ru-RU" sz="1100" b="1">
+              <a:rPr lang="nb-NO" sz="1400" b="1" dirty="0">
+                <a:solidFill>
+                  <a:schemeClr val="bg2"/>
+                </a:solidFill>
+              </a:rPr>
+              <a:t>♦ </a:t>
+            </a:r>
+            <a:r>
+              <a:rPr lang="nb-NO" sz="1400" b="1" dirty="0" err="1">
+                <a:solidFill>
+                  <a:schemeClr val="bg2"/>
+                </a:solidFill>
+              </a:rPr>
+              <a:t>Failover</a:t>
+            </a:r>
+            <a:endParaRPr lang="ru-RU" sz="1400" b="1" dirty="0">
               <a:solidFill>
-                <a:srgbClr val="A0AFC8"/>
+                <a:schemeClr val="bg2"/>
               </a:solidFill>
             </a:endParaRPr>
           </a:p>
@@ -5044,10 +6399,10 @@
       </p:sp>
       <p:sp>
         <p:nvSpPr>
-          <p:cNvPr id="19" name="TextBox 18">
-            <a:extLst>
-              <a:ext uri="{FF2B5EF4-FFF2-40B4-BE49-F238E27FC236}">
-                <a16:creationId xmlns:a16="http://schemas.microsoft.com/office/drawing/2014/main" id="{E69D297A-2D4F-8916-C070-38FEB0AE9AC2}"/>
+          <p:cNvPr id="22" name="TextBox 21">
+            <a:extLst>
+              <a:ext uri="{FF2B5EF4-FFF2-40B4-BE49-F238E27FC236}">
+                <a16:creationId xmlns:a16="http://schemas.microsoft.com/office/drawing/2014/main" id="{07544CBE-DB6E-4076-E640-0F91949657CD}"/>
               </a:ext>
             </a:extLst>
           </p:cNvPr>
@@ -5056,8 +6411,8 @@
         </p:nvSpPr>
         <p:spPr>
           <a:xfrm>
-            <a:off x="698500" y="5270500"/>
-            <a:ext cx="5270500" cy="261610"/>
+            <a:off x="413152" y="4916679"/>
+            <a:ext cx="5555848" cy="276999"/>
           </a:xfrm>
           <a:prstGeom prst="rect">
             <a:avLst/>
@@ -5073,14 +6428,14 @@
           <a:lstStyle/>
           <a:p>
             <a:r>
-              <a:rPr lang="en-US" sz="1100">
+              <a:rPr lang="en-US" sz="1200" dirty="0">
                 <a:solidFill>
                   <a:srgbClr val="FFC88C"/>
                 </a:solidFill>
               </a:rPr>
-              <a:t>Manual correlation-ID threading; custom logging and metrics wiring per service</a:t>
-            </a:r>
-            <a:endParaRPr lang="ru-RU" sz="1100">
+              <a:t>Manual custom implementation.</a:t>
+            </a:r>
+            <a:endParaRPr lang="ru-RU" sz="1200" dirty="0">
               <a:solidFill>
                 <a:srgbClr val="FFC88C"/>
               </a:solidFill>
@@ -5090,10 +6445,10 @@
       </p:sp>
       <p:sp>
         <p:nvSpPr>
-          <p:cNvPr id="20" name="TextBox 19">
-            <a:extLst>
-              <a:ext uri="{FF2B5EF4-FFF2-40B4-BE49-F238E27FC236}">
-                <a16:creationId xmlns:a16="http://schemas.microsoft.com/office/drawing/2014/main" id="{4904E0EB-6C72-20A0-DF35-5220E9D40204}"/>
+          <p:cNvPr id="23" name="TextBox 22">
+            <a:extLst>
+              <a:ext uri="{FF2B5EF4-FFF2-40B4-BE49-F238E27FC236}">
+                <a16:creationId xmlns:a16="http://schemas.microsoft.com/office/drawing/2014/main" id="{8B7F2307-356C-9570-B7F0-2F346C5442E8}"/>
               </a:ext>
             </a:extLst>
           </p:cNvPr>
@@ -5102,8 +6457,8 @@
         </p:nvSpPr>
         <p:spPr>
           <a:xfrm>
-            <a:off x="6096000" y="5270500"/>
-            <a:ext cx="5397500" cy="261610"/>
+            <a:off x="6095999" y="4916679"/>
+            <a:ext cx="5715095" cy="276999"/>
           </a:xfrm>
           <a:prstGeom prst="rect">
             <a:avLst/>
@@ -5119,14 +6474,14 @@
           <a:lstStyle/>
           <a:p>
             <a:r>
-              <a:rPr lang="en-US" sz="1100">
+              <a:rPr lang="en-US" sz="1200" dirty="0">
                 <a:solidFill>
                   <a:srgbClr val="8CFFBE"/>
                 </a:solidFill>
               </a:rPr>
-              <a:t>W3C trace context propagated automatically; OpenTelemetry export built in</a:t>
-            </a:r>
-            <a:endParaRPr lang="ru-RU" sz="1100">
+              <a:t>Stateful actors support</a:t>
+            </a:r>
+            <a:endParaRPr lang="ru-RU" sz="1200" dirty="0">
               <a:solidFill>
                 <a:srgbClr val="8CFFBE"/>
               </a:solidFill>
@@ -5142,19 +6497,46 @@
     </p:extLst>
   </p:cSld>
   <p:clrMapOvr>
-    <a:masterClrMapping/>
+    <a:overrideClrMapping bg1="dk1" tx1="lt1" bg2="dk2" tx2="lt2" accent1="accent1" accent2="accent2" accent3="accent3" accent4="accent4" accent5="accent5" accent6="accent6" hlink="hlink" folHlink="folHlink"/>
   </p:clrMapOvr>
 </p:sld>
 </file>
 
-<file path=ppt/slides/slide4.xml><?xml version="1.0" encoding="utf-8"?>
+<file path=ppt/slides/slide5.xml><?xml version="1.0" encoding="utf-8"?>
 <p:sld xmlns:a="http://schemas.openxmlformats.org/drawingml/2006/main" xmlns:r="http://schemas.openxmlformats.org/officeDocument/2006/relationships" xmlns:p="http://schemas.openxmlformats.org/presentationml/2006/main">
   <p:cSld>
     <p:bg>
       <p:bgPr>
-        <a:solidFill>
-          <a:srgbClr val="121626"/>
-        </a:solidFill>
+        <a:gradFill flip="none" rotWithShape="1">
+          <a:gsLst>
+            <a:gs pos="0">
+              <a:schemeClr val="accent3">
+                <a:lumMod val="5000"/>
+                <a:lumOff val="95000"/>
+              </a:schemeClr>
+            </a:gs>
+            <a:gs pos="56000">
+              <a:schemeClr val="accent3">
+                <a:lumMod val="45000"/>
+                <a:lumOff val="55000"/>
+              </a:schemeClr>
+            </a:gs>
+            <a:gs pos="83000">
+              <a:schemeClr val="accent3">
+                <a:lumMod val="45000"/>
+                <a:lumOff val="55000"/>
+              </a:schemeClr>
+            </a:gs>
+            <a:gs pos="100000">
+              <a:schemeClr val="accent3">
+                <a:lumMod val="30000"/>
+                <a:lumOff val="70000"/>
+              </a:schemeClr>
+            </a:gs>
+          </a:gsLst>
+          <a:lin ang="5400000" scaled="1"/>
+          <a:tileRect/>
+        </a:gradFill>
         <a:effectLst/>
       </p:bgPr>
     </p:bg>
@@ -5174,6 +6556,124 @@
       </p:grpSpPr>
       <p:sp>
         <p:nvSpPr>
+          <p:cNvPr id="43" name="Rectangle: Rounded Corners 42">
+            <a:extLst>
+              <a:ext uri="{FF2B5EF4-FFF2-40B4-BE49-F238E27FC236}">
+                <a16:creationId xmlns:a16="http://schemas.microsoft.com/office/drawing/2014/main" id="{A9CF5D7B-2512-51FE-EF59-B5F7B2AC011D}"/>
+              </a:ext>
+            </a:extLst>
+          </p:cNvPr>
+          <p:cNvSpPr/>
+          <p:nvPr/>
+        </p:nvSpPr>
+        <p:spPr>
+          <a:xfrm>
+            <a:off x="1508400" y="1059981"/>
+            <a:ext cx="2565036" cy="1459044"/>
+          </a:xfrm>
+          <a:prstGeom prst="roundRect">
+            <a:avLst/>
+          </a:prstGeom>
+          <a:solidFill>
+            <a:schemeClr val="accent1">
+              <a:lumMod val="40000"/>
+              <a:lumOff val="60000"/>
+            </a:schemeClr>
+          </a:solidFill>
+          <a:ln>
+            <a:solidFill>
+              <a:schemeClr val="accent1">
+                <a:lumMod val="75000"/>
+              </a:schemeClr>
+            </a:solidFill>
+          </a:ln>
+        </p:spPr>
+        <p:style>
+          <a:lnRef idx="2">
+            <a:schemeClr val="accent1">
+              <a:shade val="15000"/>
+            </a:schemeClr>
+          </a:lnRef>
+          <a:fillRef idx="1">
+            <a:schemeClr val="accent1"/>
+          </a:fillRef>
+          <a:effectRef idx="0">
+            <a:schemeClr val="accent1"/>
+          </a:effectRef>
+          <a:fontRef idx="minor">
+            <a:schemeClr val="lt1"/>
+          </a:fontRef>
+        </p:style>
+        <p:txBody>
+          <a:bodyPr rtlCol="0" anchor="ctr"/>
+          <a:lstStyle/>
+          <a:p>
+            <a:pPr algn="ctr"/>
+            <a:endParaRPr lang="ru-RU"/>
+          </a:p>
+        </p:txBody>
+      </p:sp>
+      <p:sp>
+        <p:nvSpPr>
+          <p:cNvPr id="27" name="Rectangle: Rounded Corners 26">
+            <a:extLst>
+              <a:ext uri="{FF2B5EF4-FFF2-40B4-BE49-F238E27FC236}">
+                <a16:creationId xmlns:a16="http://schemas.microsoft.com/office/drawing/2014/main" id="{C3CA048F-77D8-E907-E210-CCB7F5F36CB5}"/>
+              </a:ext>
+            </a:extLst>
+          </p:cNvPr>
+          <p:cNvSpPr/>
+          <p:nvPr/>
+        </p:nvSpPr>
+        <p:spPr>
+          <a:xfrm>
+            <a:off x="1724297" y="2684133"/>
+            <a:ext cx="5199015" cy="1459044"/>
+          </a:xfrm>
+          <a:prstGeom prst="roundRect">
+            <a:avLst/>
+          </a:prstGeom>
+          <a:solidFill>
+            <a:schemeClr val="accent1">
+              <a:lumMod val="40000"/>
+              <a:lumOff val="60000"/>
+            </a:schemeClr>
+          </a:solidFill>
+          <a:ln>
+            <a:solidFill>
+              <a:schemeClr val="accent1">
+                <a:lumMod val="75000"/>
+              </a:schemeClr>
+            </a:solidFill>
+          </a:ln>
+        </p:spPr>
+        <p:style>
+          <a:lnRef idx="2">
+            <a:schemeClr val="accent1">
+              <a:shade val="15000"/>
+            </a:schemeClr>
+          </a:lnRef>
+          <a:fillRef idx="1">
+            <a:schemeClr val="accent1"/>
+          </a:fillRef>
+          <a:effectRef idx="0">
+            <a:schemeClr val="accent1"/>
+          </a:effectRef>
+          <a:fontRef idx="minor">
+            <a:schemeClr val="lt1"/>
+          </a:fontRef>
+        </p:style>
+        <p:txBody>
+          <a:bodyPr rtlCol="0" anchor="ctr"/>
+          <a:lstStyle/>
+          <a:p>
+            <a:pPr algn="ctr"/>
+            <a:endParaRPr lang="ru-RU"/>
+          </a:p>
+        </p:txBody>
+      </p:sp>
+      <p:sp>
+        <p:nvSpPr>
           <p:cNvPr id="2" name="TextBox 1">
             <a:extLst>
               <a:ext uri="{FF2B5EF4-FFF2-40B4-BE49-F238E27FC236}">
@@ -5186,7 +6686,7 @@
         </p:nvSpPr>
         <p:spPr>
           <a:xfrm>
-            <a:off x="635000" y="635000"/>
+            <a:off x="556623" y="133533"/>
             <a:ext cx="10922000" cy="615553"/>
           </a:xfrm>
           <a:prstGeom prst="rect">
@@ -5201,14 +6701,14 @@
           <a:lstStyle/>
           <a:p>
             <a:r>
-              <a:rPr lang="en-US" sz="3400" b="1">
+              <a:rPr lang="en-US" sz="3400" b="1" dirty="0">
                 <a:solidFill>
                   <a:srgbClr val="146DFF"/>
                 </a:solidFill>
               </a:rPr>
-              <a:t>This Demo: Ordered Delivery in Practice</a:t>
-            </a:r>
-            <a:endParaRPr lang="ru-RU" sz="3400" b="1">
+              <a:t>This Demo: Pull Delivery in Practice</a:t>
+            </a:r>
+            <a:endParaRPr lang="ru-RU" sz="3400" b="1" dirty="0">
               <a:solidFill>
                 <a:srgbClr val="146DFF"/>
               </a:solidFill>
@@ -5230,7 +6730,7 @@
         </p:nvCxnSpPr>
         <p:spPr>
           <a:xfrm>
-            <a:off x="635000" y="1803400"/>
+            <a:off x="556623" y="845457"/>
             <a:ext cx="10922000" cy="0"/>
           </a:xfrm>
           <a:prstGeom prst="line">
@@ -5271,14 +6771,16 @@
         </p:nvSpPr>
         <p:spPr>
           <a:xfrm>
-            <a:off x="660400" y="2006600"/>
-            <a:ext cx="2222500" cy="1016000"/>
+            <a:off x="1898468" y="1303094"/>
+            <a:ext cx="1811746" cy="1016000"/>
           </a:xfrm>
           <a:prstGeom prst="rect">
             <a:avLst/>
           </a:prstGeom>
           <a:solidFill>
-            <a:srgbClr val="141E41"/>
+            <a:schemeClr val="bg2">
+              <a:lumMod val="75000"/>
+            </a:schemeClr>
           </a:solidFill>
           <a:ln w="19050">
             <a:solidFill>
@@ -5306,20 +6808,31 @@
           <a:bodyPr wrap="square" lIns="101600" tIns="76200" rIns="76200" rtlCol="0" anchor="ctr"/>
           <a:lstStyle/>
           <a:p>
-            <a:pPr algn="ctr"/>
-            <a:r>
-              <a:rPr lang="nb-NO" sz="1200" b="1">
+            <a:r>
+              <a:rPr lang="nb-NO" sz="1200" b="1" dirty="0">
                 <a:solidFill>
                   <a:srgbClr val="FFFFFF"/>
                 </a:solidFill>
               </a:rPr>
-              <a:t>Publisher Worker</a:t>
-            </a:r>
-          </a:p>
-          <a:p>
-            <a:pPr algn="ctr"/>
-            <a:r>
-              <a:rPr lang="en-US" sz="1000">
+              <a:t>Publisher </a:t>
+            </a:r>
+            <a:r>
+              <a:rPr lang="nb-NO" sz="1200" b="1" dirty="0" err="1">
+                <a:solidFill>
+                  <a:srgbClr val="FFFFFF"/>
+                </a:solidFill>
+              </a:rPr>
+              <a:t>Worker</a:t>
+            </a:r>
+            <a:endParaRPr lang="nb-NO" sz="1200" b="1" dirty="0">
+              <a:solidFill>
+                <a:srgbClr val="FFFFFF"/>
+              </a:solidFill>
+            </a:endParaRPr>
+          </a:p>
+          <a:p>
+            <a:r>
+              <a:rPr lang="en-US" sz="1100" dirty="0">
                 <a:solidFill>
                   <a:srgbClr val="DCE1EB"/>
                 </a:solidFill>
@@ -5327,7 +6840,7 @@
               <a:t>.NET Worker Service
 publishes every 5 s</a:t>
             </a:r>
-            <a:endParaRPr lang="ru-RU" sz="1000">
+            <a:endParaRPr lang="ru-RU" sz="1100" dirty="0">
               <a:solidFill>
                 <a:srgbClr val="DCE1EB"/>
               </a:solidFill>
@@ -5349,7 +6862,7 @@
         </p:nvCxnSpPr>
         <p:spPr>
           <a:xfrm>
-            <a:off x="2895600" y="2514600"/>
+            <a:off x="3722914" y="1811094"/>
             <a:ext cx="635000" cy="0"/>
           </a:xfrm>
           <a:prstGeom prst="line">
@@ -5391,14 +6904,16 @@
         </p:nvSpPr>
         <p:spPr>
           <a:xfrm>
-            <a:off x="3530600" y="2006600"/>
+            <a:off x="4357914" y="1303094"/>
             <a:ext cx="2349500" cy="1016000"/>
           </a:xfrm>
           <a:prstGeom prst="rect">
             <a:avLst/>
           </a:prstGeom>
           <a:solidFill>
-            <a:srgbClr val="0A285A"/>
+            <a:schemeClr val="bg2">
+              <a:lumMod val="75000"/>
+            </a:schemeClr>
           </a:solidFill>
           <a:ln w="19050">
             <a:solidFill>
@@ -5426,28 +6941,66 @@
           <a:bodyPr wrap="square" lIns="101600" tIns="76200" rIns="76200" rtlCol="0" anchor="ctr"/>
           <a:lstStyle/>
           <a:p>
-            <a:pPr algn="ctr"/>
-            <a:r>
-              <a:rPr lang="nb-NO" sz="1200" b="1">
+            <a:r>
+              <a:rPr lang="nb-NO" sz="1200" b="1" dirty="0" err="1">
                 <a:solidFill>
                   <a:srgbClr val="FFFFFF"/>
                 </a:solidFill>
               </a:rPr>
-              <a:t>Dapr Sidecar (pub)</a:t>
-            </a:r>
-          </a:p>
-          <a:p>
-            <a:pPr algn="ctr"/>
-            <a:r>
-              <a:rPr lang="en-US" sz="1000">
+              <a:t>Dapr</a:t>
+            </a:r>
+            <a:r>
+              <a:rPr lang="nb-NO" sz="1200" b="1" dirty="0">
+                <a:solidFill>
+                  <a:srgbClr val="FFFFFF"/>
+                </a:solidFill>
+              </a:rPr>
+              <a:t> </a:t>
+            </a:r>
+            <a:r>
+              <a:rPr lang="nb-NO" sz="1200" b="1" dirty="0" err="1">
+                <a:solidFill>
+                  <a:srgbClr val="FFFFFF"/>
+                </a:solidFill>
+              </a:rPr>
+              <a:t>Sidecar</a:t>
+            </a:r>
+            <a:r>
+              <a:rPr lang="nb-NO" sz="1200" b="1" dirty="0">
+                <a:solidFill>
+                  <a:srgbClr val="FFFFFF"/>
+                </a:solidFill>
+              </a:rPr>
+              <a:t> (pub)</a:t>
+            </a:r>
+          </a:p>
+          <a:p>
+            <a:r>
+              <a:rPr lang="en-US" sz="1000" dirty="0">
                 <a:solidFill>
                   <a:srgbClr val="DCE1EB"/>
                 </a:solidFill>
               </a:rPr>
               <a:t>pub-app-id : 3500
-attaches SessionId=session1</a:t>
-            </a:r>
-            <a:endParaRPr lang="ru-RU" sz="1000">
+attaches </a:t>
+            </a:r>
+            <a:r>
+              <a:rPr lang="en-US" sz="1000" dirty="0" err="1">
+                <a:solidFill>
+                  <a:srgbClr val="DCE1EB"/>
+                </a:solidFill>
+              </a:rPr>
+              <a:t>SessionId</a:t>
+            </a:r>
+            <a:r>
+              <a:rPr lang="en-US" sz="1000" dirty="0">
+                <a:solidFill>
+                  <a:srgbClr val="DCE1EB"/>
+                </a:solidFill>
+              </a:rPr>
+              <a:t>=session1</a:t>
+            </a:r>
+            <a:endParaRPr lang="ru-RU" sz="1000" dirty="0">
               <a:solidFill>
                 <a:srgbClr val="DCE1EB"/>
               </a:solidFill>
@@ -5469,7 +7022,7 @@
         </p:nvCxnSpPr>
         <p:spPr>
           <a:xfrm>
-            <a:off x="5892800" y="2514600"/>
+            <a:off x="6720114" y="1811094"/>
             <a:ext cx="635000" cy="0"/>
           </a:xfrm>
           <a:prstGeom prst="line">
@@ -5511,14 +7064,16 @@
         </p:nvSpPr>
         <p:spPr>
           <a:xfrm>
-            <a:off x="6527800" y="2006600"/>
-            <a:ext cx="4546600" cy="1016000"/>
+            <a:off x="7355114" y="1303094"/>
+            <a:ext cx="2646678" cy="1016000"/>
           </a:xfrm>
           <a:prstGeom prst="rect">
             <a:avLst/>
           </a:prstGeom>
           <a:solidFill>
-            <a:srgbClr val="00326E"/>
+            <a:schemeClr val="bg2">
+              <a:lumMod val="75000"/>
+            </a:schemeClr>
           </a:solidFill>
           <a:ln w="19050">
             <a:solidFill>
@@ -5548,29 +7103,26 @@
           <a:p>
             <a:pPr algn="ctr"/>
             <a:r>
-              <a:rPr lang="en-US" sz="1200" b="1">
+              <a:rPr sz="1200" b="1" dirty="0">
                 <a:solidFill>
                   <a:srgbClr val="FFFFFF"/>
                 </a:solidFill>
               </a:rPr>
-              <a:t>Azure Service Bus
-topic1 / subscription1</a:t>
-            </a:r>
-          </a:p>
-          <a:p>
-            <a:pPr algn="ctr"/>
-            <a:r>
-              <a:rPr lang="nb-NO" sz="1000">
-                <a:solidFill>
-                  <a:srgbClr val="DCE1EB"/>
-                </a:solidFill>
-              </a:rPr>
-              <a:t>RequiresSession=true
-FIFO guaranteed per session</a:t>
-            </a:r>
-            <a:endParaRPr lang="ru-RU" sz="1000">
+              <a:t>Service Bus
+</a:t>
+            </a:r>
+            <a:r>
+              <a:rPr sz="1100" dirty="0">
+                <a:solidFill>
+                  <a:srgbClr val="FFFFFF"/>
+                </a:solidFill>
+              </a:rPr>
+              <a:t>topic1 / subscription1
+buffers messages for subscribers</a:t>
+            </a:r>
+            <a:endParaRPr sz="1200" dirty="0">
               <a:solidFill>
-                <a:srgbClr val="DCE1EB"/>
+                <a:srgbClr val="FFFFFF"/>
               </a:solidFill>
             </a:endParaRPr>
           </a:p>
@@ -5590,7 +7142,7 @@
         </p:nvCxnSpPr>
         <p:spPr>
           <a:xfrm>
-            <a:off x="8801100" y="3022600"/>
+            <a:off x="9628414" y="2319094"/>
             <a:ext cx="0" cy="660400"/>
           </a:xfrm>
           <a:prstGeom prst="line">
@@ -5632,14 +7184,16 @@
         </p:nvSpPr>
         <p:spPr>
           <a:xfrm>
-            <a:off x="6527800" y="3683000"/>
-            <a:ext cx="4546600" cy="1016000"/>
+            <a:off x="7355114" y="2979494"/>
+            <a:ext cx="2677160" cy="1016000"/>
           </a:xfrm>
           <a:prstGeom prst="rect">
             <a:avLst/>
           </a:prstGeom>
           <a:solidFill>
-            <a:srgbClr val="0A285A"/>
+            <a:schemeClr val="bg2">
+              <a:lumMod val="75000"/>
+            </a:schemeClr>
           </a:solidFill>
           <a:ln w="19050">
             <a:solidFill>
@@ -5667,30 +7221,501 @@
           <a:bodyPr wrap="square" lIns="101600" tIns="76200" rIns="76200" rtlCol="0" anchor="ctr"/>
           <a:lstStyle/>
           <a:p>
-            <a:pPr algn="ctr"/>
-            <a:r>
-              <a:rPr lang="nb-NO" sz="1200" b="1">
+            <a:r>
+              <a:rPr sz="1200" b="1" dirty="0" err="1">
                 <a:solidFill>
                   <a:srgbClr val="FFFFFF"/>
                 </a:solidFill>
               </a:rPr>
-              <a:t>Dapr Sidecar (sub)</a:t>
-            </a:r>
-          </a:p>
-          <a:p>
-            <a:pPr algn="ctr"/>
-            <a:r>
-              <a:rPr lang="nb-NO" sz="1000">
-                <a:solidFill>
-                  <a:srgbClr val="DCE1EB"/>
+              <a:t>Dapr</a:t>
+            </a:r>
+            <a:r>
+              <a:rPr sz="1200" b="1" dirty="0">
+                <a:solidFill>
+                  <a:srgbClr val="FFFFFF"/>
+                </a:solidFill>
+              </a:rPr>
+              <a:t> Sidecar (sub)
+</a:t>
+            </a:r>
+            <a:r>
+              <a:rPr sz="1100" dirty="0">
+                <a:solidFill>
+                  <a:srgbClr val="FFFFFF"/>
                 </a:solidFill>
               </a:rPr>
               <a:t>sub-app-id : 3501
-ServiceBusSessionProcessor</a:t>
-            </a:r>
-            <a:endParaRPr lang="ru-RU" sz="1000">
+pulls from broker and exposes stream</a:t>
+            </a:r>
+            <a:endParaRPr sz="1200" dirty="0">
               <a:solidFill>
-                <a:srgbClr val="DCE1EB"/>
+                <a:srgbClr val="FFFFFF"/>
+              </a:solidFill>
+            </a:endParaRPr>
+          </a:p>
+        </p:txBody>
+      </p:sp>
+      <p:sp>
+        <p:nvSpPr>
+          <p:cNvPr id="12" name="Rectangle 11">
+            <a:extLst>
+              <a:ext uri="{FF2B5EF4-FFF2-40B4-BE49-F238E27FC236}">
+                <a16:creationId xmlns:a16="http://schemas.microsoft.com/office/drawing/2014/main" id="{7B79482C-6623-40A0-5300-8AED8E35DC82}"/>
+              </a:ext>
+            </a:extLst>
+          </p:cNvPr>
+          <p:cNvSpPr/>
+          <p:nvPr/>
+        </p:nvSpPr>
+        <p:spPr>
+          <a:xfrm>
+            <a:off x="4357914" y="2979494"/>
+            <a:ext cx="2349500" cy="1016000"/>
+          </a:xfrm>
+          <a:prstGeom prst="rect">
+            <a:avLst/>
+          </a:prstGeom>
+          <a:solidFill>
+            <a:schemeClr val="bg2">
+              <a:lumMod val="75000"/>
+            </a:schemeClr>
+          </a:solidFill>
+          <a:ln w="19050">
+            <a:solidFill>
+              <a:srgbClr val="146DFF"/>
+            </a:solidFill>
+          </a:ln>
+        </p:spPr>
+        <p:style>
+          <a:lnRef idx="2">
+            <a:schemeClr val="accent1">
+              <a:shade val="15000"/>
+            </a:schemeClr>
+          </a:lnRef>
+          <a:fillRef idx="1">
+            <a:schemeClr val="accent1"/>
+          </a:fillRef>
+          <a:effectRef idx="0">
+            <a:schemeClr val="accent1"/>
+          </a:effectRef>
+          <a:fontRef idx="minor">
+            <a:schemeClr val="lt1"/>
+          </a:fontRef>
+        </p:style>
+        <p:txBody>
+          <a:bodyPr wrap="square" lIns="101600" tIns="76200" rIns="76200" rtlCol="0" anchor="ctr"/>
+          <a:lstStyle/>
+          <a:p>
+            <a:r>
+              <a:rPr sz="1200" b="1" dirty="0">
+                <a:solidFill>
+                  <a:srgbClr val="FFFFFF"/>
+                </a:solidFill>
+              </a:rPr>
+              <a:t>Streaming subscription
+</a:t>
+            </a:r>
+            <a:r>
+              <a:rPr sz="1100" dirty="0" err="1">
+                <a:solidFill>
+                  <a:srgbClr val="FFFFFF"/>
+                </a:solidFill>
+              </a:rPr>
+              <a:t>Dapr</a:t>
+            </a:r>
+            <a:r>
+              <a:rPr sz="1100" dirty="0">
+                <a:solidFill>
+                  <a:srgbClr val="FFFFFF"/>
+                </a:solidFill>
+              </a:rPr>
+              <a:t> .NET Messaging SDK
+app pulls next message when ready</a:t>
+            </a:r>
+            <a:endParaRPr sz="1200" dirty="0">
+              <a:solidFill>
+                <a:srgbClr val="FFFFFF"/>
+              </a:solidFill>
+            </a:endParaRPr>
+          </a:p>
+        </p:txBody>
+      </p:sp>
+      <p:sp>
+        <p:nvSpPr>
+          <p:cNvPr id="14" name="Rectangle 13">
+            <a:extLst>
+              <a:ext uri="{FF2B5EF4-FFF2-40B4-BE49-F238E27FC236}">
+                <a16:creationId xmlns:a16="http://schemas.microsoft.com/office/drawing/2014/main" id="{D1FD30E2-A889-F6F7-F200-E8AF4E7CF87D}"/>
+              </a:ext>
+            </a:extLst>
+          </p:cNvPr>
+          <p:cNvSpPr/>
+          <p:nvPr/>
+        </p:nvSpPr>
+        <p:spPr>
+          <a:xfrm>
+            <a:off x="1898468" y="2979494"/>
+            <a:ext cx="1811746" cy="1016000"/>
+          </a:xfrm>
+          <a:prstGeom prst="rect">
+            <a:avLst/>
+          </a:prstGeom>
+          <a:solidFill>
+            <a:schemeClr val="bg2">
+              <a:lumMod val="75000"/>
+            </a:schemeClr>
+          </a:solidFill>
+          <a:ln w="19050">
+            <a:solidFill>
+              <a:srgbClr val="146DFF"/>
+            </a:solidFill>
+          </a:ln>
+        </p:spPr>
+        <p:style>
+          <a:lnRef idx="2">
+            <a:schemeClr val="accent1">
+              <a:shade val="15000"/>
+            </a:schemeClr>
+          </a:lnRef>
+          <a:fillRef idx="1">
+            <a:schemeClr val="accent1"/>
+          </a:fillRef>
+          <a:effectRef idx="0">
+            <a:schemeClr val="accent1"/>
+          </a:effectRef>
+          <a:fontRef idx="minor">
+            <a:schemeClr val="lt1"/>
+          </a:fontRef>
+        </p:style>
+        <p:txBody>
+          <a:bodyPr wrap="square" lIns="101600" tIns="76200" rIns="76200" rtlCol="0" anchor="ctr"/>
+          <a:lstStyle/>
+          <a:p>
+            <a:r>
+              <a:rPr sz="1200" b="1" dirty="0">
+                <a:solidFill>
+                  <a:srgbClr val="FFFFFF"/>
+                </a:solidFill>
+              </a:rPr>
+              <a:t>Subscriber </a:t>
+            </a:r>
+            <a:r>
+              <a:rPr lang="en-US" sz="1200" b="1" dirty="0" err="1">
+                <a:solidFill>
+                  <a:srgbClr val="FFFFFF"/>
+                </a:solidFill>
+              </a:rPr>
+              <a:t>Dapr</a:t>
+            </a:r>
+            <a:r>
+              <a:rPr lang="en-US" sz="1200" b="1" dirty="0">
+                <a:solidFill>
+                  <a:srgbClr val="FFFFFF"/>
+                </a:solidFill>
+              </a:rPr>
+              <a:t> Actor</a:t>
+            </a:r>
+            <a:r>
+              <a:rPr sz="1200" b="1" dirty="0">
+                <a:solidFill>
+                  <a:srgbClr val="FFFFFF"/>
+                </a:solidFill>
+              </a:rPr>
+              <a:t>
+</a:t>
+            </a:r>
+            <a:r>
+              <a:rPr lang="en-US" sz="1100" dirty="0" err="1">
+                <a:solidFill>
+                  <a:srgbClr val="FFFFFF"/>
+                </a:solidFill>
+              </a:rPr>
+              <a:t>Dapr</a:t>
+            </a:r>
+            <a:r>
+              <a:rPr lang="en-US" sz="1100" dirty="0">
+                <a:solidFill>
+                  <a:srgbClr val="FFFFFF"/>
+                </a:solidFill>
+              </a:rPr>
+              <a:t> </a:t>
+            </a:r>
+            <a:r>
+              <a:rPr sz="1100" dirty="0">
+                <a:solidFill>
+                  <a:srgbClr val="FFFFFF"/>
+                </a:solidFill>
+              </a:rPr>
+              <a:t>.NET </a:t>
+            </a:r>
+            <a:r>
+              <a:rPr lang="en-US" sz="1100" dirty="0">
+                <a:solidFill>
+                  <a:srgbClr val="FFFFFF"/>
+                </a:solidFill>
+              </a:rPr>
+              <a:t>stateful </a:t>
+            </a:r>
+            <a:r>
+              <a:rPr lang="nb-NO" sz="1100" dirty="0" err="1">
+                <a:solidFill>
+                  <a:srgbClr val="FFFFFF"/>
+                </a:solidFill>
+              </a:rPr>
+              <a:t>Actor</a:t>
+            </a:r>
+            <a:r>
+              <a:rPr sz="1100" dirty="0">
+                <a:solidFill>
+                  <a:srgbClr val="FFFFFF"/>
+                </a:solidFill>
+              </a:rPr>
+              <a:t>
+business handler processes messages</a:t>
+            </a:r>
+            <a:endParaRPr sz="1200" dirty="0">
+              <a:solidFill>
+                <a:srgbClr val="FFFFFF"/>
+              </a:solidFill>
+            </a:endParaRPr>
+          </a:p>
+        </p:txBody>
+      </p:sp>
+      <p:sp>
+        <p:nvSpPr>
+          <p:cNvPr id="15" name="TextBox 14">
+            <a:extLst>
+              <a:ext uri="{FF2B5EF4-FFF2-40B4-BE49-F238E27FC236}">
+                <a16:creationId xmlns:a16="http://schemas.microsoft.com/office/drawing/2014/main" id="{5B4307C8-4AA5-CF9B-8BEC-D8201A857075}"/>
+              </a:ext>
+            </a:extLst>
+          </p:cNvPr>
+          <p:cNvSpPr txBox="1"/>
+          <p:nvPr/>
+        </p:nvSpPr>
+        <p:spPr>
+          <a:xfrm>
+            <a:off x="660400" y="4927600"/>
+            <a:ext cx="10922000" cy="307777"/>
+          </a:xfrm>
+          <a:prstGeom prst="rect">
+            <a:avLst/>
+          </a:prstGeom>
+          <a:noFill/>
+        </p:spPr>
+        <p:txBody>
+          <a:bodyPr vert="horz" wrap="square" rtlCol="0">
+            <a:spAutoFit/>
+          </a:bodyPr>
+          <a:lstStyle/>
+          <a:p>
+            <a:r>
+              <a:rPr lang="nb-NO" sz="1400" b="1" dirty="0">
+                <a:solidFill>
+                  <a:schemeClr val="accent1"/>
+                </a:solidFill>
+              </a:rPr>
+              <a:t>Key </a:t>
+            </a:r>
+            <a:r>
+              <a:rPr lang="nb-NO" sz="1400" b="1" dirty="0" err="1">
+                <a:solidFill>
+                  <a:schemeClr val="accent1"/>
+                </a:solidFill>
+              </a:rPr>
+              <a:t>guarantees</a:t>
+            </a:r>
+            <a:r>
+              <a:rPr lang="nb-NO" sz="1400" b="1" dirty="0">
+                <a:solidFill>
+                  <a:schemeClr val="accent1"/>
+                </a:solidFill>
+              </a:rPr>
+              <a:t> from </a:t>
+            </a:r>
+            <a:r>
+              <a:rPr lang="nb-NO" sz="1400" b="1" dirty="0" err="1">
+                <a:solidFill>
+                  <a:schemeClr val="accent1"/>
+                </a:solidFill>
+              </a:rPr>
+              <a:t>Dapr</a:t>
+            </a:r>
+            <a:r>
+              <a:rPr lang="nb-NO" sz="1400" b="1" dirty="0">
+                <a:solidFill>
+                  <a:schemeClr val="accent1"/>
+                </a:solidFill>
+              </a:rPr>
+              <a:t>:</a:t>
+            </a:r>
+            <a:endParaRPr lang="ru-RU" sz="1400" b="1" dirty="0">
+              <a:solidFill>
+                <a:schemeClr val="accent1"/>
+              </a:solidFill>
+            </a:endParaRPr>
+          </a:p>
+        </p:txBody>
+      </p:sp>
+      <p:sp>
+        <p:nvSpPr>
+          <p:cNvPr id="16" name="TextBox 15">
+            <a:extLst>
+              <a:ext uri="{FF2B5EF4-FFF2-40B4-BE49-F238E27FC236}">
+                <a16:creationId xmlns:a16="http://schemas.microsoft.com/office/drawing/2014/main" id="{70C93CB8-8347-EA86-AF5A-913E36D05A6C}"/>
+              </a:ext>
+            </a:extLst>
+          </p:cNvPr>
+          <p:cNvSpPr txBox="1"/>
+          <p:nvPr/>
+        </p:nvSpPr>
+        <p:spPr>
+          <a:xfrm>
+            <a:off x="825500" y="5257800"/>
+            <a:ext cx="10858500" cy="300082"/>
+          </a:xfrm>
+          <a:prstGeom prst="rect">
+            <a:avLst/>
+          </a:prstGeom>
+          <a:noFill/>
+        </p:spPr>
+        <p:txBody>
+          <a:bodyPr vert="horz" wrap="square" tIns="38100" rtlCol="0">
+            <a:spAutoFit/>
+          </a:bodyPr>
+          <a:lstStyle/>
+          <a:p>
+            <a:r>
+              <a:rPr sz="1400" b="1" dirty="0">
+                <a:solidFill>
+                  <a:srgbClr val="1F5F87"/>
+                </a:solidFill>
+              </a:rPr>
+              <a:t>✔  Pull delivery:  </a:t>
+            </a:r>
+            <a:r>
+              <a:rPr sz="1400" dirty="0">
+                <a:solidFill>
+                  <a:srgbClr val="1F5F87"/>
+                </a:solidFill>
+              </a:rPr>
+              <a:t>streaming subscriptions let the app receive messages without an HTTP callback endpoint</a:t>
+            </a:r>
+            <a:endParaRPr lang="ru-RU" sz="1400" dirty="0">
+              <a:solidFill>
+                <a:schemeClr val="accent1"/>
+              </a:solidFill>
+            </a:endParaRPr>
+          </a:p>
+        </p:txBody>
+      </p:sp>
+      <p:sp>
+        <p:nvSpPr>
+          <p:cNvPr id="17" name="TextBox 16">
+            <a:extLst>
+              <a:ext uri="{FF2B5EF4-FFF2-40B4-BE49-F238E27FC236}">
+                <a16:creationId xmlns:a16="http://schemas.microsoft.com/office/drawing/2014/main" id="{E9D83418-D03D-82F3-4E53-3EEE21D2D25D}"/>
+              </a:ext>
+            </a:extLst>
+          </p:cNvPr>
+          <p:cNvSpPr txBox="1"/>
+          <p:nvPr/>
+        </p:nvSpPr>
+        <p:spPr>
+          <a:xfrm>
+            <a:off x="825500" y="5547254"/>
+            <a:ext cx="10858500" cy="300082"/>
+          </a:xfrm>
+          <a:prstGeom prst="rect">
+            <a:avLst/>
+          </a:prstGeom>
+          <a:noFill/>
+        </p:spPr>
+        <p:txBody>
+          <a:bodyPr vert="horz" wrap="square" tIns="38100" rtlCol="0">
+            <a:spAutoFit/>
+          </a:bodyPr>
+          <a:lstStyle/>
+          <a:p>
+            <a:r>
+              <a:rPr sz="1400" b="1" dirty="0">
+                <a:solidFill>
+                  <a:srgbClr val="1F5F87"/>
+                </a:solidFill>
+              </a:rPr>
+              <a:t>✔  Back-pressure control:  </a:t>
+            </a:r>
+            <a:r>
+              <a:rPr sz="1400" dirty="0">
+                <a:solidFill>
+                  <a:srgbClr val="1F5F87"/>
+                </a:solidFill>
+              </a:rPr>
+              <a:t>the subscriber requests work when ready instead of being pushed messages by </a:t>
+            </a:r>
+            <a:r>
+              <a:rPr sz="1400" dirty="0" err="1">
+                <a:solidFill>
+                  <a:srgbClr val="1F5F87"/>
+                </a:solidFill>
+              </a:rPr>
+              <a:t>Dapr</a:t>
+            </a:r>
+            <a:endParaRPr lang="ru-RU" sz="1400" dirty="0">
+              <a:solidFill>
+                <a:schemeClr val="accent1"/>
+              </a:solidFill>
+            </a:endParaRPr>
+          </a:p>
+        </p:txBody>
+      </p:sp>
+      <p:sp>
+        <p:nvSpPr>
+          <p:cNvPr id="18" name="TextBox 17">
+            <a:extLst>
+              <a:ext uri="{FF2B5EF4-FFF2-40B4-BE49-F238E27FC236}">
+                <a16:creationId xmlns:a16="http://schemas.microsoft.com/office/drawing/2014/main" id="{A06D81C4-279A-0CE2-CDE1-B590E5274252}"/>
+              </a:ext>
+            </a:extLst>
+          </p:cNvPr>
+          <p:cNvSpPr txBox="1"/>
+          <p:nvPr/>
+        </p:nvSpPr>
+        <p:spPr>
+          <a:xfrm>
+            <a:off x="831668" y="5841474"/>
+            <a:ext cx="10858500" cy="300082"/>
+          </a:xfrm>
+          <a:prstGeom prst="rect">
+            <a:avLst/>
+          </a:prstGeom>
+          <a:noFill/>
+        </p:spPr>
+        <p:txBody>
+          <a:bodyPr vert="horz" wrap="square" tIns="38100" rtlCol="0">
+            <a:spAutoFit/>
+          </a:bodyPr>
+          <a:lstStyle/>
+          <a:p>
+            <a:r>
+              <a:rPr sz="1400" b="1" dirty="0">
+                <a:solidFill>
+                  <a:srgbClr val="1F5F87"/>
+                </a:solidFill>
+              </a:rPr>
+              <a:t>✔  Broker portability:  </a:t>
+            </a:r>
+            <a:r>
+              <a:rPr sz="1400" dirty="0">
+                <a:solidFill>
+                  <a:srgbClr val="1F5F87"/>
+                </a:solidFill>
+              </a:rPr>
+              <a:t>no broker SDK in app code; switch brokers by updating the component YAML</a:t>
+            </a:r>
+            <a:endParaRPr lang="ru-RU" sz="1400" dirty="0">
+              <a:solidFill>
+                <a:schemeClr val="accent1"/>
               </a:solidFill>
             </a:endParaRPr>
           </a:p>
@@ -5701,7 +7726,7 @@
           <p:cNvPr id="11" name="Straight Connector 10">
             <a:extLst>
               <a:ext uri="{FF2B5EF4-FFF2-40B4-BE49-F238E27FC236}">
-                <a16:creationId xmlns:a16="http://schemas.microsoft.com/office/drawing/2014/main" id="{0A9F7713-6E6A-C399-A553-9945F1F59A88}"/>
+                <a16:creationId xmlns:a16="http://schemas.microsoft.com/office/drawing/2014/main" id="{7397447F-F551-A3D0-9696-25426AE82610}"/>
               </a:ext>
             </a:extLst>
           </p:cNvPr>
@@ -5709,8 +7734,8 @@
           <p:nvPr/>
         </p:nvCxnSpPr>
         <p:spPr>
-          <a:xfrm flipH="1">
-            <a:off x="5880100" y="4191000"/>
+          <a:xfrm>
+            <a:off x="6720114" y="3480962"/>
             <a:ext cx="635000" cy="0"/>
           </a:xfrm>
           <a:prstGeom prst="line">
@@ -5738,100 +7763,24 @@
           </a:fontRef>
         </p:style>
       </p:cxnSp>
-      <p:sp>
-        <p:nvSpPr>
-          <p:cNvPr id="12" name="Rectangle 11">
-            <a:extLst>
-              <a:ext uri="{FF2B5EF4-FFF2-40B4-BE49-F238E27FC236}">
-                <a16:creationId xmlns:a16="http://schemas.microsoft.com/office/drawing/2014/main" id="{7B79482C-6623-40A0-5300-8AED8E35DC82}"/>
-              </a:ext>
-            </a:extLst>
-          </p:cNvPr>
-          <p:cNvSpPr/>
-          <p:nvPr/>
-        </p:nvSpPr>
-        <p:spPr>
-          <a:xfrm>
-            <a:off x="3530600" y="3683000"/>
-            <a:ext cx="2349500" cy="1016000"/>
-          </a:xfrm>
-          <a:prstGeom prst="rect">
-            <a:avLst/>
-          </a:prstGeom>
-          <a:solidFill>
-            <a:srgbClr val="141E41"/>
-          </a:solidFill>
-          <a:ln w="19050">
-            <a:solidFill>
-              <a:srgbClr val="146DFF"/>
-            </a:solidFill>
-          </a:ln>
-        </p:spPr>
-        <p:style>
-          <a:lnRef idx="2">
-            <a:schemeClr val="accent1">
-              <a:shade val="15000"/>
-            </a:schemeClr>
-          </a:lnRef>
-          <a:fillRef idx="1">
-            <a:schemeClr val="accent1"/>
-          </a:fillRef>
-          <a:effectRef idx="0">
-            <a:schemeClr val="accent1"/>
-          </a:effectRef>
-          <a:fontRef idx="minor">
-            <a:schemeClr val="lt1"/>
-          </a:fontRef>
-        </p:style>
-        <p:txBody>
-          <a:bodyPr wrap="square" lIns="101600" tIns="76200" rIns="76200" rtlCol="0" anchor="ctr"/>
-          <a:lstStyle/>
-          <a:p>
-            <a:pPr algn="ctr"/>
-            <a:r>
-              <a:rPr lang="nb-NO" sz="1200" b="1">
-                <a:solidFill>
-                  <a:srgbClr val="FFFFFF"/>
-                </a:solidFill>
-              </a:rPr>
-              <a:t>POST /topic1</a:t>
-            </a:r>
-          </a:p>
-          <a:p>
-            <a:pPr algn="ctr"/>
-            <a:r>
-              <a:rPr lang="en-US" sz="1000">
-                <a:solidFill>
-                  <a:srgbClr val="DCE1EB"/>
-                </a:solidFill>
-              </a:rPr>
-              <a:t>Push delivery
-one message at a time</a:t>
-            </a:r>
-            <a:endParaRPr lang="ru-RU" sz="1000">
-              <a:solidFill>
-                <a:srgbClr val="DCE1EB"/>
-              </a:solidFill>
-            </a:endParaRPr>
-          </a:p>
-        </p:txBody>
-      </p:sp>
       <p:cxnSp>
         <p:nvCxnSpPr>
           <p:cNvPr id="13" name="Straight Connector 12">
             <a:extLst>
               <a:ext uri="{FF2B5EF4-FFF2-40B4-BE49-F238E27FC236}">
-                <a16:creationId xmlns:a16="http://schemas.microsoft.com/office/drawing/2014/main" id="{E446BB0D-EA7C-AA69-719E-A253A506ED0C}"/>
-              </a:ext>
-            </a:extLst>
-          </p:cNvPr>
-          <p:cNvCxnSpPr/>
+                <a16:creationId xmlns:a16="http://schemas.microsoft.com/office/drawing/2014/main" id="{19BF79E6-0A98-E154-85B6-ED1553DD4BDA}"/>
+              </a:ext>
+            </a:extLst>
+          </p:cNvPr>
+          <p:cNvCxnSpPr>
+            <a:cxnSpLocks/>
+          </p:cNvCxnSpPr>
           <p:nvPr/>
         </p:nvCxnSpPr>
         <p:spPr>
           <a:xfrm flipH="1">
-            <a:off x="2895600" y="4191000"/>
-            <a:ext cx="622300" cy="0"/>
+            <a:off x="3710214" y="3480962"/>
+            <a:ext cx="619760" cy="0"/>
           </a:xfrm>
           <a:prstGeom prst="line">
             <a:avLst/>
@@ -5860,10 +7809,10 @@
       </p:cxnSp>
       <p:sp>
         <p:nvSpPr>
-          <p:cNvPr id="14" name="Rectangle 13">
-            <a:extLst>
-              <a:ext uri="{FF2B5EF4-FFF2-40B4-BE49-F238E27FC236}">
-                <a16:creationId xmlns:a16="http://schemas.microsoft.com/office/drawing/2014/main" id="{D1FD30E2-A889-F6F7-F200-E8AF4E7CF87D}"/>
+          <p:cNvPr id="22" name="Flowchart: Magnetic Disk 21">
+            <a:extLst>
+              <a:ext uri="{FF2B5EF4-FFF2-40B4-BE49-F238E27FC236}">
+                <a16:creationId xmlns:a16="http://schemas.microsoft.com/office/drawing/2014/main" id="{5F224CD9-1872-7CF9-94AC-43C3C7117ADE}"/>
               </a:ext>
             </a:extLst>
           </p:cNvPr>
@@ -5872,20 +7821,12 @@
         </p:nvSpPr>
         <p:spPr>
           <a:xfrm>
-            <a:off x="660400" y="3683000"/>
-            <a:ext cx="2222500" cy="1016000"/>
+            <a:off x="1069703" y="3186718"/>
+            <a:ext cx="475343" cy="581367"/>
           </a:xfrm>
-          <a:prstGeom prst="rect">
+          <a:prstGeom prst="flowChartMagneticDisk">
             <a:avLst/>
           </a:prstGeom>
-          <a:solidFill>
-            <a:srgbClr val="141E41"/>
-          </a:solidFill>
-          <a:ln w="19050">
-            <a:solidFill>
-              <a:srgbClr val="146DFF"/>
-            </a:solidFill>
-          </a:ln>
         </p:spPr>
         <p:style>
           <a:lnRef idx="2">
@@ -5904,44 +7845,70 @@
           </a:fontRef>
         </p:style>
         <p:txBody>
-          <a:bodyPr wrap="square" lIns="101600" tIns="76200" rIns="76200" rtlCol="0" anchor="ctr"/>
+          <a:bodyPr rtlCol="0" anchor="ctr"/>
           <a:lstStyle/>
           <a:p>
             <a:pPr algn="ctr"/>
             <a:r>
-              <a:rPr lang="nb-NO" sz="1200" b="1">
-                <a:solidFill>
-                  <a:srgbClr val="FFFFFF"/>
-                </a:solidFill>
-              </a:rPr>
-              <a:t>MessageHandlerActor</a:t>
-            </a:r>
-          </a:p>
-          <a:p>
-            <a:pPr algn="ctr"/>
-            <a:r>
-              <a:rPr lang="en-US" sz="1000">
-                <a:solidFill>
-                  <a:srgbClr val="DCE1EB"/>
-                </a:solidFill>
-              </a:rPr>
-              <a:t>Dapr Virtual Actor
-resumes from Redis state</a:t>
-            </a:r>
-            <a:endParaRPr lang="ru-RU" sz="1000">
-              <a:solidFill>
-                <a:srgbClr val="DCE1EB"/>
-              </a:solidFill>
-            </a:endParaRPr>
-          </a:p>
-        </p:txBody>
-      </p:sp>
-      <p:sp>
-        <p:nvSpPr>
-          <p:cNvPr id="15" name="TextBox 14">
-            <a:extLst>
-              <a:ext uri="{FF2B5EF4-FFF2-40B4-BE49-F238E27FC236}">
-                <a16:creationId xmlns:a16="http://schemas.microsoft.com/office/drawing/2014/main" id="{5B4307C8-4AA5-CF9B-8BEC-D8201A857075}"/>
+              <a:rPr lang="en-US" sz="900" dirty="0"/>
+              <a:t>state</a:t>
+            </a:r>
+            <a:endParaRPr lang="ru-RU" sz="900" dirty="0"/>
+          </a:p>
+        </p:txBody>
+      </p:sp>
+      <p:cxnSp>
+        <p:nvCxnSpPr>
+          <p:cNvPr id="23" name="Straight Connector 22">
+            <a:extLst>
+              <a:ext uri="{FF2B5EF4-FFF2-40B4-BE49-F238E27FC236}">
+                <a16:creationId xmlns:a16="http://schemas.microsoft.com/office/drawing/2014/main" id="{82744A7F-EB7F-262C-94B2-E77626B5AF47}"/>
+              </a:ext>
+            </a:extLst>
+          </p:cNvPr>
+          <p:cNvCxnSpPr>
+            <a:cxnSpLocks/>
+            <a:stCxn id="14" idx="1"/>
+            <a:endCxn id="22" idx="4"/>
+          </p:cNvCxnSpPr>
+          <p:nvPr/>
+        </p:nvCxnSpPr>
+        <p:spPr>
+          <a:xfrm flipH="1" flipV="1">
+            <a:off x="1545046" y="3477402"/>
+            <a:ext cx="353422" cy="10092"/>
+          </a:xfrm>
+          <a:prstGeom prst="line">
+            <a:avLst/>
+          </a:prstGeom>
+          <a:ln w="25400">
+            <a:solidFill>
+              <a:srgbClr val="146DFF"/>
+            </a:solidFill>
+            <a:tailEnd type="arrow"/>
+          </a:ln>
+        </p:spPr>
+        <p:style>
+          <a:lnRef idx="2">
+            <a:schemeClr val="accent1"/>
+          </a:lnRef>
+          <a:fillRef idx="0">
+            <a:schemeClr val="accent1"/>
+          </a:fillRef>
+          <a:effectRef idx="1">
+            <a:schemeClr val="accent1"/>
+          </a:effectRef>
+          <a:fontRef idx="minor">
+            <a:schemeClr val="tx1"/>
+          </a:fontRef>
+        </p:style>
+      </p:cxnSp>
+      <p:sp>
+        <p:nvSpPr>
+          <p:cNvPr id="29" name="TextBox 28">
+            <a:extLst>
+              <a:ext uri="{FF2B5EF4-FFF2-40B4-BE49-F238E27FC236}">
+                <a16:creationId xmlns:a16="http://schemas.microsoft.com/office/drawing/2014/main" id="{C907F737-ED7B-B5E8-BF11-72428A558589}"/>
               </a:ext>
             </a:extLst>
           </p:cNvPr>
@@ -5950,8 +7917,8 @@
         </p:nvSpPr>
         <p:spPr>
           <a:xfrm>
-            <a:off x="660400" y="4927600"/>
-            <a:ext cx="10922000" cy="292388"/>
+            <a:off x="3527514" y="2647148"/>
+            <a:ext cx="1706336" cy="369332"/>
           </a:xfrm>
           <a:prstGeom prst="rect">
             <a:avLst/>
@@ -5959,33 +7926,109 @@
           <a:noFill/>
         </p:spPr>
         <p:txBody>
-          <a:bodyPr vert="horz" wrap="square" rtlCol="0">
+          <a:bodyPr wrap="square">
             <a:spAutoFit/>
           </a:bodyPr>
           <a:lstStyle/>
           <a:p>
             <a:r>
-              <a:rPr lang="nb-NO" sz="1300" b="1">
+              <a:rPr lang="nb-NO" sz="1800" b="1" dirty="0" err="1">
                 <a:solidFill>
                   <a:srgbClr val="FFFFFF"/>
                 </a:solidFill>
               </a:rPr>
-              <a:t>Key guarantees from Dapr:</a:t>
-            </a:r>
-            <a:endParaRPr lang="ru-RU" sz="1300" b="1">
-              <a:solidFill>
-                <a:srgbClr val="FFFFFF"/>
-              </a:solidFill>
-            </a:endParaRPr>
-          </a:p>
-        </p:txBody>
-      </p:sp>
-      <p:sp>
-        <p:nvSpPr>
-          <p:cNvPr id="16" name="TextBox 15">
-            <a:extLst>
-              <a:ext uri="{FF2B5EF4-FFF2-40B4-BE49-F238E27FC236}">
-                <a16:creationId xmlns:a16="http://schemas.microsoft.com/office/drawing/2014/main" id="{70C93CB8-8347-EA86-AF5A-913E36D05A6C}"/>
+              <a:t>Subscriber</a:t>
+            </a:r>
+            <a:r>
+              <a:rPr lang="nb-NO" sz="1800" b="1" dirty="0">
+                <a:solidFill>
+                  <a:srgbClr val="FFFFFF"/>
+                </a:solidFill>
+              </a:rPr>
+              <a:t> app</a:t>
+            </a:r>
+            <a:endParaRPr lang="ru-RU" dirty="0"/>
+          </a:p>
+        </p:txBody>
+      </p:sp>
+      <p:pic>
+        <p:nvPicPr>
+          <p:cNvPr id="40" name="Picture 39">
+            <a:extLst>
+              <a:ext uri="{FF2B5EF4-FFF2-40B4-BE49-F238E27FC236}">
+                <a16:creationId xmlns:a16="http://schemas.microsoft.com/office/drawing/2014/main" id="{41C78F43-5C28-ED31-E0BC-D0CF7CB9A625}"/>
+              </a:ext>
+            </a:extLst>
+          </p:cNvPr>
+          <p:cNvPicPr>
+            <a:picLocks noChangeAspect="1"/>
+          </p:cNvPicPr>
+          <p:nvPr/>
+        </p:nvPicPr>
+        <p:blipFill>
+          <a:blip r:embed="rId3">
+            <a:extLst>
+              <a:ext uri="{28A0092B-C50C-407E-A947-70E740481C1C}">
+                <a14:useLocalDpi xmlns:a14="http://schemas.microsoft.com/office/drawing/2010/main" val="0"/>
+              </a:ext>
+            </a:extLst>
+          </a:blip>
+          <a:stretch>
+            <a:fillRect/>
+          </a:stretch>
+        </p:blipFill>
+        <p:spPr>
+          <a:xfrm>
+            <a:off x="6223680" y="1300118"/>
+            <a:ext cx="483734" cy="483734"/>
+          </a:xfrm>
+          <a:prstGeom prst="rect">
+            <a:avLst/>
+          </a:prstGeom>
+        </p:spPr>
+      </p:pic>
+      <p:pic>
+        <p:nvPicPr>
+          <p:cNvPr id="41" name="Picture 40">
+            <a:extLst>
+              <a:ext uri="{FF2B5EF4-FFF2-40B4-BE49-F238E27FC236}">
+                <a16:creationId xmlns:a16="http://schemas.microsoft.com/office/drawing/2014/main" id="{5D23223C-62E8-FD19-6C41-2CC8C3046C48}"/>
+              </a:ext>
+            </a:extLst>
+          </p:cNvPr>
+          <p:cNvPicPr>
+            <a:picLocks noChangeAspect="1"/>
+          </p:cNvPicPr>
+          <p:nvPr/>
+        </p:nvPicPr>
+        <p:blipFill>
+          <a:blip r:embed="rId3">
+            <a:extLst>
+              <a:ext uri="{28A0092B-C50C-407E-A947-70E740481C1C}">
+                <a14:useLocalDpi xmlns:a14="http://schemas.microsoft.com/office/drawing/2010/main" val="0"/>
+              </a:ext>
+            </a:extLst>
+          </a:blip>
+          <a:stretch>
+            <a:fillRect/>
+          </a:stretch>
+        </p:blipFill>
+        <p:spPr>
+          <a:xfrm>
+            <a:off x="9518058" y="3016480"/>
+            <a:ext cx="483734" cy="483734"/>
+          </a:xfrm>
+          <a:prstGeom prst="rect">
+            <a:avLst/>
+          </a:prstGeom>
+        </p:spPr>
+      </p:pic>
+      <p:sp>
+        <p:nvSpPr>
+          <p:cNvPr id="42" name="TextBox 41">
+            <a:extLst>
+              <a:ext uri="{FF2B5EF4-FFF2-40B4-BE49-F238E27FC236}">
+                <a16:creationId xmlns:a16="http://schemas.microsoft.com/office/drawing/2014/main" id="{7A50093C-F1FD-699F-5654-94C9C03AC2D6}"/>
               </a:ext>
             </a:extLst>
           </p:cNvPr>
@@ -5994,8 +8037,8 @@
         </p:nvSpPr>
         <p:spPr>
           <a:xfrm>
-            <a:off x="825500" y="5257800"/>
-            <a:ext cx="10858500" cy="269304"/>
+            <a:off x="825500" y="6135694"/>
+            <a:ext cx="10858500" cy="300082"/>
           </a:xfrm>
           <a:prstGeom prst="rect">
             <a:avLst/>
@@ -6009,24 +8052,40 @@
           <a:lstStyle/>
           <a:p>
             <a:r>
-              <a:rPr lang="nb-NO" sz="1200" b="1">
-                <a:solidFill>
-                  <a:srgbClr val="00C878"/>
-                </a:solidFill>
-              </a:rPr>
-              <a:t>✔  Ordered delivery:  </a:t>
-            </a:r>
-            <a:r>
-              <a:rPr lang="en-US" sz="1200">
-                <a:solidFill>
-                  <a:srgbClr val="DCE1EB"/>
-                </a:solidFill>
-              </a:rPr>
-              <a:t>requireSessions=true — sidecar locks each session; next message only delivered after the previous ACK</a:t>
-            </a:r>
-            <a:endParaRPr lang="ru-RU" sz="1200">
+              <a:rPr sz="1400" b="1" dirty="0">
+                <a:solidFill>
+                  <a:srgbClr val="1F5F87"/>
+                </a:solidFill>
+              </a:rPr>
+              <a:t>✔  </a:t>
+            </a:r>
+            <a:r>
+              <a:rPr lang="en-US" sz="1400" b="1" dirty="0">
+                <a:solidFill>
+                  <a:srgbClr val="1F5F87"/>
+                </a:solidFill>
+              </a:rPr>
+              <a:t>Crash resiliency</a:t>
+            </a:r>
+            <a:r>
+              <a:rPr sz="1400" b="1" dirty="0">
+                <a:solidFill>
+                  <a:srgbClr val="1F5F87"/>
+                </a:solidFill>
+              </a:rPr>
+              <a:t>:  </a:t>
+            </a:r>
+            <a:r>
+              <a:rPr lang="en-US" sz="1400" dirty="0">
+                <a:solidFill>
+                  <a:srgbClr val="1F5F87"/>
+                </a:solidFill>
+              </a:rPr>
+              <a:t>messages may be redelivered if delivery or processing fails</a:t>
+            </a:r>
+            <a:endParaRPr lang="ru-RU" sz="1400" dirty="0">
               <a:solidFill>
-                <a:srgbClr val="DCE1EB"/>
+                <a:schemeClr val="accent1"/>
               </a:solidFill>
             </a:endParaRPr>
           </a:p>
@@ -6034,10 +8093,10 @@
       </p:sp>
       <p:sp>
         <p:nvSpPr>
-          <p:cNvPr id="17" name="TextBox 16">
-            <a:extLst>
-              <a:ext uri="{FF2B5EF4-FFF2-40B4-BE49-F238E27FC236}">
-                <a16:creationId xmlns:a16="http://schemas.microsoft.com/office/drawing/2014/main" id="{E9D83418-D03D-82F3-4E53-3EEE21D2D25D}"/>
+          <p:cNvPr id="44" name="TextBox 43">
+            <a:extLst>
+              <a:ext uri="{FF2B5EF4-FFF2-40B4-BE49-F238E27FC236}">
+                <a16:creationId xmlns:a16="http://schemas.microsoft.com/office/drawing/2014/main" id="{263FD5BD-01DB-6C46-D375-EF1759135C09}"/>
               </a:ext>
             </a:extLst>
           </p:cNvPr>
@@ -6046,8 +8105,8 @@
         </p:nvSpPr>
         <p:spPr>
           <a:xfrm>
-            <a:off x="825500" y="5638800"/>
-            <a:ext cx="10858500" cy="269304"/>
+            <a:off x="2016578" y="963609"/>
+            <a:ext cx="1706336" cy="369332"/>
           </a:xfrm>
           <a:prstGeom prst="rect">
             <a:avLst/>
@@ -6055,87 +8114,59 @@
           <a:noFill/>
         </p:spPr>
         <p:txBody>
-          <a:bodyPr vert="horz" wrap="square" tIns="38100" rtlCol="0">
+          <a:bodyPr wrap="square">
             <a:spAutoFit/>
           </a:bodyPr>
           <a:lstStyle/>
           <a:p>
             <a:r>
-              <a:rPr lang="nb-NO" sz="1200" b="1">
-                <a:solidFill>
-                  <a:srgbClr val="00C878"/>
-                </a:solidFill>
-              </a:rPr>
-              <a:t>✔  Crash resiliency:  </a:t>
-            </a:r>
-            <a:r>
-              <a:rPr lang="en-US" sz="1200">
-                <a:solidFill>
-                  <a:srgbClr val="DCE1EB"/>
-                </a:solidFill>
-              </a:rPr>
-              <a:t>Actor saves progress to Redis on crash; Dapr retries the actor, which resumes from the last checkpoint</a:t>
-            </a:r>
-            <a:endParaRPr lang="ru-RU" sz="1200">
-              <a:solidFill>
-                <a:srgbClr val="DCE1EB"/>
-              </a:solidFill>
-            </a:endParaRPr>
-          </a:p>
-        </p:txBody>
-      </p:sp>
-      <p:sp>
-        <p:nvSpPr>
-          <p:cNvPr id="18" name="TextBox 17">
-            <a:extLst>
-              <a:ext uri="{FF2B5EF4-FFF2-40B4-BE49-F238E27FC236}">
-                <a16:creationId xmlns:a16="http://schemas.microsoft.com/office/drawing/2014/main" id="{A06D81C4-279A-0CE2-CDE1-B590E5274252}"/>
-              </a:ext>
-            </a:extLst>
-          </p:cNvPr>
-          <p:cNvSpPr txBox="1"/>
+              <a:rPr lang="nb-NO" sz="1800" b="1" dirty="0">
+                <a:solidFill>
+                  <a:srgbClr val="FFFFFF"/>
+                </a:solidFill>
+              </a:rPr>
+              <a:t>Publisher app</a:t>
+            </a:r>
+            <a:endParaRPr lang="ru-RU" dirty="0"/>
+          </a:p>
+        </p:txBody>
+      </p:sp>
+      <p:pic>
+        <p:nvPicPr>
+          <p:cNvPr id="46" name="Picture 45">
+            <a:extLst>
+              <a:ext uri="{FF2B5EF4-FFF2-40B4-BE49-F238E27FC236}">
+                <a16:creationId xmlns:a16="http://schemas.microsoft.com/office/drawing/2014/main" id="{174161F9-335A-1B0E-5F1B-14F2065827F4}"/>
+              </a:ext>
+            </a:extLst>
+          </p:cNvPr>
+          <p:cNvPicPr>
+            <a:picLocks noChangeAspect="1"/>
+          </p:cNvPicPr>
           <p:nvPr/>
-        </p:nvSpPr>
+        </p:nvPicPr>
+        <p:blipFill>
+          <a:blip r:embed="rId4">
+            <a:extLst>
+              <a:ext uri="{28A0092B-C50C-407E-A947-70E740481C1C}">
+                <a14:useLocalDpi xmlns:a14="http://schemas.microsoft.com/office/drawing/2010/main" val="0"/>
+              </a:ext>
+            </a:extLst>
+          </a:blip>
+          <a:stretch>
+            <a:fillRect/>
+          </a:stretch>
+        </p:blipFill>
         <p:spPr>
           <a:xfrm>
-            <a:off x="825500" y="6019800"/>
-            <a:ext cx="10858500" cy="269304"/>
+            <a:off x="9363455" y="1250896"/>
+            <a:ext cx="668819" cy="668819"/>
           </a:xfrm>
           <a:prstGeom prst="rect">
             <a:avLst/>
           </a:prstGeom>
-          <a:noFill/>
         </p:spPr>
-        <p:txBody>
-          <a:bodyPr vert="horz" wrap="square" tIns="38100" rtlCol="0">
-            <a:spAutoFit/>
-          </a:bodyPr>
-          <a:lstStyle/>
-          <a:p>
-            <a:r>
-              <a:rPr lang="nb-NO" sz="1200" b="1">
-                <a:solidFill>
-                  <a:srgbClr val="00C878"/>
-                </a:solidFill>
-              </a:rPr>
-              <a:t>✔  Zero broker code:  </a:t>
-            </a:r>
-            <a:r>
-              <a:rPr lang="en-US" sz="1200">
-                <a:solidFill>
-                  <a:srgbClr val="DCE1EB"/>
-                </a:solidFill>
-              </a:rPr>
-              <a:t>No Azure SDK import in Publisher or Subscriber — swap the broker by editing component YAML, not code</a:t>
-            </a:r>
-            <a:endParaRPr lang="ru-RU" sz="1200">
-              <a:solidFill>
-                <a:srgbClr val="DCE1EB"/>
-              </a:solidFill>
-            </a:endParaRPr>
-          </a:p>
-        </p:txBody>
-      </p:sp>
+      </p:pic>
     </p:spTree>
     <p:extLst>
       <p:ext uri="{BB962C8B-B14F-4D97-AF65-F5344CB8AC3E}">
@@ -6144,15 +8175,15 @@
     </p:extLst>
   </p:cSld>
   <p:clrMapOvr>
-    <a:masterClrMapping/>
+    <a:overrideClrMapping bg1="dk1" tx1="lt1" bg2="dk2" tx2="lt2" accent1="accent1" accent2="accent2" accent3="accent3" accent4="accent4" accent5="accent5" accent6="accent6" hlink="hlink" folHlink="folHlink"/>
   </p:clrMapOvr>
 </p:sld>
 </file>
 
 <file path=ppt/theme/theme1.xml><?xml version="1.0" encoding="utf-8"?>
-<a:theme xmlns:a="http://schemas.openxmlformats.org/drawingml/2006/main" name="Office Theme">
+<a:theme xmlns:a="http://schemas.openxmlformats.org/drawingml/2006/main" name="Presento-Theme">
   <a:themeElements>
-    <a:clrScheme name="Office">
+    <a:clrScheme name="Office 2013 - 2022">
       <a:dk1>
         <a:sysClr val="windowText" lastClr="000000"/>
       </a:dk1>
@@ -6160,39 +8191,39 @@
         <a:sysClr val="window" lastClr="FFFFFF"/>
       </a:lt1>
       <a:dk2>
-        <a:srgbClr val="0E2841"/>
+        <a:srgbClr val="44546A"/>
       </a:dk2>
       <a:lt2>
-        <a:srgbClr val="E8E8E8"/>
+        <a:srgbClr val="E7E6E6"/>
       </a:lt2>
       <a:accent1>
-        <a:srgbClr val="156082"/>
+        <a:srgbClr val="4472C4"/>
       </a:accent1>
       <a:accent2>
-        <a:srgbClr val="E97132"/>
+        <a:srgbClr val="ED7D31"/>
       </a:accent2>
       <a:accent3>
-        <a:srgbClr val="196B24"/>
+        <a:srgbClr val="A5A5A5"/>
       </a:accent3>
       <a:accent4>
-        <a:srgbClr val="0F9ED5"/>
+        <a:srgbClr val="FFC000"/>
       </a:accent4>
       <a:accent5>
-        <a:srgbClr val="A02B93"/>
+        <a:srgbClr val="5B9BD5"/>
       </a:accent5>
       <a:accent6>
-        <a:srgbClr val="4EA72E"/>
+        <a:srgbClr val="70AD47"/>
       </a:accent6>
       <a:hlink>
-        <a:srgbClr val="467886"/>
+        <a:srgbClr val="0563C1"/>
       </a:hlink>
       <a:folHlink>
-        <a:srgbClr val="96607D"/>
+        <a:srgbClr val="954F72"/>
       </a:folHlink>
     </a:clrScheme>
-    <a:fontScheme name="Office">
+    <a:fontScheme name="Office 2013 - 2022">
       <a:majorFont>
-        <a:latin typeface="Aptos Display" panose="02110004020202020204"/>
+        <a:latin typeface="Calibri Light" panose="020F0302020204030204"/>
         <a:ea typeface=""/>
         <a:cs typeface=""/>
         <a:font script="Jpan" typeface="游ゴシック Light"/>
@@ -6244,7 +8275,7 @@
         <a:font script="Tfng" typeface="Ebrima"/>
       </a:majorFont>
       <a:minorFont>
-        <a:latin typeface="Aptos" panose="02110004020202020204"/>
+        <a:latin typeface="Calibri" panose="020F0502020204030204"/>
         <a:ea typeface=""/>
         <a:cs typeface=""/>
         <a:font script="Jpan" typeface="游ゴシック"/>
@@ -6458,8 +8489,223 @@
   <a:extraClrSchemeLst/>
   <a:extLst>
     <a:ext uri="{05A4C25C-085E-4340-85A3-A5531E510DB2}">
-      <thm15:themeFamily xmlns:thm15="http://schemas.microsoft.com/office/thememl/2012/main" name="Office Theme" id="{2E142A2C-CD16-42D6-873A-C26D2A0506FA}" vid="{1BDDFF52-6CD6-40A5-AB3C-68EB2F1E4D0A}"/>
+      <thm15:themeFamily xmlns:thm15="http://schemas.microsoft.com/office/thememl/2012/main" name="Presento-Theme" id="{A9E807D7-4FFB-4479-BBCD-71214898ADBA}" vid="{A6C7F493-EAF3-460E-9A27-C3830BC5E02B}"/>
     </a:ext>
   </a:extLst>
 </a:theme>
+</file>
+
+<file path=ppt/theme/themeOverride1.xml><?xml version="1.0" encoding="utf-8"?>
+<a:themeOverride xmlns:a="http://schemas.openxmlformats.org/drawingml/2006/main">
+  <a:clrScheme name="Office 2013 - 2022">
+    <a:dk1>
+      <a:sysClr val="windowText" lastClr="000000"/>
+    </a:dk1>
+    <a:lt1>
+      <a:sysClr val="window" lastClr="FFFFFF"/>
+    </a:lt1>
+    <a:dk2>
+      <a:srgbClr val="44546A"/>
+    </a:dk2>
+    <a:lt2>
+      <a:srgbClr val="E7E6E6"/>
+    </a:lt2>
+    <a:accent1>
+      <a:srgbClr val="4472C4"/>
+    </a:accent1>
+    <a:accent2>
+      <a:srgbClr val="ED7D31"/>
+    </a:accent2>
+    <a:accent3>
+      <a:srgbClr val="A5A5A5"/>
+    </a:accent3>
+    <a:accent4>
+      <a:srgbClr val="FFC000"/>
+    </a:accent4>
+    <a:accent5>
+      <a:srgbClr val="5B9BD5"/>
+    </a:accent5>
+    <a:accent6>
+      <a:srgbClr val="70AD47"/>
+    </a:accent6>
+    <a:hlink>
+      <a:srgbClr val="0563C1"/>
+    </a:hlink>
+    <a:folHlink>
+      <a:srgbClr val="954F72"/>
+    </a:folHlink>
+  </a:clrScheme>
+</a:themeOverride>
+</file>
+
+<file path=ppt/theme/themeOverride2.xml><?xml version="1.0" encoding="utf-8"?>
+<a:themeOverride xmlns:a="http://schemas.openxmlformats.org/drawingml/2006/main">
+  <a:clrScheme name="Office 2013 - 2022">
+    <a:dk1>
+      <a:sysClr val="windowText" lastClr="000000"/>
+    </a:dk1>
+    <a:lt1>
+      <a:sysClr val="window" lastClr="FFFFFF"/>
+    </a:lt1>
+    <a:dk2>
+      <a:srgbClr val="44546A"/>
+    </a:dk2>
+    <a:lt2>
+      <a:srgbClr val="E7E6E6"/>
+    </a:lt2>
+    <a:accent1>
+      <a:srgbClr val="4472C4"/>
+    </a:accent1>
+    <a:accent2>
+      <a:srgbClr val="ED7D31"/>
+    </a:accent2>
+    <a:accent3>
+      <a:srgbClr val="A5A5A5"/>
+    </a:accent3>
+    <a:accent4>
+      <a:srgbClr val="FFC000"/>
+    </a:accent4>
+    <a:accent5>
+      <a:srgbClr val="5B9BD5"/>
+    </a:accent5>
+    <a:accent6>
+      <a:srgbClr val="70AD47"/>
+    </a:accent6>
+    <a:hlink>
+      <a:srgbClr val="0563C1"/>
+    </a:hlink>
+    <a:folHlink>
+      <a:srgbClr val="954F72"/>
+    </a:folHlink>
+  </a:clrScheme>
+</a:themeOverride>
+</file>
+
+<file path=ppt/theme/themeOverride3.xml><?xml version="1.0" encoding="utf-8"?>
+<a:themeOverride xmlns:a="http://schemas.openxmlformats.org/drawingml/2006/main">
+  <a:clrScheme name="Office 2013 - 2022">
+    <a:dk1>
+      <a:sysClr val="windowText" lastClr="000000"/>
+    </a:dk1>
+    <a:lt1>
+      <a:sysClr val="window" lastClr="FFFFFF"/>
+    </a:lt1>
+    <a:dk2>
+      <a:srgbClr val="44546A"/>
+    </a:dk2>
+    <a:lt2>
+      <a:srgbClr val="E7E6E6"/>
+    </a:lt2>
+    <a:accent1>
+      <a:srgbClr val="4472C4"/>
+    </a:accent1>
+    <a:accent2>
+      <a:srgbClr val="ED7D31"/>
+    </a:accent2>
+    <a:accent3>
+      <a:srgbClr val="A5A5A5"/>
+    </a:accent3>
+    <a:accent4>
+      <a:srgbClr val="FFC000"/>
+    </a:accent4>
+    <a:accent5>
+      <a:srgbClr val="5B9BD5"/>
+    </a:accent5>
+    <a:accent6>
+      <a:srgbClr val="70AD47"/>
+    </a:accent6>
+    <a:hlink>
+      <a:srgbClr val="0563C1"/>
+    </a:hlink>
+    <a:folHlink>
+      <a:srgbClr val="954F72"/>
+    </a:folHlink>
+  </a:clrScheme>
+</a:themeOverride>
+</file>
+
+<file path=ppt/theme/themeOverride4.xml><?xml version="1.0" encoding="utf-8"?>
+<a:themeOverride xmlns:a="http://schemas.openxmlformats.org/drawingml/2006/main">
+  <a:clrScheme name="Office 2013 - 2022">
+    <a:dk1>
+      <a:sysClr val="windowText" lastClr="000000"/>
+    </a:dk1>
+    <a:lt1>
+      <a:sysClr val="window" lastClr="FFFFFF"/>
+    </a:lt1>
+    <a:dk2>
+      <a:srgbClr val="44546A"/>
+    </a:dk2>
+    <a:lt2>
+      <a:srgbClr val="E7E6E6"/>
+    </a:lt2>
+    <a:accent1>
+      <a:srgbClr val="4472C4"/>
+    </a:accent1>
+    <a:accent2>
+      <a:srgbClr val="ED7D31"/>
+    </a:accent2>
+    <a:accent3>
+      <a:srgbClr val="A5A5A5"/>
+    </a:accent3>
+    <a:accent4>
+      <a:srgbClr val="FFC000"/>
+    </a:accent4>
+    <a:accent5>
+      <a:srgbClr val="5B9BD5"/>
+    </a:accent5>
+    <a:accent6>
+      <a:srgbClr val="70AD47"/>
+    </a:accent6>
+    <a:hlink>
+      <a:srgbClr val="0563C1"/>
+    </a:hlink>
+    <a:folHlink>
+      <a:srgbClr val="954F72"/>
+    </a:folHlink>
+  </a:clrScheme>
+</a:themeOverride>
+</file>
+
+<file path=ppt/theme/themeOverride5.xml><?xml version="1.0" encoding="utf-8"?>
+<a:themeOverride xmlns:a="http://schemas.openxmlformats.org/drawingml/2006/main">
+  <a:clrScheme name="Office 2013 - 2022">
+    <a:dk1>
+      <a:sysClr val="windowText" lastClr="000000"/>
+    </a:dk1>
+    <a:lt1>
+      <a:sysClr val="window" lastClr="FFFFFF"/>
+    </a:lt1>
+    <a:dk2>
+      <a:srgbClr val="44546A"/>
+    </a:dk2>
+    <a:lt2>
+      <a:srgbClr val="E7E6E6"/>
+    </a:lt2>
+    <a:accent1>
+      <a:srgbClr val="4472C4"/>
+    </a:accent1>
+    <a:accent2>
+      <a:srgbClr val="ED7D31"/>
+    </a:accent2>
+    <a:accent3>
+      <a:srgbClr val="A5A5A5"/>
+    </a:accent3>
+    <a:accent4>
+      <a:srgbClr val="FFC000"/>
+    </a:accent4>
+    <a:accent5>
+      <a:srgbClr val="5B9BD5"/>
+    </a:accent5>
+    <a:accent6>
+      <a:srgbClr val="70AD47"/>
+    </a:accent6>
+    <a:hlink>
+      <a:srgbClr val="0563C1"/>
+    </a:hlink>
+    <a:folHlink>
+      <a:srgbClr val="954F72"/>
+    </a:folHlink>
+  </a:clrScheme>
+</a:themeOverride>
 </file>
--- a/DaprPubSub.pptx
+++ b/DaprPubSub.pptx
@@ -265,7 +265,7 @@
           <a:p>
             <a:fld id="{B6D52F77-0D3B-4F4D-AC78-E22ADE9B6A56}" type="datetimeFigureOut">
               <a:rPr lang="ru-RU" smtClean="0"/>
-              <a:t>08.04.2026</a:t>
+              <a:t>10.04.2026</a:t>
             </a:fld>
             <a:endParaRPr lang="ru-RU"/>
           </a:p>
@@ -465,7 +465,7 @@
           <a:p>
             <a:fld id="{B6D52F77-0D3B-4F4D-AC78-E22ADE9B6A56}" type="datetimeFigureOut">
               <a:rPr lang="ru-RU" smtClean="0"/>
-              <a:t>08.04.2026</a:t>
+              <a:t>10.04.2026</a:t>
             </a:fld>
             <a:endParaRPr lang="ru-RU"/>
           </a:p>
@@ -675,7 +675,7 @@
           <a:p>
             <a:fld id="{B6D52F77-0D3B-4F4D-AC78-E22ADE9B6A56}" type="datetimeFigureOut">
               <a:rPr lang="ru-RU" smtClean="0"/>
-              <a:t>08.04.2026</a:t>
+              <a:t>10.04.2026</a:t>
             </a:fld>
             <a:endParaRPr lang="ru-RU"/>
           </a:p>
@@ -910,7 +910,7 @@
           <a:p>
             <a:fld id="{B6D52F77-0D3B-4F4D-AC78-E22ADE9B6A56}" type="datetimeFigureOut">
               <a:rPr lang="ru-RU" smtClean="0"/>
-              <a:t>08.04.2026</a:t>
+              <a:t>10.04.2026</a:t>
             </a:fld>
             <a:endParaRPr lang="ru-RU"/>
           </a:p>
@@ -1186,7 +1186,7 @@
           <a:p>
             <a:fld id="{B6D52F77-0D3B-4F4D-AC78-E22ADE9B6A56}" type="datetimeFigureOut">
               <a:rPr lang="ru-RU" smtClean="0"/>
-              <a:t>08.04.2026</a:t>
+              <a:t>10.04.2026</a:t>
             </a:fld>
             <a:endParaRPr lang="ru-RU"/>
           </a:p>
@@ -1454,7 +1454,7 @@
           <a:p>
             <a:fld id="{B6D52F77-0D3B-4F4D-AC78-E22ADE9B6A56}" type="datetimeFigureOut">
               <a:rPr lang="ru-RU" smtClean="0"/>
-              <a:t>08.04.2026</a:t>
+              <a:t>10.04.2026</a:t>
             </a:fld>
             <a:endParaRPr lang="ru-RU"/>
           </a:p>
@@ -1869,7 +1869,7 @@
           <a:p>
             <a:fld id="{B6D52F77-0D3B-4F4D-AC78-E22ADE9B6A56}" type="datetimeFigureOut">
               <a:rPr lang="ru-RU" smtClean="0"/>
-              <a:t>08.04.2026</a:t>
+              <a:t>10.04.2026</a:t>
             </a:fld>
             <a:endParaRPr lang="ru-RU"/>
           </a:p>
@@ -2011,7 +2011,7 @@
           <a:p>
             <a:fld id="{B6D52F77-0D3B-4F4D-AC78-E22ADE9B6A56}" type="datetimeFigureOut">
               <a:rPr lang="ru-RU" smtClean="0"/>
-              <a:t>08.04.2026</a:t>
+              <a:t>10.04.2026</a:t>
             </a:fld>
             <a:endParaRPr lang="ru-RU"/>
           </a:p>
@@ -2124,7 +2124,7 @@
           <a:p>
             <a:fld id="{B6D52F77-0D3B-4F4D-AC78-E22ADE9B6A56}" type="datetimeFigureOut">
               <a:rPr lang="ru-RU" smtClean="0"/>
-              <a:t>08.04.2026</a:t>
+              <a:t>10.04.2026</a:t>
             </a:fld>
             <a:endParaRPr lang="ru-RU"/>
           </a:p>
@@ -2437,7 +2437,7 @@
           <a:p>
             <a:fld id="{B6D52F77-0D3B-4F4D-AC78-E22ADE9B6A56}" type="datetimeFigureOut">
               <a:rPr lang="ru-RU" smtClean="0"/>
-              <a:t>08.04.2026</a:t>
+              <a:t>10.04.2026</a:t>
             </a:fld>
             <a:endParaRPr lang="ru-RU"/>
           </a:p>
@@ -2730,7 +2730,7 @@
           <a:p>
             <a:fld id="{B6D52F77-0D3B-4F4D-AC78-E22ADE9B6A56}" type="datetimeFigureOut">
               <a:rPr lang="ru-RU" smtClean="0"/>
-              <a:t>08.04.2026</a:t>
+              <a:t>10.04.2026</a:t>
             </a:fld>
             <a:endParaRPr lang="ru-RU"/>
           </a:p>
@@ -2973,7 +2973,7 @@
           <a:p>
             <a:fld id="{B6D52F77-0D3B-4F4D-AC78-E22ADE9B6A56}" type="datetimeFigureOut">
               <a:rPr lang="ru-RU" smtClean="0"/>
-              <a:t>08.04.2026</a:t>
+              <a:t>10.04.2026</a:t>
             </a:fld>
             <a:endParaRPr lang="ru-RU"/>
           </a:p>
@@ -4632,6 +4632,684 @@
   <p:clrMapOvr>
     <a:overrideClrMapping bg1="dk1" tx1="lt1" bg2="dk2" tx2="lt2" accent1="accent1" accent2="accent2" accent3="accent3" accent4="accent4" accent5="accent5" accent6="accent6" hlink="hlink" folHlink="folHlink"/>
   </p:clrMapOvr>
+  <p:timing>
+    <p:tnLst>
+      <p:par>
+        <p:cTn id="1" dur="indefinite" restart="never" nodeType="tmRoot">
+          <p:childTnLst>
+            <p:seq concurrent="1" nextAc="seek">
+              <p:cTn id="2" dur="indefinite" nodeType="mainSeq">
+                <p:childTnLst>
+                  <p:par>
+                    <p:cTn id="3" fill="hold">
+                      <p:stCondLst>
+                        <p:cond delay="indefinite"/>
+                      </p:stCondLst>
+                      <p:childTnLst>
+                        <p:par>
+                          <p:cTn id="4" fill="hold">
+                            <p:stCondLst>
+                              <p:cond delay="0"/>
+                            </p:stCondLst>
+                            <p:childTnLst>
+                              <p:par>
+                                <p:cTn id="5" presetID="1" presetClass="entr" presetSubtype="0" fill="hold" nodeType="clickEffect">
+                                  <p:stCondLst>
+                                    <p:cond delay="0"/>
+                                  </p:stCondLst>
+                                  <p:childTnLst>
+                                    <p:set>
+                                      <p:cBhvr>
+                                        <p:cTn id="6" dur="1" fill="hold">
+                                          <p:stCondLst>
+                                            <p:cond delay="0"/>
+                                          </p:stCondLst>
+                                        </p:cTn>
+                                        <p:tgtEl>
+                                          <p:spTgt spid="3">
+                                            <p:txEl>
+                                              <p:pRg st="0" end="0"/>
+                                            </p:txEl>
+                                          </p:spTgt>
+                                        </p:tgtEl>
+                                        <p:attrNameLst>
+                                          <p:attrName>style.visibility</p:attrName>
+                                        </p:attrNameLst>
+                                      </p:cBhvr>
+                                      <p:to>
+                                        <p:strVal val="visible"/>
+                                      </p:to>
+                                    </p:set>
+                                  </p:childTnLst>
+                                </p:cTn>
+                              </p:par>
+                              <p:par>
+                                <p:cTn id="7" presetID="1" presetClass="entr" presetSubtype="0" fill="hold" nodeType="withEffect">
+                                  <p:stCondLst>
+                                    <p:cond delay="0"/>
+                                  </p:stCondLst>
+                                  <p:childTnLst>
+                                    <p:set>
+                                      <p:cBhvr>
+                                        <p:cTn id="8" dur="1" fill="hold">
+                                          <p:stCondLst>
+                                            <p:cond delay="0"/>
+                                          </p:stCondLst>
+                                        </p:cTn>
+                                        <p:tgtEl>
+                                          <p:spTgt spid="3">
+                                            <p:txEl>
+                                              <p:pRg st="1" end="1"/>
+                                            </p:txEl>
+                                          </p:spTgt>
+                                        </p:tgtEl>
+                                        <p:attrNameLst>
+                                          <p:attrName>style.visibility</p:attrName>
+                                        </p:attrNameLst>
+                                      </p:cBhvr>
+                                      <p:to>
+                                        <p:strVal val="visible"/>
+                                      </p:to>
+                                    </p:set>
+                                  </p:childTnLst>
+                                </p:cTn>
+                              </p:par>
+                            </p:childTnLst>
+                          </p:cTn>
+                        </p:par>
+                      </p:childTnLst>
+                    </p:cTn>
+                  </p:par>
+                  <p:par>
+                    <p:cTn id="9" fill="hold">
+                      <p:stCondLst>
+                        <p:cond delay="indefinite"/>
+                      </p:stCondLst>
+                      <p:childTnLst>
+                        <p:par>
+                          <p:cTn id="10" fill="hold">
+                            <p:stCondLst>
+                              <p:cond delay="0"/>
+                            </p:stCondLst>
+                            <p:childTnLst>
+                              <p:par>
+                                <p:cTn id="11" presetID="1" presetClass="entr" presetSubtype="0" fill="hold" nodeType="clickEffect">
+                                  <p:stCondLst>
+                                    <p:cond delay="0"/>
+                                  </p:stCondLst>
+                                  <p:childTnLst>
+                                    <p:set>
+                                      <p:cBhvr>
+                                        <p:cTn id="12" dur="1" fill="hold">
+                                          <p:stCondLst>
+                                            <p:cond delay="0"/>
+                                          </p:stCondLst>
+                                        </p:cTn>
+                                        <p:tgtEl>
+                                          <p:spTgt spid="3">
+                                            <p:txEl>
+                                              <p:pRg st="3" end="3"/>
+                                            </p:txEl>
+                                          </p:spTgt>
+                                        </p:tgtEl>
+                                        <p:attrNameLst>
+                                          <p:attrName>style.visibility</p:attrName>
+                                        </p:attrNameLst>
+                                      </p:cBhvr>
+                                      <p:to>
+                                        <p:strVal val="visible"/>
+                                      </p:to>
+                                    </p:set>
+                                  </p:childTnLst>
+                                </p:cTn>
+                              </p:par>
+                              <p:par>
+                                <p:cTn id="13" presetID="1" presetClass="entr" presetSubtype="0" fill="hold" nodeType="withEffect">
+                                  <p:stCondLst>
+                                    <p:cond delay="0"/>
+                                  </p:stCondLst>
+                                  <p:childTnLst>
+                                    <p:set>
+                                      <p:cBhvr>
+                                        <p:cTn id="14" dur="1" fill="hold">
+                                          <p:stCondLst>
+                                            <p:cond delay="0"/>
+                                          </p:stCondLst>
+                                        </p:cTn>
+                                        <p:tgtEl>
+                                          <p:spTgt spid="3">
+                                            <p:txEl>
+                                              <p:pRg st="4" end="4"/>
+                                            </p:txEl>
+                                          </p:spTgt>
+                                        </p:tgtEl>
+                                        <p:attrNameLst>
+                                          <p:attrName>style.visibility</p:attrName>
+                                        </p:attrNameLst>
+                                      </p:cBhvr>
+                                      <p:to>
+                                        <p:strVal val="visible"/>
+                                      </p:to>
+                                    </p:set>
+                                  </p:childTnLst>
+                                </p:cTn>
+                              </p:par>
+                              <p:par>
+                                <p:cTn id="15" presetID="1" presetClass="entr" presetSubtype="0" fill="hold" nodeType="withEffect">
+                                  <p:stCondLst>
+                                    <p:cond delay="0"/>
+                                  </p:stCondLst>
+                                  <p:childTnLst>
+                                    <p:set>
+                                      <p:cBhvr>
+                                        <p:cTn id="16" dur="1" fill="hold">
+                                          <p:stCondLst>
+                                            <p:cond delay="0"/>
+                                          </p:stCondLst>
+                                        </p:cTn>
+                                        <p:tgtEl>
+                                          <p:spTgt spid="3">
+                                            <p:txEl>
+                                              <p:pRg st="5" end="5"/>
+                                            </p:txEl>
+                                          </p:spTgt>
+                                        </p:tgtEl>
+                                        <p:attrNameLst>
+                                          <p:attrName>style.visibility</p:attrName>
+                                        </p:attrNameLst>
+                                      </p:cBhvr>
+                                      <p:to>
+                                        <p:strVal val="visible"/>
+                                      </p:to>
+                                    </p:set>
+                                  </p:childTnLst>
+                                </p:cTn>
+                              </p:par>
+                              <p:par>
+                                <p:cTn id="17" presetID="1" presetClass="entr" presetSubtype="0" fill="hold" nodeType="withEffect">
+                                  <p:stCondLst>
+                                    <p:cond delay="0"/>
+                                  </p:stCondLst>
+                                  <p:childTnLst>
+                                    <p:set>
+                                      <p:cBhvr>
+                                        <p:cTn id="18" dur="1" fill="hold">
+                                          <p:stCondLst>
+                                            <p:cond delay="0"/>
+                                          </p:stCondLst>
+                                        </p:cTn>
+                                        <p:tgtEl>
+                                          <p:spTgt spid="3">
+                                            <p:txEl>
+                                              <p:pRg st="6" end="6"/>
+                                            </p:txEl>
+                                          </p:spTgt>
+                                        </p:tgtEl>
+                                        <p:attrNameLst>
+                                          <p:attrName>style.visibility</p:attrName>
+                                        </p:attrNameLst>
+                                      </p:cBhvr>
+                                      <p:to>
+                                        <p:strVal val="visible"/>
+                                      </p:to>
+                                    </p:set>
+                                  </p:childTnLst>
+                                </p:cTn>
+                              </p:par>
+                            </p:childTnLst>
+                          </p:cTn>
+                        </p:par>
+                      </p:childTnLst>
+                    </p:cTn>
+                  </p:par>
+                  <p:par>
+                    <p:cTn id="19" fill="hold">
+                      <p:stCondLst>
+                        <p:cond delay="indefinite"/>
+                      </p:stCondLst>
+                      <p:childTnLst>
+                        <p:par>
+                          <p:cTn id="20" fill="hold">
+                            <p:stCondLst>
+                              <p:cond delay="0"/>
+                            </p:stCondLst>
+                            <p:childTnLst>
+                              <p:par>
+                                <p:cTn id="21" presetID="1" presetClass="entr" presetSubtype="0" fill="hold" nodeType="clickEffect">
+                                  <p:stCondLst>
+                                    <p:cond delay="0"/>
+                                  </p:stCondLst>
+                                  <p:childTnLst>
+                                    <p:set>
+                                      <p:cBhvr>
+                                        <p:cTn id="22" dur="1" fill="hold">
+                                          <p:stCondLst>
+                                            <p:cond delay="0"/>
+                                          </p:stCondLst>
+                                        </p:cTn>
+                                        <p:tgtEl>
+                                          <p:spTgt spid="3">
+                                            <p:txEl>
+                                              <p:pRg st="8" end="8"/>
+                                            </p:txEl>
+                                          </p:spTgt>
+                                        </p:tgtEl>
+                                        <p:attrNameLst>
+                                          <p:attrName>style.visibility</p:attrName>
+                                        </p:attrNameLst>
+                                      </p:cBhvr>
+                                      <p:to>
+                                        <p:strVal val="visible"/>
+                                      </p:to>
+                                    </p:set>
+                                  </p:childTnLst>
+                                </p:cTn>
+                              </p:par>
+                              <p:par>
+                                <p:cTn id="23" presetID="1" presetClass="entr" presetSubtype="0" fill="hold" nodeType="withEffect">
+                                  <p:stCondLst>
+                                    <p:cond delay="0"/>
+                                  </p:stCondLst>
+                                  <p:childTnLst>
+                                    <p:set>
+                                      <p:cBhvr>
+                                        <p:cTn id="24" dur="1" fill="hold">
+                                          <p:stCondLst>
+                                            <p:cond delay="0"/>
+                                          </p:stCondLst>
+                                        </p:cTn>
+                                        <p:tgtEl>
+                                          <p:spTgt spid="3">
+                                            <p:txEl>
+                                              <p:pRg st="9" end="9"/>
+                                            </p:txEl>
+                                          </p:spTgt>
+                                        </p:tgtEl>
+                                        <p:attrNameLst>
+                                          <p:attrName>style.visibility</p:attrName>
+                                        </p:attrNameLst>
+                                      </p:cBhvr>
+                                      <p:to>
+                                        <p:strVal val="visible"/>
+                                      </p:to>
+                                    </p:set>
+                                  </p:childTnLst>
+                                </p:cTn>
+                              </p:par>
+                              <p:par>
+                                <p:cTn id="25" presetID="1" presetClass="entr" presetSubtype="0" fill="hold" nodeType="withEffect">
+                                  <p:stCondLst>
+                                    <p:cond delay="0"/>
+                                  </p:stCondLst>
+                                  <p:childTnLst>
+                                    <p:set>
+                                      <p:cBhvr>
+                                        <p:cTn id="26" dur="1" fill="hold">
+                                          <p:stCondLst>
+                                            <p:cond delay="0"/>
+                                          </p:stCondLst>
+                                        </p:cTn>
+                                        <p:tgtEl>
+                                          <p:spTgt spid="3">
+                                            <p:txEl>
+                                              <p:pRg st="10" end="10"/>
+                                            </p:txEl>
+                                          </p:spTgt>
+                                        </p:tgtEl>
+                                        <p:attrNameLst>
+                                          <p:attrName>style.visibility</p:attrName>
+                                        </p:attrNameLst>
+                                      </p:cBhvr>
+                                      <p:to>
+                                        <p:strVal val="visible"/>
+                                      </p:to>
+                                    </p:set>
+                                  </p:childTnLst>
+                                </p:cTn>
+                              </p:par>
+                              <p:par>
+                                <p:cTn id="27" presetID="1" presetClass="entr" presetSubtype="0" fill="hold" nodeType="withEffect">
+                                  <p:stCondLst>
+                                    <p:cond delay="0"/>
+                                  </p:stCondLst>
+                                  <p:childTnLst>
+                                    <p:set>
+                                      <p:cBhvr>
+                                        <p:cTn id="28" dur="1" fill="hold">
+                                          <p:stCondLst>
+                                            <p:cond delay="0"/>
+                                          </p:stCondLst>
+                                        </p:cTn>
+                                        <p:tgtEl>
+                                          <p:spTgt spid="3">
+                                            <p:txEl>
+                                              <p:pRg st="11" end="11"/>
+                                            </p:txEl>
+                                          </p:spTgt>
+                                        </p:tgtEl>
+                                        <p:attrNameLst>
+                                          <p:attrName>style.visibility</p:attrName>
+                                        </p:attrNameLst>
+                                      </p:cBhvr>
+                                      <p:to>
+                                        <p:strVal val="visible"/>
+                                      </p:to>
+                                    </p:set>
+                                  </p:childTnLst>
+                                </p:cTn>
+                              </p:par>
+                              <p:par>
+                                <p:cTn id="29" presetID="1" presetClass="entr" presetSubtype="0" fill="hold" nodeType="withEffect">
+                                  <p:stCondLst>
+                                    <p:cond delay="0"/>
+                                  </p:stCondLst>
+                                  <p:childTnLst>
+                                    <p:set>
+                                      <p:cBhvr>
+                                        <p:cTn id="30" dur="1" fill="hold">
+                                          <p:stCondLst>
+                                            <p:cond delay="0"/>
+                                          </p:stCondLst>
+                                        </p:cTn>
+                                        <p:tgtEl>
+                                          <p:spTgt spid="3">
+                                            <p:txEl>
+                                              <p:pRg st="12" end="12"/>
+                                            </p:txEl>
+                                          </p:spTgt>
+                                        </p:tgtEl>
+                                        <p:attrNameLst>
+                                          <p:attrName>style.visibility</p:attrName>
+                                        </p:attrNameLst>
+                                      </p:cBhvr>
+                                      <p:to>
+                                        <p:strVal val="visible"/>
+                                      </p:to>
+                                    </p:set>
+                                  </p:childTnLst>
+                                </p:cTn>
+                              </p:par>
+                            </p:childTnLst>
+                          </p:cTn>
+                        </p:par>
+                      </p:childTnLst>
+                    </p:cTn>
+                  </p:par>
+                  <p:par>
+                    <p:cTn id="31" fill="hold">
+                      <p:stCondLst>
+                        <p:cond delay="indefinite"/>
+                      </p:stCondLst>
+                      <p:childTnLst>
+                        <p:par>
+                          <p:cTn id="32" fill="hold">
+                            <p:stCondLst>
+                              <p:cond delay="0"/>
+                            </p:stCondLst>
+                            <p:childTnLst>
+                              <p:par>
+                                <p:cTn id="33" presetID="1" presetClass="entr" presetSubtype="0" fill="hold" nodeType="clickEffect">
+                                  <p:stCondLst>
+                                    <p:cond delay="0"/>
+                                  </p:stCondLst>
+                                  <p:childTnLst>
+                                    <p:set>
+                                      <p:cBhvr>
+                                        <p:cTn id="34" dur="1" fill="hold">
+                                          <p:stCondLst>
+                                            <p:cond delay="0"/>
+                                          </p:stCondLst>
+                                        </p:cTn>
+                                        <p:tgtEl>
+                                          <p:spTgt spid="3">
+                                            <p:txEl>
+                                              <p:pRg st="14" end="14"/>
+                                            </p:txEl>
+                                          </p:spTgt>
+                                        </p:tgtEl>
+                                        <p:attrNameLst>
+                                          <p:attrName>style.visibility</p:attrName>
+                                        </p:attrNameLst>
+                                      </p:cBhvr>
+                                      <p:to>
+                                        <p:strVal val="visible"/>
+                                      </p:to>
+                                    </p:set>
+                                  </p:childTnLst>
+                                </p:cTn>
+                              </p:par>
+                              <p:par>
+                                <p:cTn id="35" presetID="1" presetClass="entr" presetSubtype="0" fill="hold" nodeType="withEffect">
+                                  <p:stCondLst>
+                                    <p:cond delay="0"/>
+                                  </p:stCondLst>
+                                  <p:childTnLst>
+                                    <p:set>
+                                      <p:cBhvr>
+                                        <p:cTn id="36" dur="1" fill="hold">
+                                          <p:stCondLst>
+                                            <p:cond delay="0"/>
+                                          </p:stCondLst>
+                                        </p:cTn>
+                                        <p:tgtEl>
+                                          <p:spTgt spid="3">
+                                            <p:txEl>
+                                              <p:pRg st="15" end="15"/>
+                                            </p:txEl>
+                                          </p:spTgt>
+                                        </p:tgtEl>
+                                        <p:attrNameLst>
+                                          <p:attrName>style.visibility</p:attrName>
+                                        </p:attrNameLst>
+                                      </p:cBhvr>
+                                      <p:to>
+                                        <p:strVal val="visible"/>
+                                      </p:to>
+                                    </p:set>
+                                  </p:childTnLst>
+                                </p:cTn>
+                              </p:par>
+                              <p:par>
+                                <p:cTn id="37" presetID="1" presetClass="entr" presetSubtype="0" fill="hold" nodeType="withEffect">
+                                  <p:stCondLst>
+                                    <p:cond delay="0"/>
+                                  </p:stCondLst>
+                                  <p:childTnLst>
+                                    <p:set>
+                                      <p:cBhvr>
+                                        <p:cTn id="38" dur="1" fill="hold">
+                                          <p:stCondLst>
+                                            <p:cond delay="0"/>
+                                          </p:stCondLst>
+                                        </p:cTn>
+                                        <p:tgtEl>
+                                          <p:spTgt spid="3">
+                                            <p:txEl>
+                                              <p:pRg st="16" end="16"/>
+                                            </p:txEl>
+                                          </p:spTgt>
+                                        </p:tgtEl>
+                                        <p:attrNameLst>
+                                          <p:attrName>style.visibility</p:attrName>
+                                        </p:attrNameLst>
+                                      </p:cBhvr>
+                                      <p:to>
+                                        <p:strVal val="visible"/>
+                                      </p:to>
+                                    </p:set>
+                                  </p:childTnLst>
+                                </p:cTn>
+                              </p:par>
+                              <p:par>
+                                <p:cTn id="39" presetID="1" presetClass="entr" presetSubtype="0" fill="hold" nodeType="withEffect">
+                                  <p:stCondLst>
+                                    <p:cond delay="0"/>
+                                  </p:stCondLst>
+                                  <p:childTnLst>
+                                    <p:set>
+                                      <p:cBhvr>
+                                        <p:cTn id="40" dur="1" fill="hold">
+                                          <p:stCondLst>
+                                            <p:cond delay="0"/>
+                                          </p:stCondLst>
+                                        </p:cTn>
+                                        <p:tgtEl>
+                                          <p:spTgt spid="3">
+                                            <p:txEl>
+                                              <p:pRg st="17" end="17"/>
+                                            </p:txEl>
+                                          </p:spTgt>
+                                        </p:tgtEl>
+                                        <p:attrNameLst>
+                                          <p:attrName>style.visibility</p:attrName>
+                                        </p:attrNameLst>
+                                      </p:cBhvr>
+                                      <p:to>
+                                        <p:strVal val="visible"/>
+                                      </p:to>
+                                    </p:set>
+                                  </p:childTnLst>
+                                </p:cTn>
+                              </p:par>
+                            </p:childTnLst>
+                          </p:cTn>
+                        </p:par>
+                      </p:childTnLst>
+                    </p:cTn>
+                  </p:par>
+                  <p:par>
+                    <p:cTn id="41" fill="hold">
+                      <p:stCondLst>
+                        <p:cond delay="indefinite"/>
+                      </p:stCondLst>
+                      <p:childTnLst>
+                        <p:par>
+                          <p:cTn id="42" fill="hold">
+                            <p:stCondLst>
+                              <p:cond delay="0"/>
+                            </p:stCondLst>
+                            <p:childTnLst>
+                              <p:par>
+                                <p:cTn id="43" presetID="1" presetClass="entr" presetSubtype="0" fill="hold" nodeType="clickEffect">
+                                  <p:stCondLst>
+                                    <p:cond delay="0"/>
+                                  </p:stCondLst>
+                                  <p:childTnLst>
+                                    <p:set>
+                                      <p:cBhvr>
+                                        <p:cTn id="44" dur="1" fill="hold">
+                                          <p:stCondLst>
+                                            <p:cond delay="0"/>
+                                          </p:stCondLst>
+                                        </p:cTn>
+                                        <p:tgtEl>
+                                          <p:spTgt spid="3">
+                                            <p:txEl>
+                                              <p:pRg st="19" end="19"/>
+                                            </p:txEl>
+                                          </p:spTgt>
+                                        </p:tgtEl>
+                                        <p:attrNameLst>
+                                          <p:attrName>style.visibility</p:attrName>
+                                        </p:attrNameLst>
+                                      </p:cBhvr>
+                                      <p:to>
+                                        <p:strVal val="visible"/>
+                                      </p:to>
+                                    </p:set>
+                                  </p:childTnLst>
+                                </p:cTn>
+                              </p:par>
+                              <p:par>
+                                <p:cTn id="45" presetID="1" presetClass="entr" presetSubtype="0" fill="hold" nodeType="withEffect">
+                                  <p:stCondLst>
+                                    <p:cond delay="0"/>
+                                  </p:stCondLst>
+                                  <p:childTnLst>
+                                    <p:set>
+                                      <p:cBhvr>
+                                        <p:cTn id="46" dur="1" fill="hold">
+                                          <p:stCondLst>
+                                            <p:cond delay="0"/>
+                                          </p:stCondLst>
+                                        </p:cTn>
+                                        <p:tgtEl>
+                                          <p:spTgt spid="3">
+                                            <p:txEl>
+                                              <p:pRg st="20" end="20"/>
+                                            </p:txEl>
+                                          </p:spTgt>
+                                        </p:tgtEl>
+                                        <p:attrNameLst>
+                                          <p:attrName>style.visibility</p:attrName>
+                                        </p:attrNameLst>
+                                      </p:cBhvr>
+                                      <p:to>
+                                        <p:strVal val="visible"/>
+                                      </p:to>
+                                    </p:set>
+                                  </p:childTnLst>
+                                </p:cTn>
+                              </p:par>
+                              <p:par>
+                                <p:cTn id="47" presetID="1" presetClass="entr" presetSubtype="0" fill="hold" nodeType="withEffect">
+                                  <p:stCondLst>
+                                    <p:cond delay="0"/>
+                                  </p:stCondLst>
+                                  <p:childTnLst>
+                                    <p:set>
+                                      <p:cBhvr>
+                                        <p:cTn id="48" dur="1" fill="hold">
+                                          <p:stCondLst>
+                                            <p:cond delay="0"/>
+                                          </p:stCondLst>
+                                        </p:cTn>
+                                        <p:tgtEl>
+                                          <p:spTgt spid="3">
+                                            <p:txEl>
+                                              <p:pRg st="21" end="21"/>
+                                            </p:txEl>
+                                          </p:spTgt>
+                                        </p:tgtEl>
+                                        <p:attrNameLst>
+                                          <p:attrName>style.visibility</p:attrName>
+                                        </p:attrNameLst>
+                                      </p:cBhvr>
+                                      <p:to>
+                                        <p:strVal val="visible"/>
+                                      </p:to>
+                                    </p:set>
+                                  </p:childTnLst>
+                                </p:cTn>
+                              </p:par>
+                            </p:childTnLst>
+                          </p:cTn>
+                        </p:par>
+                      </p:childTnLst>
+                    </p:cTn>
+                  </p:par>
+                </p:childTnLst>
+              </p:cTn>
+              <p:prevCondLst>
+                <p:cond evt="onPrev" delay="0">
+                  <p:tgtEl>
+                    <p:sldTgt/>
+                  </p:tgtEl>
+                </p:cond>
+              </p:prevCondLst>
+              <p:nextCondLst>
+                <p:cond evt="onNext" delay="0">
+                  <p:tgtEl>
+                    <p:sldTgt/>
+                  </p:tgtEl>
+                </p:cond>
+              </p:nextCondLst>
+            </p:seq>
+          </p:childTnLst>
+        </p:cTn>
+      </p:par>
+    </p:tnLst>
+  </p:timing>
 </p:sld>
 </file>
 
@@ -5397,7 +6075,7 @@
                             </p:stCondLst>
                             <p:childTnLst>
                               <p:par>
-                                <p:cTn id="5" presetID="10" presetClass="entr" presetSubtype="0" fill="hold" grpId="0" nodeType="clickEffect">
+                                <p:cTn id="5" presetID="1" presetClass="entr" presetSubtype="0" fill="hold" grpId="0" nodeType="clickEffect">
                                   <p:stCondLst>
                                     <p:cond delay="0"/>
                                   </p:stCondLst>
@@ -5410,7 +6088,7 @@
                                           </p:stCondLst>
                                         </p:cTn>
                                         <p:tgtEl>
-                                          <p:spTgt spid="7"/>
+                                          <p:spTgt spid="10"/>
                                         </p:tgtEl>
                                         <p:attrNameLst>
                                           <p:attrName>style.visibility</p:attrName>
@@ -5420,67 +6098,6 @@
                                         <p:strVal val="visible"/>
                                       </p:to>
                                     </p:set>
-                                    <p:animEffect transition="in" filter="fade">
-                                      <p:cBhvr>
-                                        <p:cTn id="7" dur="500"/>
-                                        <p:tgtEl>
-                                          <p:spTgt spid="7"/>
-                                        </p:tgtEl>
-                                      </p:cBhvr>
-                                    </p:animEffect>
-                                  </p:childTnLst>
-                                </p:cTn>
-                              </p:par>
-                            </p:childTnLst>
-                          </p:cTn>
-                        </p:par>
-                      </p:childTnLst>
-                    </p:cTn>
-                  </p:par>
-                  <p:par>
-                    <p:cTn id="8" fill="hold">
-                      <p:stCondLst>
-                        <p:cond delay="indefinite"/>
-                      </p:stCondLst>
-                      <p:childTnLst>
-                        <p:par>
-                          <p:cTn id="9" fill="hold">
-                            <p:stCondLst>
-                              <p:cond delay="0"/>
-                            </p:stCondLst>
-                            <p:childTnLst>
-                              <p:par>
-                                <p:cTn id="10" presetID="10" presetClass="entr" presetSubtype="0" fill="hold" grpId="0" nodeType="clickEffect">
-                                  <p:stCondLst>
-                                    <p:cond delay="0"/>
-                                  </p:stCondLst>
-                                  <p:childTnLst>
-                                    <p:set>
-                                      <p:cBhvr>
-                                        <p:cTn id="11" dur="1" fill="hold">
-                                          <p:stCondLst>
-                                            <p:cond delay="0"/>
-                                          </p:stCondLst>
-                                        </p:cTn>
-                                        <p:tgtEl>
-                                          <p:spTgt spid="8"/>
-                                        </p:tgtEl>
-                                        <p:attrNameLst>
-                                          <p:attrName>style.visibility</p:attrName>
-                                        </p:attrNameLst>
-                                      </p:cBhvr>
-                                      <p:to>
-                                        <p:strVal val="visible"/>
-                                      </p:to>
-                                    </p:set>
-                                    <p:animEffect transition="in" filter="fade">
-                                      <p:cBhvr>
-                                        <p:cTn id="12" dur="500"/>
-                                        <p:tgtEl>
-                                          <p:spTgt spid="8"/>
-                                        </p:tgtEl>
-                                      </p:cBhvr>
-                                    </p:animEffect>
                                   </p:childTnLst>
                                 </p:cTn>
                               </p:par>
@@ -5512,8 +6129,7 @@
       </p:par>
     </p:tnLst>
     <p:bldLst>
-      <p:bldP spid="8" grpId="0" animBg="1"/>
-      <p:bldP spid="7" grpId="0" animBg="1"/>
+      <p:bldP spid="10" grpId="0"/>
     </p:bldLst>
   </p:timing>
 </p:sld>
@@ -5679,7 +6295,7 @@
         <p:spPr>
           <a:xfrm>
             <a:off x="698500" y="1426580"/>
-            <a:ext cx="5270500" cy="307777"/>
+            <a:ext cx="5270500" cy="338554"/>
           </a:xfrm>
           <a:prstGeom prst="rect">
             <a:avLst/>
@@ -5694,14 +6310,14 @@
           <a:p>
             <a:pPr algn="ctr"/>
             <a:r>
-              <a:rPr lang="en-US" sz="1400" b="1">
+              <a:rPr lang="en-US" sz="1600" b="1">
                 <a:solidFill>
                   <a:srgbClr val="FF961E"/>
                 </a:solidFill>
               </a:rPr>
               <a:t>Manual Azure Service Bus SDK</a:t>
             </a:r>
-            <a:endParaRPr lang="ru-RU" sz="1400" b="1">
+            <a:endParaRPr lang="ru-RU" sz="1600" b="1">
               <a:solidFill>
                 <a:srgbClr val="FF961E"/>
               </a:solidFill>
@@ -5724,7 +6340,7 @@
         <p:spPr>
           <a:xfrm>
             <a:off x="6096000" y="1426580"/>
-            <a:ext cx="5397500" cy="307777"/>
+            <a:ext cx="5397500" cy="338554"/>
           </a:xfrm>
           <a:prstGeom prst="rect">
             <a:avLst/>
@@ -5739,7 +6355,7 @@
           <a:p>
             <a:pPr algn="ctr"/>
             <a:r>
-              <a:rPr lang="nb-NO" sz="1400" b="1" dirty="0" err="1">
+              <a:rPr lang="nb-NO" sz="1600" b="1" dirty="0" err="1">
                 <a:solidFill>
                   <a:srgbClr val="00C878"/>
                 </a:solidFill>
@@ -5747,14 +6363,14 @@
               <a:t>Dapr</a:t>
             </a:r>
             <a:r>
-              <a:rPr lang="nb-NO" sz="1400" b="1" dirty="0">
+              <a:rPr lang="nb-NO" sz="1600" b="1" dirty="0">
                 <a:solidFill>
                   <a:srgbClr val="00C878"/>
                 </a:solidFill>
               </a:rPr>
               <a:t> Pub/Sub</a:t>
             </a:r>
-            <a:endParaRPr lang="ru-RU" sz="1400" b="1" dirty="0">
+            <a:endParaRPr lang="ru-RU" sz="1600" b="1" dirty="0">
               <a:solidFill>
                 <a:srgbClr val="00C878"/>
               </a:solidFill>
@@ -5776,8 +6392,8 @@
         </p:nvSpPr>
         <p:spPr>
           <a:xfrm>
-            <a:off x="634999" y="1801914"/>
-            <a:ext cx="10922000" cy="307777"/>
+            <a:off x="634999" y="1971479"/>
+            <a:ext cx="10922000" cy="338554"/>
           </a:xfrm>
           <a:prstGeom prst="rect">
             <a:avLst/>
@@ -5791,14 +6407,14 @@
           <a:lstStyle/>
           <a:p>
             <a:r>
-              <a:rPr lang="nb-NO" sz="1400" b="1" dirty="0">
+              <a:rPr lang="nb-NO" sz="1600" b="1" dirty="0">
                 <a:solidFill>
                   <a:schemeClr val="bg2"/>
                 </a:solidFill>
               </a:rPr>
               <a:t>♦ Connection management</a:t>
             </a:r>
-            <a:endParaRPr lang="ru-RU" sz="1400" b="1" dirty="0">
+            <a:endParaRPr lang="ru-RU" sz="1600" b="1" dirty="0">
               <a:solidFill>
                 <a:schemeClr val="bg2"/>
               </a:solidFill>
@@ -5820,8 +6436,8 @@
         </p:nvSpPr>
         <p:spPr>
           <a:xfrm>
-            <a:off x="413152" y="2099680"/>
-            <a:ext cx="5555848" cy="276999"/>
+            <a:off x="413152" y="2269245"/>
+            <a:ext cx="5555848" cy="307777"/>
           </a:xfrm>
           <a:prstGeom prst="rect">
             <a:avLst/>
@@ -5837,14 +6453,22 @@
           <a:lstStyle/>
           <a:p>
             <a:r>
-              <a:rPr lang="en-US" sz="1200">
+              <a:rPr lang="en-US" sz="1400" dirty="0" err="1">
                 <a:solidFill>
                   <a:srgbClr val="FFC88C"/>
                 </a:solidFill>
               </a:rPr>
-              <a:t>ServiceBusClient + senders / receivers — connection lifecycle in app code</a:t>
-            </a:r>
-            <a:endParaRPr lang="ru-RU" sz="1200">
+              <a:t>ServiceBusClient</a:t>
+            </a:r>
+            <a:r>
+              <a:rPr lang="en-US" sz="1400" dirty="0">
+                <a:solidFill>
+                  <a:srgbClr val="FFC88C"/>
+                </a:solidFill>
+              </a:rPr>
+              <a:t> + senders / receivers — connection lifecycle in app code</a:t>
+            </a:r>
+            <a:endParaRPr lang="ru-RU" sz="1400" dirty="0">
               <a:solidFill>
                 <a:srgbClr val="FFC88C"/>
               </a:solidFill>
@@ -5866,8 +6490,8 @@
         </p:nvSpPr>
         <p:spPr>
           <a:xfrm>
-            <a:off x="6096000" y="2099680"/>
-            <a:ext cx="5682848" cy="276999"/>
+            <a:off x="6096000" y="2269245"/>
+            <a:ext cx="5682848" cy="307777"/>
           </a:xfrm>
           <a:prstGeom prst="rect">
             <a:avLst/>
@@ -5883,7 +6507,7 @@
           <a:lstStyle/>
           <a:p>
             <a:r>
-              <a:rPr lang="en-US" sz="1200" dirty="0">
+              <a:rPr lang="en-US" sz="1400" dirty="0">
                 <a:solidFill>
                   <a:srgbClr val="8CFFBE"/>
                 </a:solidFill>
@@ -5891,7 +6515,7 @@
               <a:t>Zero lines — </a:t>
             </a:r>
             <a:r>
-              <a:rPr lang="en-US" sz="1200" dirty="0" err="1">
+              <a:rPr lang="en-US" sz="1400" dirty="0" err="1">
                 <a:solidFill>
                   <a:srgbClr val="8CFFBE"/>
                 </a:solidFill>
@@ -5899,14 +6523,14 @@
               <a:t>Dapr</a:t>
             </a:r>
             <a:r>
-              <a:rPr lang="en-US" sz="1200" dirty="0">
+              <a:rPr lang="en-US" sz="1400" dirty="0">
                 <a:solidFill>
                   <a:srgbClr val="8CFFBE"/>
                 </a:solidFill>
               </a:rPr>
               <a:t> sidecar owns the connection entirely</a:t>
             </a:r>
-            <a:endParaRPr lang="ru-RU" sz="1200" dirty="0">
+            <a:endParaRPr lang="ru-RU" sz="1400" dirty="0">
               <a:solidFill>
                 <a:srgbClr val="8CFFBE"/>
               </a:solidFill>
@@ -5928,8 +6552,8 @@
         </p:nvSpPr>
         <p:spPr>
           <a:xfrm>
-            <a:off x="698500" y="2449902"/>
-            <a:ext cx="10922000" cy="307777"/>
+            <a:off x="666254" y="2899950"/>
+            <a:ext cx="10922000" cy="338554"/>
           </a:xfrm>
           <a:prstGeom prst="rect">
             <a:avLst/>
@@ -5954,14 +6578,14 @@
           </a:lstStyle>
           <a:p>
             <a:r>
-              <a:rPr lang="nb-NO" dirty="0"/>
+              <a:rPr lang="nb-NO" sz="1600" dirty="0"/>
               <a:t>♦ Broker </a:t>
             </a:r>
             <a:r>
-              <a:rPr lang="nb-NO" dirty="0" err="1"/>
+              <a:rPr lang="nb-NO" sz="1600" dirty="0" err="1"/>
               <a:t>coupling</a:t>
             </a:r>
-            <a:endParaRPr lang="ru-RU" dirty="0"/>
+            <a:endParaRPr lang="ru-RU" sz="1600" dirty="0"/>
           </a:p>
         </p:txBody>
       </p:sp>
@@ -5979,8 +6603,8 @@
         </p:nvSpPr>
         <p:spPr>
           <a:xfrm>
-            <a:off x="413152" y="2772780"/>
-            <a:ext cx="5555848" cy="276999"/>
+            <a:off x="380906" y="3222828"/>
+            <a:ext cx="5555848" cy="523220"/>
           </a:xfrm>
           <a:prstGeom prst="rect">
             <a:avLst/>
@@ -5996,14 +6620,22 @@
           <a:lstStyle/>
           <a:p>
             <a:r>
-              <a:rPr lang="en-US" sz="1200">
+              <a:rPr lang="en-US" sz="1400" dirty="0" err="1">
                 <a:solidFill>
                   <a:srgbClr val="FFC88C"/>
                 </a:solidFill>
               </a:rPr>
-              <a:t>Azure.Messaging.ServiceBus locks you to ASB; broker change means a rewrite</a:t>
-            </a:r>
-            <a:endParaRPr lang="ru-RU" sz="1200">
+              <a:t>Azure.Messaging.ServiceBus</a:t>
+            </a:r>
+            <a:r>
+              <a:rPr lang="en-US" sz="1400" dirty="0">
+                <a:solidFill>
+                  <a:srgbClr val="FFC88C"/>
+                </a:solidFill>
+              </a:rPr>
+              <a:t> locks you to ASB; broker change means a rewrite</a:t>
+            </a:r>
+            <a:endParaRPr lang="ru-RU" sz="1400" dirty="0">
               <a:solidFill>
                 <a:srgbClr val="FFC88C"/>
               </a:solidFill>
@@ -6025,8 +6657,8 @@
         </p:nvSpPr>
         <p:spPr>
           <a:xfrm>
-            <a:off x="6095999" y="2772780"/>
-            <a:ext cx="5715095" cy="276999"/>
+            <a:off x="6063753" y="3222828"/>
+            <a:ext cx="5715095" cy="523220"/>
           </a:xfrm>
           <a:prstGeom prst="rect">
             <a:avLst/>
@@ -6042,14 +6674,14 @@
           <a:lstStyle/>
           <a:p>
             <a:r>
-              <a:rPr lang="nb-NO" sz="1200" dirty="0">
+              <a:rPr lang="nb-NO" sz="1400" dirty="0">
                 <a:solidFill>
                   <a:srgbClr val="8CFFBE"/>
                 </a:solidFill>
               </a:rPr>
               <a:t>YAML component swap — RabbitMQ, Kafka, Redis Streams; app code unchanged</a:t>
             </a:r>
-            <a:endParaRPr lang="ru-RU" sz="1200" dirty="0">
+            <a:endParaRPr lang="ru-RU" sz="1400" dirty="0">
               <a:solidFill>
                 <a:srgbClr val="8CFFBE"/>
               </a:solidFill>
@@ -6071,8 +6703,8 @@
         </p:nvSpPr>
         <p:spPr>
           <a:xfrm>
-            <a:off x="698500" y="3173802"/>
-            <a:ext cx="10922000" cy="307777"/>
+            <a:off x="698500" y="3880827"/>
+            <a:ext cx="10922000" cy="338554"/>
           </a:xfrm>
           <a:prstGeom prst="rect">
             <a:avLst/>
@@ -6086,7 +6718,7 @@
           <a:lstStyle/>
           <a:p>
             <a:r>
-              <a:rPr lang="nb-NO" sz="1400" b="1" dirty="0">
+              <a:rPr lang="nb-NO" sz="1600" b="1" dirty="0">
                 <a:solidFill>
                   <a:schemeClr val="bg2"/>
                 </a:solidFill>
@@ -6094,14 +6726,14 @@
               <a:t>♦ </a:t>
             </a:r>
             <a:r>
-              <a:rPr lang="nb-NO" sz="1400" b="1" dirty="0" err="1">
+              <a:rPr lang="nb-NO" sz="1600" b="1" dirty="0" err="1">
                 <a:solidFill>
                   <a:schemeClr val="bg2"/>
                 </a:solidFill>
               </a:rPr>
               <a:t>Resiliency</a:t>
             </a:r>
-            <a:endParaRPr lang="ru-RU" sz="1400" b="1" dirty="0">
+            <a:endParaRPr lang="ru-RU" sz="1600" b="1" dirty="0">
               <a:solidFill>
                 <a:schemeClr val="bg2"/>
               </a:solidFill>
@@ -6123,8 +6755,8 @@
         </p:nvSpPr>
         <p:spPr>
           <a:xfrm>
-            <a:off x="413152" y="3481579"/>
-            <a:ext cx="5555848" cy="276999"/>
+            <a:off x="413152" y="4188604"/>
+            <a:ext cx="5555848" cy="307777"/>
           </a:xfrm>
           <a:prstGeom prst="rect">
             <a:avLst/>
@@ -6140,14 +6772,14 @@
           <a:lstStyle/>
           <a:p>
             <a:r>
-              <a:rPr lang="en-US" sz="1200">
+              <a:rPr lang="en-US" sz="1400" dirty="0">
                 <a:solidFill>
                   <a:srgbClr val="FFC88C"/>
                 </a:solidFill>
               </a:rPr>
               <a:t>Try/catch loops, manual retry policies, dead-letter wiring in every service</a:t>
             </a:r>
-            <a:endParaRPr lang="ru-RU" sz="1200">
+            <a:endParaRPr lang="ru-RU" sz="1400" dirty="0">
               <a:solidFill>
                 <a:srgbClr val="FFC88C"/>
               </a:solidFill>
@@ -6169,8 +6801,8 @@
         </p:nvSpPr>
         <p:spPr>
           <a:xfrm>
-            <a:off x="6095999" y="3481579"/>
-            <a:ext cx="5715095" cy="276999"/>
+            <a:off x="6095999" y="4188604"/>
+            <a:ext cx="5715095" cy="307777"/>
           </a:xfrm>
           <a:prstGeom prst="rect">
             <a:avLst/>
@@ -6186,14 +6818,14 @@
           <a:lstStyle/>
           <a:p>
             <a:r>
-              <a:rPr lang="en-US" sz="1200">
+              <a:rPr lang="en-US" sz="1400">
                 <a:solidFill>
                   <a:srgbClr val="8CFFBE"/>
                 </a:solidFill>
               </a:rPr>
               <a:t>Retries, timeouts, circuit breakers in resiliency.yaml — no code at all</a:t>
             </a:r>
-            <a:endParaRPr lang="ru-RU" sz="1200">
+            <a:endParaRPr lang="ru-RU" sz="1400">
               <a:solidFill>
                 <a:srgbClr val="8CFFBE"/>
               </a:solidFill>
@@ -6215,8 +6847,8 @@
         </p:nvSpPr>
         <p:spPr>
           <a:xfrm>
-            <a:off x="698500" y="3846902"/>
-            <a:ext cx="10922000" cy="307777"/>
+            <a:off x="666254" y="4723492"/>
+            <a:ext cx="10922000" cy="338554"/>
           </a:xfrm>
           <a:prstGeom prst="rect">
             <a:avLst/>
@@ -6230,7 +6862,7 @@
           <a:lstStyle/>
           <a:p>
             <a:r>
-              <a:rPr lang="nb-NO" sz="1400" b="1" dirty="0">
+              <a:rPr lang="nb-NO" sz="1600" b="1" dirty="0">
                 <a:solidFill>
                   <a:schemeClr val="bg2"/>
                 </a:solidFill>
@@ -6238,14 +6870,14 @@
               <a:t>♦ </a:t>
             </a:r>
             <a:r>
-              <a:rPr lang="nb-NO" sz="1400" b="1" dirty="0" err="1">
+              <a:rPr lang="nb-NO" sz="1600" b="1" dirty="0" err="1">
                 <a:solidFill>
                   <a:schemeClr val="bg2"/>
                 </a:solidFill>
               </a:rPr>
               <a:t>Observability</a:t>
             </a:r>
-            <a:endParaRPr lang="ru-RU" sz="1400" b="1" dirty="0">
+            <a:endParaRPr lang="ru-RU" sz="1600" b="1" dirty="0">
               <a:solidFill>
                 <a:schemeClr val="bg2"/>
               </a:solidFill>
@@ -6267,8 +6899,8 @@
         </p:nvSpPr>
         <p:spPr>
           <a:xfrm>
-            <a:off x="413152" y="4154679"/>
-            <a:ext cx="5555848" cy="276999"/>
+            <a:off x="380906" y="5031269"/>
+            <a:ext cx="5555848" cy="523220"/>
           </a:xfrm>
           <a:prstGeom prst="rect">
             <a:avLst/>
@@ -6284,14 +6916,14 @@
           <a:lstStyle/>
           <a:p>
             <a:r>
-              <a:rPr lang="en-US" sz="1200" dirty="0">
+              <a:rPr lang="en-US" sz="1400" dirty="0">
                 <a:solidFill>
                   <a:srgbClr val="FFC88C"/>
                 </a:solidFill>
               </a:rPr>
               <a:t>Manual correlation-ID threading; custom logging and metrics wiring per service</a:t>
             </a:r>
-            <a:endParaRPr lang="ru-RU" sz="1200" dirty="0">
+            <a:endParaRPr lang="ru-RU" sz="1400" dirty="0">
               <a:solidFill>
                 <a:srgbClr val="FFC88C"/>
               </a:solidFill>
@@ -6313,8 +6945,8 @@
         </p:nvSpPr>
         <p:spPr>
           <a:xfrm>
-            <a:off x="6095999" y="4154679"/>
-            <a:ext cx="5715095" cy="276999"/>
+            <a:off x="6063753" y="5031269"/>
+            <a:ext cx="5715095" cy="307777"/>
           </a:xfrm>
           <a:prstGeom prst="rect">
             <a:avLst/>
@@ -6330,14 +6962,30 @@
           <a:lstStyle/>
           <a:p>
             <a:r>
-              <a:rPr lang="en-US" sz="1200">
+              <a:rPr lang="en-US" sz="1400" dirty="0">
                 <a:solidFill>
                   <a:srgbClr val="8CFFBE"/>
                 </a:solidFill>
               </a:rPr>
-              <a:t>W3C trace context propagated automatically; OpenTelemetry export built in</a:t>
-            </a:r>
-            <a:endParaRPr lang="ru-RU" sz="1200">
+              <a:t>W3C trace context propagated automatically; </a:t>
+            </a:r>
+            <a:r>
+              <a:rPr lang="en-US" sz="1400" dirty="0" err="1">
+                <a:solidFill>
+                  <a:srgbClr val="8CFFBE"/>
+                </a:solidFill>
+              </a:rPr>
+              <a:t>OpenTelemetry</a:t>
+            </a:r>
+            <a:r>
+              <a:rPr lang="en-US" sz="1400" dirty="0">
+                <a:solidFill>
+                  <a:srgbClr val="8CFFBE"/>
+                </a:solidFill>
+              </a:rPr>
+              <a:t> export built in</a:t>
+            </a:r>
+            <a:endParaRPr lang="ru-RU" sz="1400" dirty="0">
               <a:solidFill>
                 <a:srgbClr val="8CFFBE"/>
               </a:solidFill>
@@ -6359,8 +7007,8 @@
         </p:nvSpPr>
         <p:spPr>
           <a:xfrm>
-            <a:off x="667634" y="4608902"/>
-            <a:ext cx="10922000" cy="307777"/>
+            <a:off x="635388" y="5642812"/>
+            <a:ext cx="10922000" cy="338554"/>
           </a:xfrm>
           <a:prstGeom prst="rect">
             <a:avLst/>
@@ -6374,7 +7022,7 @@
           <a:lstStyle/>
           <a:p>
             <a:r>
-              <a:rPr lang="nb-NO" sz="1400" b="1" dirty="0">
+              <a:rPr lang="nb-NO" sz="1600" b="1" dirty="0">
                 <a:solidFill>
                   <a:schemeClr val="bg2"/>
                 </a:solidFill>
@@ -6382,14 +7030,14 @@
               <a:t>♦ </a:t>
             </a:r>
             <a:r>
-              <a:rPr lang="nb-NO" sz="1400" b="1" dirty="0" err="1">
+              <a:rPr lang="nb-NO" sz="1600" b="1" dirty="0" err="1">
                 <a:solidFill>
                   <a:schemeClr val="bg2"/>
                 </a:solidFill>
               </a:rPr>
               <a:t>Failover</a:t>
             </a:r>
-            <a:endParaRPr lang="ru-RU" sz="1400" b="1" dirty="0">
+            <a:endParaRPr lang="ru-RU" sz="1600" b="1" dirty="0">
               <a:solidFill>
                 <a:schemeClr val="bg2"/>
               </a:solidFill>
@@ -6411,8 +7059,8 @@
         </p:nvSpPr>
         <p:spPr>
           <a:xfrm>
-            <a:off x="413152" y="4916679"/>
-            <a:ext cx="5555848" cy="276999"/>
+            <a:off x="380906" y="5950589"/>
+            <a:ext cx="5555848" cy="307777"/>
           </a:xfrm>
           <a:prstGeom prst="rect">
             <a:avLst/>
@@ -6428,14 +7076,14 @@
           <a:lstStyle/>
           <a:p>
             <a:r>
-              <a:rPr lang="en-US" sz="1200" dirty="0">
+              <a:rPr lang="en-US" sz="1400" dirty="0">
                 <a:solidFill>
                   <a:srgbClr val="FFC88C"/>
                 </a:solidFill>
               </a:rPr>
               <a:t>Manual custom implementation.</a:t>
             </a:r>
-            <a:endParaRPr lang="ru-RU" sz="1200" dirty="0">
+            <a:endParaRPr lang="ru-RU" sz="1400" dirty="0">
               <a:solidFill>
                 <a:srgbClr val="FFC88C"/>
               </a:solidFill>
@@ -6457,8 +7105,8 @@
         </p:nvSpPr>
         <p:spPr>
           <a:xfrm>
-            <a:off x="6095999" y="4916679"/>
-            <a:ext cx="5715095" cy="276999"/>
+            <a:off x="6063753" y="5950589"/>
+            <a:ext cx="5715095" cy="307777"/>
           </a:xfrm>
           <a:prstGeom prst="rect">
             <a:avLst/>
@@ -6474,14 +7122,14 @@
           <a:lstStyle/>
           <a:p>
             <a:r>
-              <a:rPr lang="en-US" sz="1200" dirty="0">
+              <a:rPr lang="en-US" sz="1400" dirty="0">
                 <a:solidFill>
                   <a:srgbClr val="8CFFBE"/>
                 </a:solidFill>
               </a:rPr>
               <a:t>Stateful actors support</a:t>
             </a:r>
-            <a:endParaRPr lang="ru-RU" sz="1200" dirty="0">
+            <a:endParaRPr lang="ru-RU" sz="1400" dirty="0">
               <a:solidFill>
                 <a:srgbClr val="8CFFBE"/>
               </a:solidFill>
@@ -7515,39 +8163,7 @@
                   <a:schemeClr val="accent1"/>
                 </a:solidFill>
               </a:rPr>
-              <a:t>Key </a:t>
-            </a:r>
-            <a:r>
-              <a:rPr lang="nb-NO" sz="1400" b="1" dirty="0" err="1">
-                <a:solidFill>
-                  <a:schemeClr val="accent1"/>
-                </a:solidFill>
-              </a:rPr>
-              <a:t>guarantees</a:t>
-            </a:r>
-            <a:r>
-              <a:rPr lang="nb-NO" sz="1400" b="1" dirty="0">
-                <a:solidFill>
-                  <a:schemeClr val="accent1"/>
-                </a:solidFill>
-              </a:rPr>
-              <a:t> from </a:t>
-            </a:r>
-            <a:r>
-              <a:rPr lang="nb-NO" sz="1400" b="1" dirty="0" err="1">
-                <a:solidFill>
-                  <a:schemeClr val="accent1"/>
-                </a:solidFill>
-              </a:rPr>
-              <a:t>Dapr</a:t>
-            </a:r>
-            <a:r>
-              <a:rPr lang="nb-NO" sz="1400" b="1" dirty="0">
-                <a:solidFill>
-                  <a:schemeClr val="accent1"/>
-                </a:solidFill>
-              </a:rPr>
-              <a:t>:</a:t>
+              <a:t>Key features from Dapr:</a:t>
             </a:r>
             <a:endParaRPr lang="ru-RU" sz="1400" b="1" dirty="0">
               <a:solidFill>
